--- a/graduation-project/中期/中期答辩_黄渊.pptx
+++ b/graduation-project/中期/中期答辩_黄渊.pptx
@@ -8,7 +8,7 @@
     <p:notesMasterId r:id="rId4"/>
   </p:notesMasterIdLst>
   <p:handoutMasterIdLst>
-    <p:handoutMasterId r:id="rId16"/>
+    <p:handoutMasterId r:id="rId24"/>
   </p:handoutMasterIdLst>
   <p:sldIdLst>
     <p:sldId id="516" r:id="rId3"/>
@@ -19,15 +19,23 @@
     <p:sldId id="524" r:id="rId9"/>
     <p:sldId id="526" r:id="rId10"/>
     <p:sldId id="528" r:id="rId11"/>
-    <p:sldId id="547" r:id="rId12"/>
-    <p:sldId id="533" r:id="rId13"/>
-    <p:sldId id="534" r:id="rId14"/>
-    <p:sldId id="535" r:id="rId15"/>
+    <p:sldId id="556" r:id="rId12"/>
+    <p:sldId id="547" r:id="rId13"/>
+    <p:sldId id="557" r:id="rId14"/>
+    <p:sldId id="558" r:id="rId15"/>
+    <p:sldId id="551" r:id="rId16"/>
+    <p:sldId id="552" r:id="rId17"/>
+    <p:sldId id="553" r:id="rId18"/>
+    <p:sldId id="554" r:id="rId19"/>
+    <p:sldId id="555" r:id="rId20"/>
+    <p:sldId id="533" r:id="rId21"/>
+    <p:sldId id="534" r:id="rId22"/>
+    <p:sldId id="535" r:id="rId23"/>
   </p:sldIdLst>
   <p:sldSz cx="12192000" cy="6858000"/>
   <p:notesSz cx="6858000" cy="9144000"/>
   <p:custDataLst>
-    <p:tags r:id="rId21"/>
+    <p:tags r:id="rId29"/>
   </p:custDataLst>
   <p:defaultTextStyle>
     <a:defPPr>
@@ -767,7 +775,7 @@
               <a:effectLst/>
               <a:latin typeface="等线" panose="02010600030101010101" pitchFamily="2" charset="-122"/>
               <a:ea typeface="等线" panose="02010600030101010101" pitchFamily="2" charset="-122"/>
-              <a:cs typeface="Times New Roman" panose="02020603050405020304" pitchFamily="18" charset="0"/>
+              <a:cs typeface="Times New Roman" panose="02020503050405090304" pitchFamily="18" charset="0"/>
             </a:endParaRPr>
           </a:p>
         </p:txBody>
@@ -815,7 +823,7 @@
                 <a:uLnTx/>
                 <a:uFillTx/>
                 <a:latin typeface="Calibri" panose="020F0502020204030204"/>
-                <a:ea typeface="宋体" panose="02010600030101010101" pitchFamily="2" charset="-122"/>
+                <a:ea typeface="宋体" pitchFamily="2" charset="-122"/>
                 <a:cs typeface="+mn-cs"/>
               </a:rPr>
             </a:fld>
@@ -830,7 +838,7 @@
               <a:uLnTx/>
               <a:uFillTx/>
               <a:latin typeface="Calibri" panose="020F0502020204030204"/>
-              <a:ea typeface="宋体" panose="02010600030101010101" pitchFamily="2" charset="-122"/>
+              <a:ea typeface="宋体" pitchFamily="2" charset="-122"/>
               <a:cs typeface="+mn-cs"/>
             </a:endParaRPr>
           </a:p>
@@ -935,7 +943,7 @@
                 <a:uLnTx/>
                 <a:uFillTx/>
                 <a:latin typeface="Calibri" panose="020F0502020204030204"/>
-                <a:ea typeface="宋体" panose="02010600030101010101" pitchFamily="2" charset="-122"/>
+                <a:ea typeface="宋体" pitchFamily="2" charset="-122"/>
                 <a:cs typeface="+mn-cs"/>
               </a:rPr>
             </a:fld>
@@ -950,7 +958,7 @@
               <a:uLnTx/>
               <a:uFillTx/>
               <a:latin typeface="Calibri" panose="020F0502020204030204"/>
-              <a:ea typeface="宋体" panose="02010600030101010101" pitchFamily="2" charset="-122"/>
+              <a:ea typeface="宋体" pitchFamily="2" charset="-122"/>
               <a:cs typeface="+mn-cs"/>
             </a:endParaRPr>
           </a:p>
@@ -1055,7 +1063,7 @@
                 <a:uLnTx/>
                 <a:uFillTx/>
                 <a:latin typeface="Calibri" panose="020F0502020204030204"/>
-                <a:ea typeface="宋体" panose="02010600030101010101" pitchFamily="2" charset="-122"/>
+                <a:ea typeface="宋体" pitchFamily="2" charset="-122"/>
                 <a:cs typeface="+mn-cs"/>
               </a:rPr>
             </a:fld>
@@ -1070,7 +1078,7 @@
               <a:uLnTx/>
               <a:uFillTx/>
               <a:latin typeface="Calibri" panose="020F0502020204030204"/>
-              <a:ea typeface="宋体" panose="02010600030101010101" pitchFamily="2" charset="-122"/>
+              <a:ea typeface="宋体" pitchFamily="2" charset="-122"/>
               <a:cs typeface="+mn-cs"/>
             </a:endParaRPr>
           </a:p>
@@ -1175,7 +1183,7 @@
                 <a:uLnTx/>
                 <a:uFillTx/>
                 <a:latin typeface="Calibri" panose="020F0502020204030204"/>
-                <a:ea typeface="宋体" panose="02010600030101010101" pitchFamily="2" charset="-122"/>
+                <a:ea typeface="宋体" pitchFamily="2" charset="-122"/>
                 <a:cs typeface="+mn-cs"/>
               </a:rPr>
             </a:fld>
@@ -1190,7 +1198,7 @@
               <a:uLnTx/>
               <a:uFillTx/>
               <a:latin typeface="Calibri" panose="020F0502020204030204"/>
-              <a:ea typeface="宋体" panose="02010600030101010101" pitchFamily="2" charset="-122"/>
+              <a:ea typeface="宋体" pitchFamily="2" charset="-122"/>
               <a:cs typeface="+mn-cs"/>
             </a:endParaRPr>
           </a:p>
@@ -1373,7 +1381,7 @@
                 <a:uLnTx/>
                 <a:uFillTx/>
                 <a:latin typeface="Calibri" panose="020F0502020204030204"/>
-                <a:ea typeface="宋体" panose="02010600030101010101" pitchFamily="2" charset="-122"/>
+                <a:ea typeface="宋体" pitchFamily="2" charset="-122"/>
                 <a:cs typeface="+mn-cs"/>
               </a:rPr>
             </a:fld>
@@ -1388,7 +1396,7 @@
               <a:uLnTx/>
               <a:uFillTx/>
               <a:latin typeface="Calibri" panose="020F0502020204030204"/>
-              <a:ea typeface="宋体" panose="02010600030101010101" pitchFamily="2" charset="-122"/>
+              <a:ea typeface="宋体" pitchFamily="2" charset="-122"/>
               <a:cs typeface="+mn-cs"/>
             </a:endParaRPr>
           </a:p>
@@ -3242,7 +3250,7 @@
                 <a:effectLst/>
                 <a:uLnTx/>
                 <a:uFillTx/>
-                <a:latin typeface="Arial" panose="020B0604020202020204"/>
+                <a:latin typeface="Arial" panose="020B0604020202090204"/>
                 <a:ea typeface="微软雅黑" panose="020B0503020204020204" charset="-122"/>
                 <a:cs typeface="+mn-cs"/>
               </a:endParaRPr>
@@ -3357,7 +3365,7 @@
                 <a:effectLst/>
                 <a:uLnTx/>
                 <a:uFillTx/>
-                <a:latin typeface="Arial" panose="020B0604020202020204"/>
+                <a:latin typeface="Arial" panose="020B0604020202090204"/>
                 <a:ea typeface="微软雅黑" panose="020B0503020204020204" charset="-122"/>
                 <a:cs typeface="+mn-cs"/>
               </a:endParaRPr>
@@ -3472,7 +3480,7 @@
                 <a:effectLst/>
                 <a:uLnTx/>
                 <a:uFillTx/>
-                <a:latin typeface="Arial" panose="020B0604020202020204"/>
+                <a:latin typeface="Arial" panose="020B0604020202090204"/>
                 <a:ea typeface="微软雅黑" panose="020B0503020204020204" charset="-122"/>
                 <a:cs typeface="+mn-cs"/>
               </a:endParaRPr>
@@ -3587,7 +3595,7 @@
                 <a:effectLst/>
                 <a:uLnTx/>
                 <a:uFillTx/>
-                <a:latin typeface="Arial" panose="020B0604020202020204"/>
+                <a:latin typeface="Arial" panose="020B0604020202090204"/>
                 <a:ea typeface="微软雅黑" panose="020B0503020204020204" charset="-122"/>
                 <a:cs typeface="+mn-cs"/>
               </a:endParaRPr>
@@ -3702,7 +3710,7 @@
                 <a:effectLst/>
                 <a:uLnTx/>
                 <a:uFillTx/>
-                <a:latin typeface="Arial" panose="020B0604020202020204"/>
+                <a:latin typeface="Arial" panose="020B0604020202090204"/>
                 <a:ea typeface="微软雅黑" panose="020B0503020204020204" charset="-122"/>
                 <a:cs typeface="+mn-cs"/>
               </a:endParaRPr>
@@ -4004,7 +4012,7 @@
                   <a:effectLst/>
                   <a:uLnTx/>
                   <a:uFillTx/>
-                  <a:latin typeface="Arial" panose="020B0604020202020204"/>
+                  <a:latin typeface="Arial" panose="020B0604020202090204"/>
                   <a:ea typeface="微软雅黑" panose="020B0503020204020204" charset="-122"/>
                   <a:cs typeface="+mn-cs"/>
                 </a:endParaRPr>
@@ -4304,7 +4312,7 @@
                   <a:effectLst/>
                   <a:uLnTx/>
                   <a:uFillTx/>
-                  <a:latin typeface="Arial" panose="020B0604020202020204"/>
+                  <a:latin typeface="Arial" panose="020B0604020202090204"/>
                   <a:ea typeface="微软雅黑" panose="020B0503020204020204" charset="-122"/>
                   <a:cs typeface="+mn-cs"/>
                 </a:endParaRPr>
@@ -4567,7 +4575,7 @@
                   <a:effectLst/>
                   <a:uLnTx/>
                   <a:uFillTx/>
-                  <a:latin typeface="Arial" panose="020B0604020202020204"/>
+                  <a:latin typeface="Arial" panose="020B0604020202090204"/>
                   <a:ea typeface="微软雅黑" panose="020B0503020204020204" charset="-122"/>
                   <a:cs typeface="+mn-cs"/>
                 </a:endParaRPr>
@@ -4752,7 +4760,7 @@
                   <a:effectLst/>
                   <a:uLnTx/>
                   <a:uFillTx/>
-                  <a:latin typeface="Arial" panose="020B0604020202020204"/>
+                  <a:latin typeface="Arial" panose="020B0604020202090204"/>
                   <a:ea typeface="微软雅黑" panose="020B0503020204020204" charset="-122"/>
                   <a:cs typeface="+mn-cs"/>
                 </a:endParaRPr>
@@ -5069,7 +5077,7 @@
                   <a:effectLst/>
                   <a:uLnTx/>
                   <a:uFillTx/>
-                  <a:latin typeface="Arial" panose="020B0604020202020204"/>
+                  <a:latin typeface="Arial" panose="020B0604020202090204"/>
                   <a:ea typeface="微软雅黑" panose="020B0503020204020204" charset="-122"/>
                   <a:cs typeface="+mn-cs"/>
                 </a:endParaRPr>
@@ -5243,7 +5251,7 @@
                   <a:effectLst/>
                   <a:uLnTx/>
                   <a:uFillTx/>
-                  <a:latin typeface="Arial" panose="020B0604020202020204"/>
+                  <a:latin typeface="Arial" panose="020B0604020202090204"/>
                   <a:ea typeface="微软雅黑" panose="020B0503020204020204" charset="-122"/>
                   <a:cs typeface="+mn-cs"/>
                 </a:endParaRPr>
@@ -5480,7 +5488,7 @@
                   <a:effectLst/>
                   <a:uLnTx/>
                   <a:uFillTx/>
-                  <a:latin typeface="Arial" panose="020B0604020202020204"/>
+                  <a:latin typeface="Arial" panose="020B0604020202090204"/>
                   <a:ea typeface="微软雅黑" panose="020B0503020204020204" charset="-122"/>
                   <a:cs typeface="+mn-cs"/>
                 </a:endParaRPr>
@@ -5717,7 +5725,7 @@
                   <a:effectLst/>
                   <a:uLnTx/>
                   <a:uFillTx/>
-                  <a:latin typeface="Arial" panose="020B0604020202020204"/>
+                  <a:latin typeface="Arial" panose="020B0604020202090204"/>
                   <a:ea typeface="微软雅黑" panose="020B0503020204020204" charset="-122"/>
                   <a:cs typeface="+mn-cs"/>
                 </a:endParaRPr>
@@ -5980,7 +5988,7 @@
                   <a:effectLst/>
                   <a:uLnTx/>
                   <a:uFillTx/>
-                  <a:latin typeface="Arial" panose="020B0604020202020204"/>
+                  <a:latin typeface="Arial" panose="020B0604020202090204"/>
                   <a:ea typeface="微软雅黑" panose="020B0503020204020204" charset="-122"/>
                   <a:cs typeface="+mn-cs"/>
                 </a:endParaRPr>
@@ -6161,7 +6169,7 @@
                   <a:effectLst/>
                   <a:uLnTx/>
                   <a:uFillTx/>
-                  <a:latin typeface="Arial" panose="020B0604020202020204"/>
+                  <a:latin typeface="Arial" panose="020B0604020202090204"/>
                   <a:ea typeface="微软雅黑" panose="020B0503020204020204" charset="-122"/>
                   <a:cs typeface="+mn-cs"/>
                 </a:endParaRPr>
@@ -6388,7 +6396,7 @@
                   <a:effectLst/>
                   <a:uLnTx/>
                   <a:uFillTx/>
-                  <a:latin typeface="Arial" panose="020B0604020202020204"/>
+                  <a:latin typeface="Arial" panose="020B0604020202090204"/>
                   <a:ea typeface="微软雅黑" panose="020B0503020204020204" charset="-122"/>
                   <a:cs typeface="+mn-cs"/>
                 </a:endParaRPr>
@@ -6657,7 +6665,7 @@
                   <a:effectLst/>
                   <a:uLnTx/>
                   <a:uFillTx/>
-                  <a:latin typeface="Arial" panose="020B0604020202020204"/>
+                  <a:latin typeface="Arial" panose="020B0604020202090204"/>
                   <a:ea typeface="微软雅黑" panose="020B0503020204020204" charset="-122"/>
                   <a:cs typeface="+mn-cs"/>
                 </a:endParaRPr>
@@ -6981,7 +6989,7 @@
                   <a:effectLst/>
                   <a:uLnTx/>
                   <a:uFillTx/>
-                  <a:latin typeface="Arial" panose="020B0604020202020204"/>
+                  <a:latin typeface="Arial" panose="020B0604020202090204"/>
                   <a:ea typeface="微软雅黑" panose="020B0503020204020204" charset="-122"/>
                   <a:cs typeface="+mn-cs"/>
                 </a:endParaRPr>
@@ -7266,7 +7274,7 @@
                   <a:effectLst/>
                   <a:uLnTx/>
                   <a:uFillTx/>
-                  <a:latin typeface="Arial" panose="020B0604020202020204"/>
+                  <a:latin typeface="Arial" panose="020B0604020202090204"/>
                   <a:ea typeface="微软雅黑" panose="020B0503020204020204" charset="-122"/>
                   <a:cs typeface="+mn-cs"/>
                 </a:endParaRPr>
@@ -7447,7 +7455,7 @@
                   <a:effectLst/>
                   <a:uLnTx/>
                   <a:uFillTx/>
-                  <a:latin typeface="Arial" panose="020B0604020202020204"/>
+                  <a:latin typeface="Arial" panose="020B0604020202090204"/>
                   <a:ea typeface="微软雅黑" panose="020B0503020204020204" charset="-122"/>
                   <a:cs typeface="+mn-cs"/>
                 </a:endParaRPr>
@@ -7644,7 +7652,7 @@
                   <a:effectLst/>
                   <a:uLnTx/>
                   <a:uFillTx/>
-                  <a:latin typeface="Arial" panose="020B0604020202020204"/>
+                  <a:latin typeface="Arial" panose="020B0604020202090204"/>
                   <a:ea typeface="微软雅黑" panose="020B0503020204020204" charset="-122"/>
                   <a:cs typeface="+mn-cs"/>
                 </a:endParaRPr>
@@ -7931,7 +7939,7 @@
                   <a:effectLst/>
                   <a:uLnTx/>
                   <a:uFillTx/>
-                  <a:latin typeface="Arial" panose="020B0604020202020204"/>
+                  <a:latin typeface="Arial" panose="020B0604020202090204"/>
                   <a:ea typeface="微软雅黑" panose="020B0503020204020204" charset="-122"/>
                   <a:cs typeface="+mn-cs"/>
                 </a:endParaRPr>
@@ -8048,7 +8056,7 @@
                   <a:effectLst/>
                   <a:uLnTx/>
                   <a:uFillTx/>
-                  <a:latin typeface="Arial" panose="020B0604020202020204"/>
+                  <a:latin typeface="Arial" panose="020B0604020202090204"/>
                   <a:ea typeface="微软雅黑" panose="020B0503020204020204" charset="-122"/>
                   <a:cs typeface="+mn-cs"/>
                 </a:endParaRPr>
@@ -8165,7 +8173,7 @@
                   <a:effectLst/>
                   <a:uLnTx/>
                   <a:uFillTx/>
-                  <a:latin typeface="Arial" panose="020B0604020202020204"/>
+                  <a:latin typeface="Arial" panose="020B0604020202090204"/>
                   <a:ea typeface="微软雅黑" panose="020B0503020204020204" charset="-122"/>
                   <a:cs typeface="+mn-cs"/>
                 </a:endParaRPr>
@@ -8339,7 +8347,7 @@
                   <a:effectLst/>
                   <a:uLnTx/>
                   <a:uFillTx/>
-                  <a:latin typeface="Arial" panose="020B0604020202020204"/>
+                  <a:latin typeface="Arial" panose="020B0604020202090204"/>
                   <a:ea typeface="微软雅黑" panose="020B0503020204020204" charset="-122"/>
                   <a:cs typeface="+mn-cs"/>
                 </a:endParaRPr>
@@ -8513,7 +8521,7 @@
                   <a:effectLst/>
                   <a:uLnTx/>
                   <a:uFillTx/>
-                  <a:latin typeface="Arial" panose="020B0604020202020204"/>
+                  <a:latin typeface="Arial" panose="020B0604020202090204"/>
                   <a:ea typeface="微软雅黑" panose="020B0503020204020204" charset="-122"/>
                   <a:cs typeface="+mn-cs"/>
                 </a:endParaRPr>
@@ -14104,7 +14112,7 @@
                   <a:effectLst/>
                   <a:uLnTx/>
                   <a:uFillTx/>
-                  <a:latin typeface="Arial" panose="020B0604020202020204"/>
+                  <a:latin typeface="Arial" panose="020B0604020202090204"/>
                   <a:ea typeface="微软雅黑" panose="020B0503020204020204" charset="-122"/>
                   <a:cs typeface="+mn-cs"/>
                 </a:endParaRPr>
@@ -14699,7 +14707,7 @@
                   <a:effectLst/>
                   <a:uLnTx/>
                   <a:uFillTx/>
-                  <a:latin typeface="Arial" panose="020B0604020202020204"/>
+                  <a:latin typeface="Arial" panose="020B0604020202090204"/>
                   <a:ea typeface="微软雅黑" panose="020B0503020204020204" charset="-122"/>
                   <a:cs typeface="+mn-cs"/>
                 </a:endParaRPr>
@@ -15932,7 +15940,7 @@
                   <a:effectLst/>
                   <a:uLnTx/>
                   <a:uFillTx/>
-                  <a:latin typeface="Arial" panose="020B0604020202020204"/>
+                  <a:latin typeface="Arial" panose="020B0604020202090204"/>
                   <a:ea typeface="微软雅黑" panose="020B0503020204020204" charset="-122"/>
                   <a:cs typeface="+mn-cs"/>
                 </a:endParaRPr>
@@ -17930,7 +17938,7 @@
                   <a:effectLst/>
                   <a:uLnTx/>
                   <a:uFillTx/>
-                  <a:latin typeface="Arial" panose="020B0604020202020204"/>
+                  <a:latin typeface="Arial" panose="020B0604020202090204"/>
                   <a:ea typeface="微软雅黑" panose="020B0503020204020204" charset="-122"/>
                   <a:cs typeface="+mn-cs"/>
                 </a:endParaRPr>
@@ -20484,7 +20492,7 @@
                   <a:effectLst/>
                   <a:uLnTx/>
                   <a:uFillTx/>
-                  <a:latin typeface="Arial" panose="020B0604020202020204"/>
+                  <a:latin typeface="Arial" panose="020B0604020202090204"/>
                   <a:ea typeface="微软雅黑" panose="020B0503020204020204" charset="-122"/>
                   <a:cs typeface="+mn-cs"/>
                 </a:endParaRPr>
@@ -21515,7 +21523,7 @@
                   <a:effectLst/>
                   <a:uLnTx/>
                   <a:uFillTx/>
-                  <a:latin typeface="Arial" panose="020B0604020202020204"/>
+                  <a:latin typeface="Arial" panose="020B0604020202090204"/>
                   <a:ea typeface="微软雅黑" panose="020B0503020204020204" charset="-122"/>
                   <a:cs typeface="+mn-cs"/>
                 </a:endParaRPr>
@@ -21725,7 +21733,7 @@
                 <a:effectLst/>
                 <a:uLnTx/>
                 <a:uFillTx/>
-                <a:latin typeface="Arial" panose="020B0604020202020204"/>
+                <a:latin typeface="Arial" panose="020B0604020202090204"/>
                 <a:ea typeface="微软雅黑" panose="020B0503020204020204" charset="-122"/>
                 <a:cs typeface="+mn-cs"/>
               </a:endParaRPr>
@@ -21840,7 +21848,7 @@
                 <a:effectLst/>
                 <a:uLnTx/>
                 <a:uFillTx/>
-                <a:latin typeface="Arial" panose="020B0604020202020204"/>
+                <a:latin typeface="Arial" panose="020B0604020202090204"/>
                 <a:ea typeface="微软雅黑" panose="020B0503020204020204" charset="-122"/>
                 <a:cs typeface="+mn-cs"/>
               </a:endParaRPr>
@@ -21955,7 +21963,7 @@
                 <a:effectLst/>
                 <a:uLnTx/>
                 <a:uFillTx/>
-                <a:latin typeface="Arial" panose="020B0604020202020204"/>
+                <a:latin typeface="Arial" panose="020B0604020202090204"/>
                 <a:ea typeface="微软雅黑" panose="020B0503020204020204" charset="-122"/>
                 <a:cs typeface="+mn-cs"/>
               </a:endParaRPr>
@@ -22070,7 +22078,7 @@
                 <a:effectLst/>
                 <a:uLnTx/>
                 <a:uFillTx/>
-                <a:latin typeface="Arial" panose="020B0604020202020204"/>
+                <a:latin typeface="Arial" panose="020B0604020202090204"/>
                 <a:ea typeface="微软雅黑" panose="020B0503020204020204" charset="-122"/>
                 <a:cs typeface="+mn-cs"/>
               </a:endParaRPr>
@@ -22185,7 +22193,7 @@
                 <a:effectLst/>
                 <a:uLnTx/>
                 <a:uFillTx/>
-                <a:latin typeface="Arial" panose="020B0604020202020204"/>
+                <a:latin typeface="Arial" panose="020B0604020202090204"/>
                 <a:ea typeface="微软雅黑" panose="020B0503020204020204" charset="-122"/>
                 <a:cs typeface="+mn-cs"/>
               </a:endParaRPr>
@@ -22357,7 +22365,7 @@
                 <a:effectLst/>
                 <a:uLnTx/>
                 <a:uFillTx/>
-                <a:latin typeface="Arial" panose="020B0604020202020204"/>
+                <a:latin typeface="Arial" panose="020B0604020202090204"/>
                 <a:ea typeface="微软雅黑" panose="020B0503020204020204" charset="-122"/>
                 <a:cs typeface="+mn-cs"/>
               </a:endParaRPr>
@@ -22472,7 +22480,7 @@
                 <a:effectLst/>
                 <a:uLnTx/>
                 <a:uFillTx/>
-                <a:latin typeface="Arial" panose="020B0604020202020204"/>
+                <a:latin typeface="Arial" panose="020B0604020202090204"/>
                 <a:ea typeface="微软雅黑" panose="020B0503020204020204" charset="-122"/>
                 <a:cs typeface="+mn-cs"/>
               </a:endParaRPr>
@@ -22587,7 +22595,7 @@
                 <a:effectLst/>
                 <a:uLnTx/>
                 <a:uFillTx/>
-                <a:latin typeface="Arial" panose="020B0604020202020204"/>
+                <a:latin typeface="Arial" panose="020B0604020202090204"/>
                 <a:ea typeface="微软雅黑" panose="020B0503020204020204" charset="-122"/>
                 <a:cs typeface="+mn-cs"/>
               </a:endParaRPr>
@@ -22702,7 +22710,7 @@
                 <a:effectLst/>
                 <a:uLnTx/>
                 <a:uFillTx/>
-                <a:latin typeface="Arial" panose="020B0604020202020204"/>
+                <a:latin typeface="Arial" panose="020B0604020202090204"/>
                 <a:ea typeface="微软雅黑" panose="020B0503020204020204" charset="-122"/>
                 <a:cs typeface="+mn-cs"/>
               </a:endParaRPr>
@@ -22817,7 +22825,7 @@
                 <a:effectLst/>
                 <a:uLnTx/>
                 <a:uFillTx/>
-                <a:latin typeface="Arial" panose="020B0604020202020204"/>
+                <a:latin typeface="Arial" panose="020B0604020202090204"/>
                 <a:ea typeface="微软雅黑" panose="020B0503020204020204" charset="-122"/>
                 <a:cs typeface="+mn-cs"/>
               </a:endParaRPr>
@@ -22987,7 +22995,7 @@
                 <a:effectLst/>
                 <a:uLnTx/>
                 <a:uFillTx/>
-                <a:latin typeface="Arial" panose="020B0604020202020204"/>
+                <a:latin typeface="Arial" panose="020B0604020202090204"/>
                 <a:ea typeface="微软雅黑" panose="020B0503020204020204" charset="-122"/>
                 <a:cs typeface="+mn-cs"/>
               </a:rPr>
@@ -23004,7 +23012,7 @@
               <a:effectLst/>
               <a:uLnTx/>
               <a:uFillTx/>
-              <a:latin typeface="Arial" panose="020B0604020202020204"/>
+              <a:latin typeface="Arial" panose="020B0604020202090204"/>
               <a:ea typeface="微软雅黑" panose="020B0503020204020204" charset="-122"/>
               <a:cs typeface="+mn-cs"/>
             </a:endParaRPr>
@@ -23054,7 +23062,7 @@
               <a:effectLst/>
               <a:uLnTx/>
               <a:uFillTx/>
-              <a:latin typeface="Arial" panose="020B0604020202020204"/>
+              <a:latin typeface="Arial" panose="020B0604020202090204"/>
               <a:ea typeface="微软雅黑" panose="020B0503020204020204" charset="-122"/>
               <a:cs typeface="+mn-cs"/>
             </a:endParaRPr>
@@ -23105,7 +23113,7 @@
                 <a:effectLst/>
                 <a:uLnTx/>
                 <a:uFillTx/>
-                <a:latin typeface="Arial" panose="020B0604020202020204"/>
+                <a:latin typeface="Arial" panose="020B0604020202090204"/>
                 <a:ea typeface="微软雅黑" panose="020B0503020204020204" charset="-122"/>
                 <a:cs typeface="+mn-cs"/>
               </a:rPr>
@@ -23122,7 +23130,7 @@
               <a:effectLst/>
               <a:uLnTx/>
               <a:uFillTx/>
-              <a:latin typeface="Arial" panose="020B0604020202020204"/>
+              <a:latin typeface="Arial" panose="020B0604020202090204"/>
               <a:ea typeface="微软雅黑" panose="020B0503020204020204" charset="-122"/>
               <a:cs typeface="+mn-cs"/>
             </a:endParaRPr>
@@ -23272,7 +23280,7 @@
                 <a:effectLst/>
                 <a:uLnTx/>
                 <a:uFillTx/>
-                <a:latin typeface="Arial" panose="020B0604020202020204"/>
+                <a:latin typeface="Arial" panose="020B0604020202090204"/>
                 <a:ea typeface="微软雅黑" panose="020B0503020204020204" charset="-122"/>
                 <a:cs typeface="+mn-cs"/>
               </a:endParaRPr>
@@ -23346,7 +23354,7 @@
                 <a:effectLst/>
                 <a:uLnTx/>
                 <a:uFillTx/>
-                <a:latin typeface="Arial" panose="020B0604020202020204"/>
+                <a:latin typeface="Arial" panose="020B0604020202090204"/>
                 <a:ea typeface="微软雅黑" panose="020B0503020204020204" charset="-122"/>
                 <a:cs typeface="+mn-cs"/>
               </a:endParaRPr>
@@ -23440,7 +23448,7 @@
                 <a:effectLst/>
                 <a:uLnTx/>
                 <a:uFillTx/>
-                <a:latin typeface="Arial" panose="020B0604020202020204"/>
+                <a:latin typeface="Arial" panose="020B0604020202090204"/>
                 <a:ea typeface="微软雅黑" panose="020B0503020204020204" charset="-122"/>
                 <a:cs typeface="+mn-cs"/>
               </a:endParaRPr>
@@ -23517,7 +23525,7 @@
                 <a:effectLst/>
                 <a:uLnTx/>
                 <a:uFillTx/>
-                <a:latin typeface="Arial" panose="020B0604020202020204"/>
+                <a:latin typeface="Arial" panose="020B0604020202090204"/>
                 <a:ea typeface="微软雅黑" panose="020B0503020204020204" charset="-122"/>
                 <a:cs typeface="+mn-cs"/>
               </a:endParaRPr>
@@ -23596,7 +23604,7 @@
                 <a:effectLst/>
                 <a:uLnTx/>
                 <a:uFillTx/>
-                <a:latin typeface="Arial" panose="020B0604020202020204"/>
+                <a:latin typeface="Arial" panose="020B0604020202090204"/>
                 <a:ea typeface="微软雅黑" panose="020B0503020204020204" charset="-122"/>
                 <a:cs typeface="+mn-cs"/>
               </a:endParaRPr>
@@ -23690,7 +23698,7 @@
                 <a:effectLst/>
                 <a:uLnTx/>
                 <a:uFillTx/>
-                <a:latin typeface="Arial" panose="020B0604020202020204"/>
+                <a:latin typeface="Arial" panose="020B0604020202090204"/>
                 <a:ea typeface="微软雅黑" panose="020B0503020204020204" charset="-122"/>
                 <a:cs typeface="+mn-cs"/>
               </a:endParaRPr>
@@ -23767,7 +23775,7 @@
                 <a:effectLst/>
                 <a:uLnTx/>
                 <a:uFillTx/>
-                <a:latin typeface="Arial" panose="020B0604020202020204"/>
+                <a:latin typeface="Arial" panose="020B0604020202090204"/>
                 <a:ea typeface="微软雅黑" panose="020B0503020204020204" charset="-122"/>
                 <a:cs typeface="+mn-cs"/>
               </a:endParaRPr>
@@ -23846,7 +23854,7 @@
                 <a:effectLst/>
                 <a:uLnTx/>
                 <a:uFillTx/>
-                <a:latin typeface="Arial" panose="020B0604020202020204"/>
+                <a:latin typeface="Arial" panose="020B0604020202090204"/>
                 <a:ea typeface="微软雅黑" panose="020B0503020204020204" charset="-122"/>
                 <a:cs typeface="+mn-cs"/>
               </a:endParaRPr>
@@ -26430,7 +26438,7 @@
         <a:spcAft>
           <a:spcPct val="0"/>
         </a:spcAft>
-        <a:buFont typeface="Arial" panose="020B0604020202020204" pitchFamily="34" charset="0"/>
+        <a:buFont typeface="Arial" panose="020B0604020202090204" pitchFamily="34" charset="0"/>
         <a:buChar char="•"/>
         <a:defRPr sz="2800" kern="1200">
           <a:solidFill>
@@ -26451,7 +26459,7 @@
         <a:spcAft>
           <a:spcPct val="0"/>
         </a:spcAft>
-        <a:buFont typeface="Arial" panose="020B0604020202020204" pitchFamily="34" charset="0"/>
+        <a:buFont typeface="Arial" panose="020B0604020202090204" pitchFamily="34" charset="0"/>
         <a:buChar char="•"/>
         <a:defRPr sz="2400" kern="1200">
           <a:solidFill>
@@ -26472,7 +26480,7 @@
         <a:spcAft>
           <a:spcPct val="0"/>
         </a:spcAft>
-        <a:buFont typeface="Arial" panose="020B0604020202020204" pitchFamily="34" charset="0"/>
+        <a:buFont typeface="Arial" panose="020B0604020202090204" pitchFamily="34" charset="0"/>
         <a:buChar char="•"/>
         <a:defRPr sz="2000" kern="1200">
           <a:solidFill>
@@ -26493,7 +26501,7 @@
         <a:spcAft>
           <a:spcPct val="0"/>
         </a:spcAft>
-        <a:buFont typeface="Arial" panose="020B0604020202020204" pitchFamily="34" charset="0"/>
+        <a:buFont typeface="Arial" panose="020B0604020202090204" pitchFamily="34" charset="0"/>
         <a:buChar char="•"/>
         <a:defRPr kern="1200">
           <a:solidFill>
@@ -26514,7 +26522,7 @@
         <a:spcAft>
           <a:spcPct val="0"/>
         </a:spcAft>
-        <a:buFont typeface="Arial" panose="020B0604020202020204" pitchFamily="34" charset="0"/>
+        <a:buFont typeface="Arial" panose="020B0604020202090204" pitchFamily="34" charset="0"/>
         <a:buChar char="•"/>
         <a:defRPr kern="1200">
           <a:solidFill>
@@ -26532,7 +26540,7 @@
         <a:spcBef>
           <a:spcPts val="500"/>
         </a:spcBef>
-        <a:buFont typeface="Arial" panose="020B0604020202020204" pitchFamily="34" charset="0"/>
+        <a:buFont typeface="Arial" panose="020B0604020202090204" pitchFamily="34" charset="0"/>
         <a:buChar char="•"/>
         <a:defRPr sz="1800" kern="1200">
           <a:solidFill>
@@ -26550,7 +26558,7 @@
         <a:spcBef>
           <a:spcPts val="500"/>
         </a:spcBef>
-        <a:buFont typeface="Arial" panose="020B0604020202020204" pitchFamily="34" charset="0"/>
+        <a:buFont typeface="Arial" panose="020B0604020202090204" pitchFamily="34" charset="0"/>
         <a:buChar char="•"/>
         <a:defRPr sz="1800" kern="1200">
           <a:solidFill>
@@ -26568,7 +26576,7 @@
         <a:spcBef>
           <a:spcPts val="500"/>
         </a:spcBef>
-        <a:buFont typeface="Arial" panose="020B0604020202020204" pitchFamily="34" charset="0"/>
+        <a:buFont typeface="Arial" panose="020B0604020202090204" pitchFamily="34" charset="0"/>
         <a:buChar char="•"/>
         <a:defRPr sz="1800" kern="1200">
           <a:solidFill>
@@ -26586,7 +26594,7 @@
         <a:spcBef>
           <a:spcPts val="500"/>
         </a:spcBef>
-        <a:buFont typeface="Arial" panose="020B0604020202020204" pitchFamily="34" charset="0"/>
+        <a:buFont typeface="Arial" panose="020B0604020202090204" pitchFamily="34" charset="0"/>
         <a:buChar char="•"/>
         <a:defRPr sz="1800" kern="1200">
           <a:solidFill>
@@ -27740,6 +27748,4585 @@
 </file>
 
 <file path=ppt/slides/slide10.xml><?xml version="1.0" encoding="utf-8"?>
+<p:sld xmlns:a="http://schemas.openxmlformats.org/drawingml/2006/main" xmlns:r="http://schemas.openxmlformats.org/officeDocument/2006/relationships" xmlns:p="http://schemas.openxmlformats.org/presentationml/2006/main">
+  <p:cSld>
+    <p:spTree>
+      <p:nvGrpSpPr>
+        <p:cNvPr id="1" name=""/>
+        <p:cNvGrpSpPr/>
+        <p:nvPr/>
+      </p:nvGrpSpPr>
+      <p:grpSpPr>
+        <a:xfrm>
+          <a:off x="0" y="0"/>
+          <a:ext cx="0" cy="0"/>
+          <a:chOff x="0" y="0"/>
+          <a:chExt cx="0" cy="0"/>
+        </a:xfrm>
+      </p:grpSpPr>
+      <p:sp>
+        <p:nvSpPr>
+          <p:cNvPr id="21" name="标题 20"/>
+          <p:cNvSpPr>
+            <a:spLocks noGrp="1"/>
+          </p:cNvSpPr>
+          <p:nvPr>
+            <p:ph type="title"/>
+            <p:custDataLst>
+              <p:tags r:id="rId1"/>
+            </p:custDataLst>
+          </p:nvPr>
+        </p:nvSpPr>
+        <p:spPr/>
+        <p:txBody>
+          <a:bodyPr>
+            <a:normAutofit fontScale="90000"/>
+          </a:bodyPr>
+          <a:lstStyle/>
+          <a:p>
+            <a:r>
+              <a:rPr lang="zh-CN" altLang="en-US"/>
+              <a:t>实验</a:t>
+            </a:r>
+            <a:r>
+              <a:rPr lang="zh-CN" altLang="en-US"/>
+              <a:t>进展</a:t>
+            </a:r>
+            <a:endParaRPr lang="zh-CN" altLang="en-US"/>
+          </a:p>
+        </p:txBody>
+      </p:sp>
+      <p:graphicFrame>
+        <p:nvGraphicFramePr>
+          <p:cNvPr id="31" name="硬件模块完成情况表"/>
+          <p:cNvGraphicFramePr>
+            <a:graphicFrameLocks noGrp="1"/>
+          </p:cNvGraphicFramePr>
+          <p:nvPr/>
+        </p:nvGraphicFramePr>
+        <p:xfrm>
+          <a:off x="378460" y="2051685"/>
+          <a:ext cx="11435080" cy="3820160"/>
+        </p:xfrm>
+        <a:graphic>
+          <a:graphicData uri="http://schemas.openxmlformats.org/drawingml/2006/table">
+            <a:tbl>
+              <a:tblPr firstRow="1" bandRow="1">
+                <a:tableStyleId>{5C22544A-7EE6-4342-B048-85BDC9FD1C3A}</a:tableStyleId>
+              </a:tblPr>
+              <a:tblGrid>
+                <a:gridCol w="2020570"/>
+                <a:gridCol w="5417820"/>
+                <a:gridCol w="3996690"/>
+              </a:tblGrid>
+              <a:tr h="394970">
+                <a:tc>
+                  <a:txBody>
+                    <a:bodyPr wrap="square">
+                      <a:spAutoFit/>
+                    </a:bodyPr>
+                    <a:lstStyle/>
+                    <a:p>
+                      <a:pPr algn="ctr"/>
+                      <a:r>
+                        <a:rPr lang="zh-CN" altLang="en-US" sz="1250" b="1">
+                          <a:solidFill>
+                            <a:srgbClr val="FFFFFF"/>
+                          </a:solidFill>
+                          <a:latin typeface="微软雅黑"/>
+                          <a:ea typeface="微软雅黑"/>
+                        </a:rPr>
+                        <a:t>模块</a:t>
+                      </a:r>
+                      <a:endParaRPr lang="zh-CN" altLang="en-US" sz="1250"/>
+                    </a:p>
+                  </a:txBody>
+                  <a:tcPr marL="70000" marR="70000" marT="50000" marB="50000" anchor="ctr" anchorCtr="0">
+                    <a:lnL w="9525">
+                      <a:solidFill>
+                        <a:srgbClr val="D8DEE9"/>
+                      </a:solidFill>
+                    </a:lnL>
+                    <a:lnR w="9525">
+                      <a:solidFill>
+                        <a:srgbClr val="D8DEE9"/>
+                      </a:solidFill>
+                    </a:lnR>
+                    <a:lnT w="9525">
+                      <a:solidFill>
+                        <a:srgbClr val="D8DEE9"/>
+                      </a:solidFill>
+                    </a:lnT>
+                    <a:lnB w="9525">
+                      <a:solidFill>
+                        <a:srgbClr val="D8DEE9"/>
+                      </a:solidFill>
+                    </a:lnB>
+                    <a:solidFill>
+                      <a:srgbClr val="2F5597"/>
+                    </a:solidFill>
+                  </a:tcPr>
+                </a:tc>
+                <a:tc>
+                  <a:txBody>
+                    <a:bodyPr wrap="square">
+                      <a:spAutoFit/>
+                    </a:bodyPr>
+                    <a:lstStyle/>
+                    <a:p>
+                      <a:pPr algn="ctr"/>
+                      <a:r>
+                        <a:rPr lang="zh-CN" altLang="en-US" sz="1250" b="1">
+                          <a:solidFill>
+                            <a:srgbClr val="FFFFFF"/>
+                          </a:solidFill>
+                          <a:latin typeface="微软雅黑"/>
+                          <a:ea typeface="微软雅黑"/>
+                        </a:rPr>
+                        <a:t>主要功能</a:t>
+                      </a:r>
+                      <a:endParaRPr lang="zh-CN" altLang="en-US" sz="1250"/>
+                    </a:p>
+                  </a:txBody>
+                  <a:tcPr marL="70000" marR="70000" marT="50000" marB="50000" anchor="ctr" anchorCtr="0">
+                    <a:lnL w="9525">
+                      <a:solidFill>
+                        <a:srgbClr val="D8DEE9"/>
+                      </a:solidFill>
+                    </a:lnL>
+                    <a:lnR w="9525">
+                      <a:solidFill>
+                        <a:srgbClr val="D8DEE9"/>
+                      </a:solidFill>
+                    </a:lnR>
+                    <a:lnT w="9525">
+                      <a:solidFill>
+                        <a:srgbClr val="D8DEE9"/>
+                      </a:solidFill>
+                    </a:lnT>
+                    <a:lnB w="9525">
+                      <a:solidFill>
+                        <a:srgbClr val="D8DEE9"/>
+                      </a:solidFill>
+                    </a:lnB>
+                    <a:solidFill>
+                      <a:srgbClr val="2F5597"/>
+                    </a:solidFill>
+                  </a:tcPr>
+                </a:tc>
+                <a:tc>
+                  <a:txBody>
+                    <a:bodyPr wrap="square">
+                      <a:spAutoFit/>
+                    </a:bodyPr>
+                    <a:lstStyle/>
+                    <a:p>
+                      <a:pPr algn="ctr"/>
+                      <a:r>
+                        <a:rPr lang="zh-CN" altLang="en-US" sz="1250" b="1">
+                          <a:solidFill>
+                            <a:srgbClr val="FFFFFF"/>
+                          </a:solidFill>
+                          <a:latin typeface="微软雅黑"/>
+                          <a:ea typeface="微软雅黑"/>
+                        </a:rPr>
+                        <a:t>当前完成情况</a:t>
+                      </a:r>
+                      <a:endParaRPr lang="zh-CN" altLang="en-US" sz="1250"/>
+                    </a:p>
+                  </a:txBody>
+                  <a:tcPr marL="70000" marR="70000" marT="50000" marB="50000" anchor="ctr" anchorCtr="0">
+                    <a:lnL w="9525">
+                      <a:solidFill>
+                        <a:srgbClr val="D8DEE9"/>
+                      </a:solidFill>
+                    </a:lnL>
+                    <a:lnR w="9525">
+                      <a:solidFill>
+                        <a:srgbClr val="D8DEE9"/>
+                      </a:solidFill>
+                    </a:lnR>
+                    <a:lnT w="9525">
+                      <a:solidFill>
+                        <a:srgbClr val="D8DEE9"/>
+                      </a:solidFill>
+                    </a:lnT>
+                    <a:lnB w="9525">
+                      <a:solidFill>
+                        <a:srgbClr val="D8DEE9"/>
+                      </a:solidFill>
+                    </a:lnB>
+                    <a:solidFill>
+                      <a:srgbClr val="2F5597"/>
+                    </a:solidFill>
+                  </a:tcPr>
+                </a:tc>
+              </a:tr>
+              <a:tr h="571500">
+                <a:tc>
+                  <a:txBody>
+                    <a:bodyPr wrap="square">
+                      <a:spAutoFit/>
+                    </a:bodyPr>
+                    <a:lstStyle/>
+                    <a:p>
+                      <a:pPr algn="ctr"/>
+                      <a:r>
+                        <a:rPr lang="zh-CN" altLang="en-US" sz="1600">
+                          <a:solidFill>
+                            <a:srgbClr val="1F2A44"/>
+                          </a:solidFill>
+                          <a:latin typeface="+mn-ea"/>
+                          <a:cs typeface="+mn-ea"/>
+                        </a:rPr>
+                        <a:t>ATU 地址转换单元</a:t>
+                      </a:r>
+                      <a:endParaRPr lang="zh-CN" altLang="en-US" sz="1600">
+                        <a:solidFill>
+                          <a:srgbClr val="1F2A44"/>
+                        </a:solidFill>
+                        <a:latin typeface="+mn-ea"/>
+                        <a:cs typeface="+mn-ea"/>
+                      </a:endParaRPr>
+                    </a:p>
+                  </a:txBody>
+                  <a:tcPr marL="70000" marR="70000" marT="50000" marB="50000" anchor="ctr" anchorCtr="0">
+                    <a:lnL w="9525">
+                      <a:solidFill>
+                        <a:srgbClr val="D8DEE9"/>
+                      </a:solidFill>
+                    </a:lnL>
+                    <a:lnR w="9525">
+                      <a:solidFill>
+                        <a:srgbClr val="D8DEE9"/>
+                      </a:solidFill>
+                    </a:lnR>
+                    <a:lnT w="9525">
+                      <a:solidFill>
+                        <a:srgbClr val="D8DEE9"/>
+                      </a:solidFill>
+                    </a:lnT>
+                    <a:lnB w="9525">
+                      <a:solidFill>
+                        <a:srgbClr val="D8DEE9"/>
+                      </a:solidFill>
+                    </a:lnB>
+                    <a:solidFill>
+                      <a:srgbClr val="FFFFFF"/>
+                    </a:solidFill>
+                  </a:tcPr>
+                </a:tc>
+                <a:tc>
+                  <a:txBody>
+                    <a:bodyPr wrap="square">
+                      <a:spAutoFit/>
+                    </a:bodyPr>
+                    <a:lstStyle/>
+                    <a:p>
+                      <a:pPr algn="ctr"/>
+                      <a:r>
+                        <a:rPr lang="zh-CN" altLang="en-US" sz="1600">
+                          <a:solidFill>
+                            <a:srgbClr val="1F2A44"/>
+                          </a:solidFill>
+                          <a:latin typeface="+mn-ea"/>
+                          <a:cs typeface="+mn-ea"/>
+                        </a:rPr>
+                        <a:t>维护逻辑行到物理行的映射，支持初始化、查询与 pivot 行交换</a:t>
+                      </a:r>
+                      <a:endParaRPr lang="zh-CN" altLang="en-US" sz="1600">
+                        <a:solidFill>
+                          <a:srgbClr val="1F2A44"/>
+                        </a:solidFill>
+                        <a:latin typeface="+mn-ea"/>
+                        <a:cs typeface="+mn-ea"/>
+                      </a:endParaRPr>
+                    </a:p>
+                  </a:txBody>
+                  <a:tcPr marL="70000" marR="70000" marT="50000" marB="50000" anchor="ctr" anchorCtr="0">
+                    <a:lnL w="9525">
+                      <a:solidFill>
+                        <a:srgbClr val="D8DEE9"/>
+                      </a:solidFill>
+                    </a:lnL>
+                    <a:lnR w="9525">
+                      <a:solidFill>
+                        <a:srgbClr val="D8DEE9"/>
+                      </a:solidFill>
+                    </a:lnR>
+                    <a:lnT w="9525">
+                      <a:solidFill>
+                        <a:srgbClr val="D8DEE9"/>
+                      </a:solidFill>
+                    </a:lnT>
+                    <a:lnB w="9525">
+                      <a:solidFill>
+                        <a:srgbClr val="D8DEE9"/>
+                      </a:solidFill>
+                    </a:lnB>
+                    <a:solidFill>
+                      <a:srgbClr val="FFFFFF"/>
+                    </a:solidFill>
+                  </a:tcPr>
+                </a:tc>
+                <a:tc>
+                  <a:txBody>
+                    <a:bodyPr wrap="square">
+                      <a:spAutoFit/>
+                    </a:bodyPr>
+                    <a:lstStyle/>
+                    <a:p>
+                      <a:pPr algn="ctr"/>
+                      <a:r>
+                        <a:rPr lang="zh-CN" altLang="en-US" sz="1600">
+                          <a:solidFill>
+                            <a:srgbClr val="1F2A44"/>
+                          </a:solidFill>
+                          <a:latin typeface="+mn-ea"/>
+                          <a:cs typeface="+mn-ea"/>
+                        </a:rPr>
+                        <a:t>RTL 已完成；已完成综合后功能仿真</a:t>
+                      </a:r>
+                      <a:endParaRPr lang="zh-CN" altLang="en-US" sz="1600">
+                        <a:solidFill>
+                          <a:srgbClr val="1F2A44"/>
+                        </a:solidFill>
+                        <a:latin typeface="+mn-ea"/>
+                        <a:cs typeface="+mn-ea"/>
+                      </a:endParaRPr>
+                    </a:p>
+                  </a:txBody>
+                  <a:tcPr marL="70000" marR="70000" marT="50000" marB="50000" anchor="ctr" anchorCtr="0">
+                    <a:lnL w="9525">
+                      <a:solidFill>
+                        <a:srgbClr val="D8DEE9"/>
+                      </a:solidFill>
+                    </a:lnL>
+                    <a:lnR w="9525">
+                      <a:solidFill>
+                        <a:srgbClr val="D8DEE9"/>
+                      </a:solidFill>
+                    </a:lnR>
+                    <a:lnT w="9525">
+                      <a:solidFill>
+                        <a:srgbClr val="D8DEE9"/>
+                      </a:solidFill>
+                    </a:lnT>
+                    <a:lnB w="9525">
+                      <a:solidFill>
+                        <a:srgbClr val="D8DEE9"/>
+                      </a:solidFill>
+                    </a:lnB>
+                    <a:solidFill>
+                      <a:srgbClr val="FFFFFF"/>
+                    </a:solidFill>
+                  </a:tcPr>
+                </a:tc>
+              </a:tr>
+              <a:tr h="570865">
+                <a:tc>
+                  <a:txBody>
+                    <a:bodyPr wrap="square">
+                      <a:spAutoFit/>
+                    </a:bodyPr>
+                    <a:lstStyle/>
+                    <a:p>
+                      <a:pPr algn="ctr"/>
+                      <a:r>
+                        <a:rPr lang="zh-CN" altLang="en-US" sz="1600">
+                          <a:solidFill>
+                            <a:srgbClr val="1F2A44"/>
+                          </a:solidFill>
+                          <a:latin typeface="+mn-ea"/>
+                          <a:cs typeface="+mn-ea"/>
+                        </a:rPr>
+                        <a:t>HPU 主元选择单元</a:t>
+                      </a:r>
+                      <a:endParaRPr lang="zh-CN" altLang="en-US" sz="1600">
+                        <a:solidFill>
+                          <a:srgbClr val="1F2A44"/>
+                        </a:solidFill>
+                        <a:latin typeface="+mn-ea"/>
+                        <a:cs typeface="+mn-ea"/>
+                      </a:endParaRPr>
+                    </a:p>
+                  </a:txBody>
+                  <a:tcPr marL="70000" marR="70000" marT="50000" marB="50000" anchor="ctr" anchorCtr="0">
+                    <a:lnL w="9525">
+                      <a:solidFill>
+                        <a:srgbClr val="D8DEE9"/>
+                      </a:solidFill>
+                    </a:lnL>
+                    <a:lnR w="9525">
+                      <a:solidFill>
+                        <a:srgbClr val="D8DEE9"/>
+                      </a:solidFill>
+                    </a:lnR>
+                    <a:lnT w="9525">
+                      <a:solidFill>
+                        <a:srgbClr val="D8DEE9"/>
+                      </a:solidFill>
+                    </a:lnT>
+                    <a:lnB w="9525">
+                      <a:solidFill>
+                        <a:srgbClr val="D8DEE9"/>
+                      </a:solidFill>
+                    </a:lnB>
+                    <a:solidFill>
+                      <a:srgbClr val="F7F9FC"/>
+                    </a:solidFill>
+                  </a:tcPr>
+                </a:tc>
+                <a:tc>
+                  <a:txBody>
+                    <a:bodyPr wrap="square">
+                      <a:spAutoFit/>
+                    </a:bodyPr>
+                    <a:lstStyle/>
+                    <a:p>
+                      <a:pPr algn="ctr"/>
+                      <a:r>
+                        <a:rPr lang="zh-CN" altLang="en-US" sz="1600">
+                          <a:solidFill>
+                            <a:srgbClr val="1F2A44"/>
+                          </a:solidFill>
+                          <a:latin typeface="+mn-ea"/>
+                        </a:rPr>
+                        <a:t>对候选行绝对值进行树形比较，选择当前列主元</a:t>
+                      </a:r>
+                      <a:endParaRPr lang="zh-CN" altLang="en-US" sz="1600">
+                        <a:solidFill>
+                          <a:srgbClr val="1F2A44"/>
+                        </a:solidFill>
+                        <a:latin typeface="+mn-ea"/>
+                      </a:endParaRPr>
+                    </a:p>
+                  </a:txBody>
+                  <a:tcPr marL="70000" marR="70000" marT="50000" marB="50000" anchor="ctr" anchorCtr="0">
+                    <a:lnL w="9525">
+                      <a:solidFill>
+                        <a:srgbClr val="D8DEE9"/>
+                      </a:solidFill>
+                    </a:lnL>
+                    <a:lnR w="9525">
+                      <a:solidFill>
+                        <a:srgbClr val="D8DEE9"/>
+                      </a:solidFill>
+                    </a:lnR>
+                    <a:lnT w="9525">
+                      <a:solidFill>
+                        <a:srgbClr val="D8DEE9"/>
+                      </a:solidFill>
+                    </a:lnT>
+                    <a:lnB w="9525">
+                      <a:solidFill>
+                        <a:srgbClr val="D8DEE9"/>
+                      </a:solidFill>
+                    </a:lnB>
+                    <a:solidFill>
+                      <a:srgbClr val="F7F9FC"/>
+                    </a:solidFill>
+                  </a:tcPr>
+                </a:tc>
+                <a:tc>
+                  <a:txBody>
+                    <a:bodyPr wrap="square">
+                      <a:spAutoFit/>
+                    </a:bodyPr>
+                    <a:lstStyle/>
+                    <a:p>
+                      <a:pPr algn="ctr"/>
+                      <a:r>
+                        <a:rPr lang="zh-CN" altLang="en-US" sz="1600">
+                          <a:solidFill>
+                            <a:srgbClr val="1F2A44"/>
+                          </a:solidFill>
+                          <a:latin typeface="+mn-ea"/>
+                          <a:cs typeface="+mn-ea"/>
+                        </a:rPr>
+                        <a:t>RTL 已完成；顶层完成综合后功能仿真</a:t>
+                      </a:r>
+                      <a:endParaRPr lang="zh-CN" altLang="en-US" sz="1600">
+                        <a:solidFill>
+                          <a:srgbClr val="1F2A44"/>
+                        </a:solidFill>
+                        <a:latin typeface="+mn-ea"/>
+                        <a:cs typeface="+mn-ea"/>
+                      </a:endParaRPr>
+                    </a:p>
+                  </a:txBody>
+                  <a:tcPr marL="70000" marR="70000" marT="50000" marB="50000" anchor="ctr" anchorCtr="0">
+                    <a:lnL w="9525">
+                      <a:solidFill>
+                        <a:srgbClr val="D8DEE9"/>
+                      </a:solidFill>
+                    </a:lnL>
+                    <a:lnR w="9525">
+                      <a:solidFill>
+                        <a:srgbClr val="D8DEE9"/>
+                      </a:solidFill>
+                    </a:lnR>
+                    <a:lnT w="9525">
+                      <a:solidFill>
+                        <a:srgbClr val="D8DEE9"/>
+                      </a:solidFill>
+                    </a:lnT>
+                    <a:lnB w="9525">
+                      <a:solidFill>
+                        <a:srgbClr val="D8DEE9"/>
+                      </a:solidFill>
+                    </a:lnB>
+                    <a:solidFill>
+                      <a:srgbClr val="F7F9FC"/>
+                    </a:solidFill>
+                  </a:tcPr>
+                </a:tc>
+              </a:tr>
+              <a:tr h="570865">
+                <a:tc>
+                  <a:txBody>
+                    <a:bodyPr wrap="square">
+                      <a:spAutoFit/>
+                    </a:bodyPr>
+                    <a:lstStyle/>
+                    <a:p>
+                      <a:pPr algn="ctr"/>
+                      <a:r>
+                        <a:rPr lang="zh-CN" altLang="en-US" sz="1600">
+                          <a:solidFill>
+                            <a:srgbClr val="1F2A44"/>
+                          </a:solidFill>
+                          <a:latin typeface="+mn-ea"/>
+                        </a:rPr>
+                        <a:t>GCU Task Fetch</a:t>
+                      </a:r>
+                      <a:endParaRPr lang="zh-CN" altLang="en-US" sz="1600">
+                        <a:solidFill>
+                          <a:srgbClr val="1F2A44"/>
+                        </a:solidFill>
+                        <a:latin typeface="+mn-ea"/>
+                      </a:endParaRPr>
+                    </a:p>
+                  </a:txBody>
+                  <a:tcPr marL="70000" marR="70000" marT="50000" marB="50000" anchor="ctr" anchorCtr="0">
+                    <a:lnL w="9525">
+                      <a:solidFill>
+                        <a:srgbClr val="D8DEE9"/>
+                      </a:solidFill>
+                    </a:lnL>
+                    <a:lnR w="9525">
+                      <a:solidFill>
+                        <a:srgbClr val="D8DEE9"/>
+                      </a:solidFill>
+                    </a:lnR>
+                    <a:lnT w="9525">
+                      <a:solidFill>
+                        <a:srgbClr val="D8DEE9"/>
+                      </a:solidFill>
+                    </a:lnT>
+                    <a:lnB w="9525">
+                      <a:solidFill>
+                        <a:srgbClr val="D8DEE9"/>
+                      </a:solidFill>
+                    </a:lnB>
+                    <a:solidFill>
+                      <a:srgbClr val="FFFFFF"/>
+                    </a:solidFill>
+                  </a:tcPr>
+                </a:tc>
+                <a:tc>
+                  <a:txBody>
+                    <a:bodyPr wrap="square">
+                      <a:spAutoFit/>
+                    </a:bodyPr>
+                    <a:lstStyle/>
+                    <a:p>
+                      <a:pPr algn="ctr"/>
+                      <a:r>
+                        <a:rPr lang="zh-CN" altLang="en-US" sz="1600">
+                          <a:solidFill>
+                            <a:srgbClr val="1F2A44"/>
+                          </a:solidFill>
+                          <a:latin typeface="+mn-ea"/>
+                          <a:cs typeface="+mn-ea"/>
+                        </a:rPr>
+                        <a:t>从任务队列读取 Node_Task 描述符，通过握手</a:t>
+                      </a:r>
+                      <a:r>
+                        <a:rPr lang="zh-CN" altLang="en-US" sz="1600">
+                          <a:solidFill>
+                            <a:srgbClr val="1F2A44"/>
+                          </a:solidFill>
+                          <a:latin typeface="+mn-ea"/>
+                          <a:cs typeface="+mn-ea"/>
+                        </a:rPr>
+                        <a:t>协议下发</a:t>
+                      </a:r>
+                      <a:endParaRPr lang="zh-CN" altLang="en-US" sz="1600">
+                        <a:solidFill>
+                          <a:srgbClr val="1F2A44"/>
+                        </a:solidFill>
+                        <a:latin typeface="+mn-ea"/>
+                        <a:cs typeface="+mn-ea"/>
+                      </a:endParaRPr>
+                    </a:p>
+                  </a:txBody>
+                  <a:tcPr marL="70000" marR="70000" marT="50000" marB="50000" anchor="ctr" anchorCtr="0">
+                    <a:lnL w="9525">
+                      <a:solidFill>
+                        <a:srgbClr val="D8DEE9"/>
+                      </a:solidFill>
+                    </a:lnL>
+                    <a:lnR w="9525">
+                      <a:solidFill>
+                        <a:srgbClr val="D8DEE9"/>
+                      </a:solidFill>
+                    </a:lnR>
+                    <a:lnT w="9525">
+                      <a:solidFill>
+                        <a:srgbClr val="D8DEE9"/>
+                      </a:solidFill>
+                    </a:lnT>
+                    <a:lnB w="9525">
+                      <a:solidFill>
+                        <a:srgbClr val="D8DEE9"/>
+                      </a:solidFill>
+                    </a:lnB>
+                    <a:solidFill>
+                      <a:srgbClr val="FFFFFF"/>
+                    </a:solidFill>
+                  </a:tcPr>
+                </a:tc>
+                <a:tc>
+                  <a:txBody>
+                    <a:bodyPr wrap="square">
+                      <a:spAutoFit/>
+                    </a:bodyPr>
+                    <a:lstStyle/>
+                    <a:p>
+                      <a:pPr algn="ctr"/>
+                      <a:r>
+                        <a:rPr lang="zh-CN" altLang="en-US" sz="1600">
+                          <a:solidFill>
+                            <a:srgbClr val="1F2A44"/>
+                          </a:solidFill>
+                          <a:latin typeface="+mn-ea"/>
+                          <a:cs typeface="+mn-ea"/>
+                        </a:rPr>
+                        <a:t>RTL 已完成；配套 testbench</a:t>
+                      </a:r>
+                      <a:endParaRPr lang="zh-CN" altLang="en-US" sz="1600">
+                        <a:solidFill>
+                          <a:srgbClr val="1F2A44"/>
+                        </a:solidFill>
+                        <a:latin typeface="+mn-ea"/>
+                        <a:cs typeface="+mn-ea"/>
+                      </a:endParaRPr>
+                    </a:p>
+                  </a:txBody>
+                  <a:tcPr marL="70000" marR="70000" marT="50000" marB="50000" anchor="ctr" anchorCtr="0">
+                    <a:lnL w="9525">
+                      <a:solidFill>
+                        <a:srgbClr val="D8DEE9"/>
+                      </a:solidFill>
+                    </a:lnL>
+                    <a:lnR w="9525">
+                      <a:solidFill>
+                        <a:srgbClr val="D8DEE9"/>
+                      </a:solidFill>
+                    </a:lnR>
+                    <a:lnT w="9525">
+                      <a:solidFill>
+                        <a:srgbClr val="D8DEE9"/>
+                      </a:solidFill>
+                    </a:lnT>
+                    <a:lnB w="9525">
+                      <a:solidFill>
+                        <a:srgbClr val="D8DEE9"/>
+                      </a:solidFill>
+                    </a:lnB>
+                    <a:solidFill>
+                      <a:srgbClr val="FFFFFF"/>
+                    </a:solidFill>
+                  </a:tcPr>
+                </a:tc>
+              </a:tr>
+              <a:tr h="570865">
+                <a:tc>
+                  <a:txBody>
+                    <a:bodyPr wrap="square">
+                      <a:spAutoFit/>
+                    </a:bodyPr>
+                    <a:lstStyle/>
+                    <a:p>
+                      <a:pPr algn="ctr"/>
+                      <a:r>
+                        <a:rPr lang="zh-CN" altLang="en-US" sz="1600">
+                          <a:solidFill>
+                            <a:srgbClr val="1F2A44"/>
+                          </a:solidFill>
+                          <a:latin typeface="+mn-ea"/>
+                        </a:rPr>
+                        <a:t>GCU Dep Scoreboard</a:t>
+                      </a:r>
+                      <a:endParaRPr lang="zh-CN" altLang="en-US" sz="1600">
+                        <a:solidFill>
+                          <a:srgbClr val="1F2A44"/>
+                        </a:solidFill>
+                        <a:latin typeface="+mn-ea"/>
+                      </a:endParaRPr>
+                    </a:p>
+                  </a:txBody>
+                  <a:tcPr marL="70000" marR="70000" marT="50000" marB="50000" anchor="ctr" anchorCtr="0">
+                    <a:lnL w="9525">
+                      <a:solidFill>
+                        <a:srgbClr val="D8DEE9"/>
+                      </a:solidFill>
+                    </a:lnL>
+                    <a:lnR w="9525">
+                      <a:solidFill>
+                        <a:srgbClr val="D8DEE9"/>
+                      </a:solidFill>
+                    </a:lnR>
+                    <a:lnT w="9525">
+                      <a:solidFill>
+                        <a:srgbClr val="D8DEE9"/>
+                      </a:solidFill>
+                    </a:lnT>
+                    <a:lnB w="9525">
+                      <a:solidFill>
+                        <a:srgbClr val="D8DEE9"/>
+                      </a:solidFill>
+                    </a:lnB>
+                    <a:solidFill>
+                      <a:srgbClr val="F7F9FC"/>
+                    </a:solidFill>
+                  </a:tcPr>
+                </a:tc>
+                <a:tc>
+                  <a:txBody>
+                    <a:bodyPr wrap="square">
+                      <a:spAutoFit/>
+                    </a:bodyPr>
+                    <a:lstStyle/>
+                    <a:p>
+                      <a:pPr algn="ctr"/>
+                      <a:r>
+                        <a:rPr lang="zh-CN" altLang="en-US" sz="1600">
+                          <a:solidFill>
+                            <a:srgbClr val="1F2A44"/>
+                          </a:solidFill>
+                          <a:latin typeface="+mn-ea"/>
+                          <a:cs typeface="+mn-ea"/>
+                        </a:rPr>
+                        <a:t>维护 pending_children 计数，生成 front_ready 依赖门控</a:t>
+                      </a:r>
+                      <a:endParaRPr lang="zh-CN" altLang="en-US" sz="1600">
+                        <a:solidFill>
+                          <a:srgbClr val="1F2A44"/>
+                        </a:solidFill>
+                        <a:latin typeface="+mn-ea"/>
+                        <a:cs typeface="+mn-ea"/>
+                      </a:endParaRPr>
+                    </a:p>
+                  </a:txBody>
+                  <a:tcPr marL="70000" marR="70000" marT="50000" marB="50000" anchor="ctr" anchorCtr="0">
+                    <a:lnL w="9525">
+                      <a:solidFill>
+                        <a:srgbClr val="D8DEE9"/>
+                      </a:solidFill>
+                    </a:lnL>
+                    <a:lnR w="9525">
+                      <a:solidFill>
+                        <a:srgbClr val="D8DEE9"/>
+                      </a:solidFill>
+                    </a:lnR>
+                    <a:lnT w="9525">
+                      <a:solidFill>
+                        <a:srgbClr val="D8DEE9"/>
+                      </a:solidFill>
+                    </a:lnT>
+                    <a:lnB w="9525">
+                      <a:solidFill>
+                        <a:srgbClr val="D8DEE9"/>
+                      </a:solidFill>
+                    </a:lnB>
+                    <a:solidFill>
+                      <a:srgbClr val="F7F9FC"/>
+                    </a:solidFill>
+                  </a:tcPr>
+                </a:tc>
+                <a:tc>
+                  <a:txBody>
+                    <a:bodyPr wrap="square">
+                      <a:spAutoFit/>
+                    </a:bodyPr>
+                    <a:lstStyle/>
+                    <a:p>
+                      <a:pPr algn="ctr"/>
+                      <a:r>
+                        <a:rPr lang="zh-CN" altLang="en-US" sz="1600">
+                          <a:solidFill>
+                            <a:srgbClr val="1F2A44"/>
+                          </a:solidFill>
+                          <a:latin typeface="+mn-ea"/>
+                          <a:cs typeface="+mn-ea"/>
+                        </a:rPr>
+                        <a:t>RTL 已完成；配套 testbench</a:t>
+                      </a:r>
+                      <a:endParaRPr lang="zh-CN" altLang="en-US" sz="1600">
+                        <a:solidFill>
+                          <a:srgbClr val="1F2A44"/>
+                        </a:solidFill>
+                        <a:latin typeface="+mn-ea"/>
+                        <a:cs typeface="+mn-ea"/>
+                      </a:endParaRPr>
+                    </a:p>
+                  </a:txBody>
+                  <a:tcPr marL="70000" marR="70000" marT="50000" marB="50000" anchor="ctr" anchorCtr="0">
+                    <a:lnL w="9525">
+                      <a:solidFill>
+                        <a:srgbClr val="D8DEE9"/>
+                      </a:solidFill>
+                    </a:lnL>
+                    <a:lnR w="9525">
+                      <a:solidFill>
+                        <a:srgbClr val="D8DEE9"/>
+                      </a:solidFill>
+                    </a:lnR>
+                    <a:lnT w="9525">
+                      <a:solidFill>
+                        <a:srgbClr val="D8DEE9"/>
+                      </a:solidFill>
+                    </a:lnT>
+                    <a:lnB w="9525">
+                      <a:solidFill>
+                        <a:srgbClr val="D8DEE9"/>
+                      </a:solidFill>
+                    </a:lnB>
+                    <a:solidFill>
+                      <a:srgbClr val="F7F9FC"/>
+                    </a:solidFill>
+                  </a:tcPr>
+                </a:tc>
+              </a:tr>
+              <a:tr h="569595">
+                <a:tc>
+                  <a:txBody>
+                    <a:bodyPr wrap="square">
+                      <a:spAutoFit/>
+                    </a:bodyPr>
+                    <a:lstStyle/>
+                    <a:p>
+                      <a:pPr algn="ctr"/>
+                      <a:r>
+                        <a:rPr lang="zh-CN" altLang="en-US" sz="1600">
+                          <a:solidFill>
+                            <a:srgbClr val="1F2A44"/>
+                          </a:solidFill>
+                          <a:latin typeface="+mn-ea"/>
+                        </a:rPr>
+                        <a:t>GCU Buffer Manager</a:t>
+                      </a:r>
+                      <a:endParaRPr lang="zh-CN" altLang="en-US" sz="1600">
+                        <a:solidFill>
+                          <a:srgbClr val="1F2A44"/>
+                        </a:solidFill>
+                        <a:latin typeface="+mn-ea"/>
+                      </a:endParaRPr>
+                    </a:p>
+                  </a:txBody>
+                  <a:tcPr marL="70000" marR="70000" marT="50000" marB="50000" anchor="ctr" anchorCtr="0">
+                    <a:lnL w="9525">
+                      <a:solidFill>
+                        <a:srgbClr val="D8DEE9"/>
+                      </a:solidFill>
+                    </a:lnL>
+                    <a:lnR w="9525">
+                      <a:solidFill>
+                        <a:srgbClr val="D8DEE9"/>
+                      </a:solidFill>
+                    </a:lnR>
+                    <a:lnT w="9525">
+                      <a:solidFill>
+                        <a:srgbClr val="D8DEE9"/>
+                      </a:solidFill>
+                    </a:lnT>
+                    <a:lnB w="9525">
+                      <a:solidFill>
+                        <a:srgbClr val="D8DEE9"/>
+                      </a:solidFill>
+                    </a:lnB>
+                    <a:solidFill>
+                      <a:srgbClr val="FFFFFF"/>
+                    </a:solidFill>
+                  </a:tcPr>
+                </a:tc>
+                <a:tc>
+                  <a:txBody>
+                    <a:bodyPr wrap="square">
+                      <a:spAutoFit/>
+                    </a:bodyPr>
+                    <a:lstStyle/>
+                    <a:p>
+                      <a:pPr algn="ctr"/>
+                      <a:r>
+                        <a:rPr lang="zh-CN" altLang="en-US" sz="1600">
+                          <a:solidFill>
+                            <a:srgbClr val="1F2A44"/>
+                          </a:solidFill>
+                          <a:latin typeface="+mn-ea"/>
+                          <a:cs typeface="+mn-ea"/>
+                        </a:rPr>
+                        <a:t>缓冲</a:t>
+                      </a:r>
+                      <a:r>
+                        <a:rPr lang="zh-CN" altLang="en-US" sz="1600">
+                          <a:solidFill>
+                            <a:srgbClr val="1F2A44"/>
+                          </a:solidFill>
+                          <a:latin typeface="+mn-ea"/>
+                          <a:cs typeface="+mn-ea"/>
+                        </a:rPr>
+                        <a:t>管理</a:t>
+                      </a:r>
+                      <a:endParaRPr lang="zh-CN" altLang="en-US" sz="1600">
+                        <a:solidFill>
+                          <a:srgbClr val="1F2A44"/>
+                        </a:solidFill>
+                        <a:latin typeface="+mn-ea"/>
+                        <a:cs typeface="+mn-ea"/>
+                      </a:endParaRPr>
+                    </a:p>
+                  </a:txBody>
+                  <a:tcPr marL="70000" marR="70000" marT="50000" marB="50000" anchor="ctr" anchorCtr="0">
+                    <a:lnL w="9525">
+                      <a:solidFill>
+                        <a:srgbClr val="D8DEE9"/>
+                      </a:solidFill>
+                    </a:lnL>
+                    <a:lnR w="9525">
+                      <a:solidFill>
+                        <a:srgbClr val="D8DEE9"/>
+                      </a:solidFill>
+                    </a:lnR>
+                    <a:lnT w="9525">
+                      <a:solidFill>
+                        <a:srgbClr val="D8DEE9"/>
+                      </a:solidFill>
+                    </a:lnT>
+                    <a:lnB w="9525">
+                      <a:solidFill>
+                        <a:srgbClr val="D8DEE9"/>
+                      </a:solidFill>
+                    </a:lnB>
+                    <a:solidFill>
+                      <a:srgbClr val="FFFFFF"/>
+                    </a:solidFill>
+                  </a:tcPr>
+                </a:tc>
+                <a:tc>
+                  <a:txBody>
+                    <a:bodyPr wrap="square">
+                      <a:spAutoFit/>
+                    </a:bodyPr>
+                    <a:lstStyle/>
+                    <a:p>
+                      <a:pPr algn="ctr"/>
+                      <a:r>
+                        <a:rPr lang="zh-CN" altLang="en-US" sz="1600">
+                          <a:solidFill>
+                            <a:srgbClr val="1F2A44"/>
+                          </a:solidFill>
+                          <a:latin typeface="+mn-ea"/>
+                          <a:cs typeface="+mn-ea"/>
+                        </a:rPr>
+                        <a:t>完成部分</a:t>
+                      </a:r>
+                      <a:r>
+                        <a:rPr lang="zh-CN" altLang="en-US" sz="1600">
+                          <a:solidFill>
+                            <a:srgbClr val="1F2A44"/>
+                          </a:solidFill>
+                          <a:latin typeface="+mn-ea"/>
+                          <a:cs typeface="+mn-ea"/>
+                        </a:rPr>
+                        <a:t>功能</a:t>
+                      </a:r>
+                      <a:endParaRPr lang="zh-CN" altLang="en-US" sz="1600">
+                        <a:solidFill>
+                          <a:srgbClr val="1F2A44"/>
+                        </a:solidFill>
+                        <a:latin typeface="+mn-ea"/>
+                        <a:cs typeface="+mn-ea"/>
+                      </a:endParaRPr>
+                    </a:p>
+                  </a:txBody>
+                  <a:tcPr marL="70000" marR="70000" marT="50000" marB="50000" anchor="ctr" anchorCtr="0">
+                    <a:lnL w="9525">
+                      <a:solidFill>
+                        <a:srgbClr val="D8DEE9"/>
+                      </a:solidFill>
+                    </a:lnL>
+                    <a:lnR w="9525">
+                      <a:solidFill>
+                        <a:srgbClr val="D8DEE9"/>
+                      </a:solidFill>
+                    </a:lnR>
+                    <a:lnT w="9525">
+                      <a:solidFill>
+                        <a:srgbClr val="D8DEE9"/>
+                      </a:solidFill>
+                    </a:lnT>
+                    <a:lnB w="9525">
+                      <a:solidFill>
+                        <a:srgbClr val="D8DEE9"/>
+                      </a:solidFill>
+                    </a:lnB>
+                    <a:solidFill>
+                      <a:srgbClr val="FFFFFF"/>
+                    </a:solidFill>
+                  </a:tcPr>
+                </a:tc>
+              </a:tr>
+              <a:tr h="571500">
+                <a:tc>
+                  <a:txBody>
+                    <a:bodyPr wrap="square">
+                      <a:spAutoFit/>
+                    </a:bodyPr>
+                    <a:lstStyle/>
+                    <a:p>
+                      <a:pPr algn="ctr"/>
+                      <a:r>
+                        <a:rPr lang="zh-CN" altLang="en-US" sz="1600">
+                          <a:solidFill>
+                            <a:srgbClr val="1F2A44"/>
+                          </a:solidFill>
+                          <a:latin typeface="+mn-ea"/>
+                        </a:rPr>
+                        <a:t>GCU Micro Scheduler</a:t>
+                      </a:r>
+                      <a:endParaRPr lang="zh-CN" altLang="en-US" sz="1600">
+                        <a:solidFill>
+                          <a:srgbClr val="1F2A44"/>
+                        </a:solidFill>
+                        <a:latin typeface="+mn-ea"/>
+                      </a:endParaRPr>
+                    </a:p>
+                  </a:txBody>
+                  <a:tcPr marL="70000" marR="70000" marT="50000" marB="50000" anchor="ctr" anchorCtr="0">
+                    <a:lnL w="9525">
+                      <a:solidFill>
+                        <a:srgbClr val="D8DEE9"/>
+                      </a:solidFill>
+                    </a:lnL>
+                    <a:lnR w="9525">
+                      <a:solidFill>
+                        <a:srgbClr val="D8DEE9"/>
+                      </a:solidFill>
+                    </a:lnR>
+                    <a:lnT w="9525">
+                      <a:solidFill>
+                        <a:srgbClr val="D8DEE9"/>
+                      </a:solidFill>
+                    </a:lnT>
+                    <a:lnB w="9525">
+                      <a:solidFill>
+                        <a:srgbClr val="D8DEE9"/>
+                      </a:solidFill>
+                    </a:lnB>
+                    <a:solidFill>
+                      <a:srgbClr val="F7F9FC"/>
+                    </a:solidFill>
+                  </a:tcPr>
+                </a:tc>
+                <a:tc>
+                  <a:txBody>
+                    <a:bodyPr wrap="square">
+                      <a:spAutoFit/>
+                    </a:bodyPr>
+                    <a:lstStyle/>
+                    <a:p>
+                      <a:pPr algn="ctr"/>
+                      <a:r>
+                        <a:rPr lang="zh-CN" altLang="en-US" sz="1600">
+                          <a:solidFill>
+                            <a:srgbClr val="1F2A44"/>
+                          </a:solidFill>
+                          <a:latin typeface="+mn-ea"/>
+                          <a:cs typeface="+mn-ea"/>
+                        </a:rPr>
+                        <a:t>调度节点内计算</a:t>
+                      </a:r>
+                      <a:r>
+                        <a:rPr lang="zh-CN" altLang="en-US" sz="1600">
+                          <a:solidFill>
+                            <a:srgbClr val="1F2A44"/>
+                          </a:solidFill>
+                          <a:latin typeface="+mn-ea"/>
+                          <a:cs typeface="+mn-ea"/>
+                        </a:rPr>
+                        <a:t>调度</a:t>
+                      </a:r>
+                      <a:endParaRPr lang="zh-CN" altLang="en-US" sz="1600">
+                        <a:solidFill>
+                          <a:srgbClr val="1F2A44"/>
+                        </a:solidFill>
+                        <a:latin typeface="+mn-ea"/>
+                        <a:cs typeface="+mn-ea"/>
+                      </a:endParaRPr>
+                    </a:p>
+                  </a:txBody>
+                  <a:tcPr marL="70000" marR="70000" marT="50000" marB="50000" anchor="ctr" anchorCtr="0">
+                    <a:lnL w="9525">
+                      <a:solidFill>
+                        <a:srgbClr val="D8DEE9"/>
+                      </a:solidFill>
+                    </a:lnL>
+                    <a:lnR w="9525">
+                      <a:solidFill>
+                        <a:srgbClr val="D8DEE9"/>
+                      </a:solidFill>
+                    </a:lnR>
+                    <a:lnT w="9525">
+                      <a:solidFill>
+                        <a:srgbClr val="D8DEE9"/>
+                      </a:solidFill>
+                    </a:lnT>
+                    <a:lnB w="9525">
+                      <a:solidFill>
+                        <a:srgbClr val="D8DEE9"/>
+                      </a:solidFill>
+                    </a:lnB>
+                    <a:solidFill>
+                      <a:srgbClr val="F7F9FC"/>
+                    </a:solidFill>
+                  </a:tcPr>
+                </a:tc>
+                <a:tc>
+                  <a:txBody>
+                    <a:bodyPr wrap="square">
+                      <a:spAutoFit/>
+                    </a:bodyPr>
+                    <a:lstStyle/>
+                    <a:p>
+                      <a:pPr algn="ctr"/>
+                      <a:r>
+                        <a:rPr lang="zh-CN" altLang="en-US" sz="1600">
+                          <a:solidFill>
+                            <a:srgbClr val="1F2A44"/>
+                          </a:solidFill>
+                          <a:latin typeface="+mn-ea"/>
+                          <a:cs typeface="+mn-ea"/>
+                        </a:rPr>
+                        <a:t>完成部分</a:t>
+                      </a:r>
+                      <a:r>
+                        <a:rPr lang="zh-CN" altLang="en-US" sz="1600">
+                          <a:solidFill>
+                            <a:srgbClr val="1F2A44"/>
+                          </a:solidFill>
+                          <a:latin typeface="+mn-ea"/>
+                          <a:cs typeface="+mn-ea"/>
+                        </a:rPr>
+                        <a:t>功能</a:t>
+                      </a:r>
+                      <a:endParaRPr lang="zh-CN" altLang="en-US" sz="1600">
+                        <a:solidFill>
+                          <a:srgbClr val="1F2A44"/>
+                        </a:solidFill>
+                        <a:latin typeface="+mn-ea"/>
+                        <a:cs typeface="+mn-ea"/>
+                      </a:endParaRPr>
+                    </a:p>
+                  </a:txBody>
+                  <a:tcPr marL="70000" marR="70000" marT="50000" marB="50000" anchor="ctr" anchorCtr="0">
+                    <a:lnL w="9525">
+                      <a:solidFill>
+                        <a:srgbClr val="D8DEE9"/>
+                      </a:solidFill>
+                    </a:lnL>
+                    <a:lnR w="9525">
+                      <a:solidFill>
+                        <a:srgbClr val="D8DEE9"/>
+                      </a:solidFill>
+                    </a:lnR>
+                    <a:lnT w="9525">
+                      <a:solidFill>
+                        <a:srgbClr val="D8DEE9"/>
+                      </a:solidFill>
+                    </a:lnT>
+                    <a:lnB w="9525">
+                      <a:solidFill>
+                        <a:srgbClr val="D8DEE9"/>
+                      </a:solidFill>
+                    </a:lnB>
+                    <a:solidFill>
+                      <a:srgbClr val="F7F9FC"/>
+                    </a:solidFill>
+                  </a:tcPr>
+                </a:tc>
+              </a:tr>
+            </a:tbl>
+          </a:graphicData>
+        </a:graphic>
+      </p:graphicFrame>
+      <p:sp>
+        <p:nvSpPr>
+          <p:cNvPr id="2" name="灯片编号占位符 1"/>
+          <p:cNvSpPr>
+            <a:spLocks noGrp="1"/>
+          </p:cNvSpPr>
+          <p:nvPr>
+            <p:ph type="sldNum" sz="quarter" idx="12"/>
+          </p:nvPr>
+        </p:nvSpPr>
+        <p:spPr/>
+        <p:txBody>
+          <a:bodyPr/>
+          <a:p>
+            <a:fld id="{3B469B21-F3E0-463C-B78A-30764B838394}" type="slidenum">
+              <a:rPr lang="zh-CN" altLang="en-US"/>
+            </a:fld>
+            <a:endParaRPr lang="zh-CN" altLang="en-US"/>
+          </a:p>
+        </p:txBody>
+      </p:sp>
+      <p:sp>
+        <p:nvSpPr>
+          <p:cNvPr id="3" name="文本框 2"/>
+          <p:cNvSpPr txBox="1"/>
+          <p:nvPr/>
+        </p:nvSpPr>
+        <p:spPr>
+          <a:xfrm>
+            <a:off x="545465" y="1103630"/>
+            <a:ext cx="11074400" cy="590550"/>
+          </a:xfrm>
+          <a:prstGeom prst="rect">
+            <a:avLst/>
+          </a:prstGeom>
+          <a:noFill/>
+        </p:spPr>
+        <p:txBody>
+          <a:bodyPr wrap="square" rtlCol="0">
+            <a:noAutofit/>
+          </a:bodyPr>
+          <a:p>
+            <a:r>
+              <a:rPr lang="zh-CN" altLang="en-US">
+                <a:solidFill>
+                  <a:srgbClr val="1F2A44"/>
+                </a:solidFill>
+                <a:latin typeface="微软雅黑"/>
+                <a:ea typeface="微软雅黑"/>
+                <a:sym typeface="+mn-ea"/>
+              </a:rPr>
+              <a:t>硬件侧已完成 ATU、HPU 与 部分GCU 关键子模块 RTL 原型，覆盖多前沿求解中的任务流控制、依赖检查、双缓冲、主元选择与行映射。</a:t>
+            </a:r>
+            <a:endParaRPr lang="zh-CN" altLang="en-US"/>
+          </a:p>
+          <a:p>
+            <a:endParaRPr lang="zh-CN" altLang="en-US"/>
+          </a:p>
+        </p:txBody>
+      </p:sp>
+    </p:spTree>
+    <p:custDataLst>
+      <p:tags r:id="rId2"/>
+    </p:custDataLst>
+  </p:cSld>
+  <p:clrMapOvr>
+    <a:masterClrMapping/>
+  </p:clrMapOvr>
+</p:sld>
+</file>
+
+<file path=ppt/slides/slide11.xml><?xml version="1.0" encoding="utf-8"?>
+<p:sld xmlns:a="http://schemas.openxmlformats.org/drawingml/2006/main" xmlns:r="http://schemas.openxmlformats.org/officeDocument/2006/relationships" xmlns:p="http://schemas.openxmlformats.org/presentationml/2006/main">
+  <p:cSld>
+    <p:spTree>
+      <p:nvGrpSpPr>
+        <p:cNvPr id="1" name=""/>
+        <p:cNvGrpSpPr/>
+        <p:nvPr/>
+      </p:nvGrpSpPr>
+      <p:grpSpPr/>
+      <p:sp>
+        <p:nvSpPr>
+          <p:cNvPr id="2" name="标题 1"/>
+          <p:cNvSpPr>
+            <a:spLocks noGrp="1"/>
+          </p:cNvSpPr>
+          <p:nvPr>
+            <p:ph type="title"/>
+          </p:nvPr>
+        </p:nvSpPr>
+        <p:spPr/>
+        <p:txBody>
+          <a:bodyPr/>
+          <a:p>
+            <a:r>
+              <a:rPr lang="zh-CN" altLang="en-US"/>
+              <a:t>实验</a:t>
+            </a:r>
+            <a:r>
+              <a:rPr lang="zh-CN" altLang="en-US"/>
+              <a:t>进展</a:t>
+            </a:r>
+            <a:endParaRPr lang="zh-CN" altLang="en-US"/>
+          </a:p>
+        </p:txBody>
+      </p:sp>
+      <p:sp>
+        <p:nvSpPr>
+          <p:cNvPr id="4" name="灯片编号占位符 3"/>
+          <p:cNvSpPr>
+            <a:spLocks noGrp="1"/>
+          </p:cNvSpPr>
+          <p:nvPr>
+            <p:ph type="sldNum" sz="quarter" idx="12"/>
+          </p:nvPr>
+        </p:nvSpPr>
+        <p:spPr/>
+        <p:txBody>
+          <a:bodyPr/>
+          <a:p>
+            <a:fld id="{3B469B21-F3E0-463C-B78A-30764B838394}" type="slidenum">
+              <a:rPr lang="zh-CN" altLang="en-US"/>
+            </a:fld>
+            <a:endParaRPr lang="zh-CN" altLang="en-US"/>
+          </a:p>
+        </p:txBody>
+      </p:sp>
+      <p:sp>
+        <p:nvSpPr>
+          <p:cNvPr id="5" name="文本框 4"/>
+          <p:cNvSpPr txBox="1"/>
+          <p:nvPr/>
+        </p:nvSpPr>
+        <p:spPr>
+          <a:xfrm>
+            <a:off x="278130" y="967105"/>
+            <a:ext cx="11247120" cy="2168525"/>
+          </a:xfrm>
+          <a:prstGeom prst="rect">
+            <a:avLst/>
+          </a:prstGeom>
+          <a:noFill/>
+        </p:spPr>
+        <p:txBody>
+          <a:bodyPr wrap="square" rtlCol="0">
+            <a:spAutoFit/>
+          </a:bodyPr>
+          <a:p>
+            <a:pPr indent="0" fontAlgn="auto">
+              <a:lnSpc>
+                <a:spcPct val="150000"/>
+              </a:lnSpc>
+            </a:pPr>
+            <a:r>
+              <a:rPr lang="zh-CN" altLang="en-US"/>
+              <a:t>完成了面向硬件加速器的前处理与任务生成工具链</a:t>
+            </a:r>
+            <a:r>
+              <a:rPr lang="en-US" altLang="zh-CN"/>
+              <a:t>。</a:t>
+            </a:r>
+            <a:r>
+              <a:rPr lang="zh-CN" altLang="en-US"/>
+              <a:t>主要负责的是硬件执行前必须准备的数据、任务、映射和量化输入</a:t>
+            </a:r>
+            <a:r>
+              <a:rPr lang="en-US" altLang="zh-CN"/>
+              <a:t>。</a:t>
+            </a:r>
+            <a:endParaRPr lang="en-US" altLang="zh-CN"/>
+          </a:p>
+          <a:p>
+            <a:pPr indent="0" fontAlgn="auto">
+              <a:lnSpc>
+                <a:spcPct val="150000"/>
+              </a:lnSpc>
+            </a:pPr>
+            <a:r>
+              <a:rPr lang="zh-CN" altLang="en-US"/>
+              <a:t>软件侧目前已经完成了从稀疏矩阵到硬件执行输入的完整前处理流程。首先对矩阵进行排序和消去树分析，生成超节点和每个节点的前沿范围；随后为硬件生成任务描述、父子节点 </a:t>
+            </a:r>
+            <a:r>
+              <a:rPr lang="en-US" altLang="zh-CN"/>
+              <a:t>update </a:t>
+            </a:r>
+            <a:r>
+              <a:rPr lang="zh-CN" altLang="en-US"/>
+              <a:t>映射表和内存布局。并按照量化算法的要求</a:t>
+            </a:r>
+            <a:r>
+              <a:rPr lang="en-US" altLang="zh-CN"/>
+              <a:t>，</a:t>
+            </a:r>
+            <a:r>
+              <a:rPr lang="zh-CN" altLang="en-US"/>
+              <a:t>对矩阵的原始数据进行</a:t>
+            </a:r>
+            <a:r>
+              <a:rPr lang="zh-CN" altLang="en-US"/>
+              <a:t>量化</a:t>
+            </a:r>
+            <a:endParaRPr lang="zh-CN" altLang="en-US"/>
+          </a:p>
+        </p:txBody>
+      </p:sp>
+      <p:sp>
+        <p:nvSpPr>
+          <p:cNvPr id="7" name="矩形 6"/>
+          <p:cNvSpPr/>
+          <p:nvPr/>
+        </p:nvSpPr>
+        <p:spPr>
+          <a:xfrm>
+            <a:off x="654050" y="3676015"/>
+            <a:ext cx="1374775" cy="763270"/>
+          </a:xfrm>
+          <a:prstGeom prst="rect">
+            <a:avLst/>
+          </a:prstGeom>
+        </p:spPr>
+        <p:style>
+          <a:lnRef idx="2">
+            <a:schemeClr val="accent1">
+              <a:lumMod val="75000"/>
+            </a:schemeClr>
+          </a:lnRef>
+          <a:fillRef idx="1">
+            <a:schemeClr val="accent1"/>
+          </a:fillRef>
+          <a:effectRef idx="0">
+            <a:srgbClr val="FFFFFF"/>
+          </a:effectRef>
+          <a:fontRef idx="minor">
+            <a:schemeClr val="lt1"/>
+          </a:fontRef>
+        </p:style>
+        <p:txBody>
+          <a:bodyPr rtlCol="0" anchor="ctr"/>
+          <a:p>
+            <a:pPr algn="ctr"/>
+            <a:r>
+              <a:rPr lang="zh-CN" altLang="en-US"/>
+              <a:t>稀疏矩阵</a:t>
+            </a:r>
+            <a:endParaRPr lang="zh-CN" altLang="en-US"/>
+          </a:p>
+        </p:txBody>
+      </p:sp>
+      <p:sp>
+        <p:nvSpPr>
+          <p:cNvPr id="8" name="矩形 7"/>
+          <p:cNvSpPr/>
+          <p:nvPr/>
+        </p:nvSpPr>
+        <p:spPr>
+          <a:xfrm>
+            <a:off x="3712210" y="3676015"/>
+            <a:ext cx="1374775" cy="763270"/>
+          </a:xfrm>
+          <a:prstGeom prst="rect">
+            <a:avLst/>
+          </a:prstGeom>
+        </p:spPr>
+        <p:style>
+          <a:lnRef idx="2">
+            <a:schemeClr val="accent1">
+              <a:lumMod val="75000"/>
+            </a:schemeClr>
+          </a:lnRef>
+          <a:fillRef idx="1">
+            <a:schemeClr val="accent1"/>
+          </a:fillRef>
+          <a:effectRef idx="0">
+            <a:srgbClr val="FFFFFF"/>
+          </a:effectRef>
+          <a:fontRef idx="minor">
+            <a:schemeClr val="lt1"/>
+          </a:fontRef>
+        </p:style>
+        <p:txBody>
+          <a:bodyPr rtlCol="0" anchor="ctr"/>
+          <a:p>
+            <a:pPr algn="ctr"/>
+            <a:r>
+              <a:rPr lang="zh-CN" altLang="en-US"/>
+              <a:t>重排序</a:t>
+            </a:r>
+            <a:endParaRPr lang="zh-CN" altLang="en-US"/>
+          </a:p>
+        </p:txBody>
+      </p:sp>
+      <p:sp>
+        <p:nvSpPr>
+          <p:cNvPr id="9" name="矩形 8"/>
+          <p:cNvSpPr/>
+          <p:nvPr/>
+        </p:nvSpPr>
+        <p:spPr>
+          <a:xfrm>
+            <a:off x="6770370" y="3676015"/>
+            <a:ext cx="1374775" cy="763270"/>
+          </a:xfrm>
+          <a:prstGeom prst="rect">
+            <a:avLst/>
+          </a:prstGeom>
+        </p:spPr>
+        <p:style>
+          <a:lnRef idx="2">
+            <a:schemeClr val="accent1">
+              <a:lumMod val="75000"/>
+            </a:schemeClr>
+          </a:lnRef>
+          <a:fillRef idx="1">
+            <a:schemeClr val="accent1"/>
+          </a:fillRef>
+          <a:effectRef idx="0">
+            <a:srgbClr val="FFFFFF"/>
+          </a:effectRef>
+          <a:fontRef idx="minor">
+            <a:schemeClr val="lt1"/>
+          </a:fontRef>
+        </p:style>
+        <p:txBody>
+          <a:bodyPr rtlCol="0" anchor="ctr"/>
+          <a:p>
+            <a:pPr algn="ctr"/>
+            <a:r>
+              <a:rPr lang="zh-CN" altLang="en-US"/>
+              <a:t>消去</a:t>
+            </a:r>
+            <a:r>
+              <a:rPr lang="zh-CN" altLang="en-US"/>
+              <a:t>树</a:t>
+            </a:r>
+            <a:endParaRPr lang="zh-CN" altLang="en-US"/>
+          </a:p>
+        </p:txBody>
+      </p:sp>
+      <p:sp>
+        <p:nvSpPr>
+          <p:cNvPr id="10" name="矩形 9"/>
+          <p:cNvSpPr/>
+          <p:nvPr/>
+        </p:nvSpPr>
+        <p:spPr>
+          <a:xfrm>
+            <a:off x="9828530" y="3676015"/>
+            <a:ext cx="1374775" cy="763270"/>
+          </a:xfrm>
+          <a:prstGeom prst="rect">
+            <a:avLst/>
+          </a:prstGeom>
+        </p:spPr>
+        <p:style>
+          <a:lnRef idx="2">
+            <a:schemeClr val="accent1">
+              <a:lumMod val="75000"/>
+            </a:schemeClr>
+          </a:lnRef>
+          <a:fillRef idx="1">
+            <a:schemeClr val="accent1"/>
+          </a:fillRef>
+          <a:effectRef idx="0">
+            <a:srgbClr val="FFFFFF"/>
+          </a:effectRef>
+          <a:fontRef idx="minor">
+            <a:schemeClr val="lt1"/>
+          </a:fontRef>
+        </p:style>
+        <p:txBody>
+          <a:bodyPr rtlCol="0" anchor="ctr"/>
+          <a:p>
+            <a:pPr algn="ctr"/>
+            <a:r>
+              <a:rPr lang="zh-CN" altLang="en-US"/>
+              <a:t>原始</a:t>
+            </a:r>
+            <a:r>
+              <a:rPr lang="zh-CN" altLang="en-US"/>
+              <a:t>量化</a:t>
+            </a:r>
+            <a:endParaRPr lang="zh-CN" altLang="en-US"/>
+          </a:p>
+        </p:txBody>
+      </p:sp>
+      <p:sp>
+        <p:nvSpPr>
+          <p:cNvPr id="16" name="矩形 15"/>
+          <p:cNvSpPr/>
+          <p:nvPr/>
+        </p:nvSpPr>
+        <p:spPr>
+          <a:xfrm>
+            <a:off x="6770370" y="5191760"/>
+            <a:ext cx="1374775" cy="763270"/>
+          </a:xfrm>
+          <a:prstGeom prst="rect">
+            <a:avLst/>
+          </a:prstGeom>
+        </p:spPr>
+        <p:style>
+          <a:lnRef idx="2">
+            <a:schemeClr val="accent1">
+              <a:lumMod val="75000"/>
+            </a:schemeClr>
+          </a:lnRef>
+          <a:fillRef idx="1">
+            <a:schemeClr val="accent1"/>
+          </a:fillRef>
+          <a:effectRef idx="0">
+            <a:srgbClr val="FFFFFF"/>
+          </a:effectRef>
+          <a:fontRef idx="minor">
+            <a:schemeClr val="lt1"/>
+          </a:fontRef>
+        </p:style>
+        <p:txBody>
+          <a:bodyPr rtlCol="0" anchor="ctr"/>
+          <a:p>
+            <a:pPr algn="ctr"/>
+            <a:r>
+              <a:rPr lang="zh-CN" altLang="en-US"/>
+              <a:t>任务</a:t>
+            </a:r>
+            <a:r>
+              <a:rPr lang="zh-CN" altLang="en-US"/>
+              <a:t>描述</a:t>
+            </a:r>
+            <a:endParaRPr lang="zh-CN" altLang="en-US"/>
+          </a:p>
+        </p:txBody>
+      </p:sp>
+      <p:sp>
+        <p:nvSpPr>
+          <p:cNvPr id="17" name="矩形 16"/>
+          <p:cNvSpPr/>
+          <p:nvPr/>
+        </p:nvSpPr>
+        <p:spPr>
+          <a:xfrm>
+            <a:off x="9828530" y="5191760"/>
+            <a:ext cx="1374775" cy="763270"/>
+          </a:xfrm>
+          <a:prstGeom prst="rect">
+            <a:avLst/>
+          </a:prstGeom>
+        </p:spPr>
+        <p:style>
+          <a:lnRef idx="2">
+            <a:schemeClr val="accent1">
+              <a:lumMod val="75000"/>
+            </a:schemeClr>
+          </a:lnRef>
+          <a:fillRef idx="1">
+            <a:schemeClr val="accent1"/>
+          </a:fillRef>
+          <a:effectRef idx="0">
+            <a:srgbClr val="FFFFFF"/>
+          </a:effectRef>
+          <a:fontRef idx="minor">
+            <a:schemeClr val="lt1"/>
+          </a:fontRef>
+        </p:style>
+        <p:txBody>
+          <a:bodyPr rtlCol="0" anchor="ctr"/>
+          <a:p>
+            <a:pPr algn="ctr"/>
+            <a:r>
+              <a:rPr lang="zh-CN" altLang="en-US"/>
+              <a:t>原始数据</a:t>
+            </a:r>
+            <a:endParaRPr lang="zh-CN" altLang="en-US"/>
+          </a:p>
+        </p:txBody>
+      </p:sp>
+      <p:cxnSp>
+        <p:nvCxnSpPr>
+          <p:cNvPr id="18" name="直接箭头连接符 17"/>
+          <p:cNvCxnSpPr>
+            <a:stCxn id="7" idx="3"/>
+            <a:endCxn id="8" idx="1"/>
+          </p:cNvCxnSpPr>
+          <p:nvPr/>
+        </p:nvCxnSpPr>
+        <p:spPr>
+          <a:xfrm>
+            <a:off x="2028825" y="4057650"/>
+            <a:ext cx="1683385" cy="0"/>
+          </a:xfrm>
+          <a:prstGeom prst="straightConnector1">
+            <a:avLst/>
+          </a:prstGeom>
+          <a:ln w="19050">
+            <a:solidFill>
+              <a:schemeClr val="tx1"/>
+            </a:solidFill>
+            <a:tailEnd type="arrow"/>
+          </a:ln>
+        </p:spPr>
+        <p:style>
+          <a:lnRef idx="2">
+            <a:schemeClr val="accent1"/>
+          </a:lnRef>
+          <a:fillRef idx="0">
+            <a:srgbClr val="FFFFFF"/>
+          </a:fillRef>
+          <a:effectRef idx="0">
+            <a:srgbClr val="FFFFFF"/>
+          </a:effectRef>
+          <a:fontRef idx="minor">
+            <a:schemeClr val="tx1"/>
+          </a:fontRef>
+        </p:style>
+      </p:cxnSp>
+      <p:cxnSp>
+        <p:nvCxnSpPr>
+          <p:cNvPr id="19" name="直接箭头连接符 18"/>
+          <p:cNvCxnSpPr>
+            <a:stCxn id="8" idx="3"/>
+            <a:endCxn id="9" idx="1"/>
+          </p:cNvCxnSpPr>
+          <p:nvPr/>
+        </p:nvCxnSpPr>
+        <p:spPr>
+          <a:xfrm>
+            <a:off x="5086985" y="4057650"/>
+            <a:ext cx="1683385" cy="0"/>
+          </a:xfrm>
+          <a:prstGeom prst="straightConnector1">
+            <a:avLst/>
+          </a:prstGeom>
+          <a:ln w="19050">
+            <a:solidFill>
+              <a:schemeClr val="tx1"/>
+            </a:solidFill>
+            <a:tailEnd type="arrow"/>
+          </a:ln>
+        </p:spPr>
+        <p:style>
+          <a:lnRef idx="2">
+            <a:schemeClr val="accent1"/>
+          </a:lnRef>
+          <a:fillRef idx="0">
+            <a:srgbClr val="FFFFFF"/>
+          </a:fillRef>
+          <a:effectRef idx="0">
+            <a:srgbClr val="FFFFFF"/>
+          </a:effectRef>
+          <a:fontRef idx="minor">
+            <a:schemeClr val="tx1"/>
+          </a:fontRef>
+        </p:style>
+      </p:cxnSp>
+      <p:cxnSp>
+        <p:nvCxnSpPr>
+          <p:cNvPr id="20" name="直接箭头连接符 19"/>
+          <p:cNvCxnSpPr>
+            <a:stCxn id="9" idx="3"/>
+            <a:endCxn id="10" idx="1"/>
+          </p:cNvCxnSpPr>
+          <p:nvPr/>
+        </p:nvCxnSpPr>
+        <p:spPr>
+          <a:xfrm>
+            <a:off x="8145145" y="4057650"/>
+            <a:ext cx="1683385" cy="0"/>
+          </a:xfrm>
+          <a:prstGeom prst="straightConnector1">
+            <a:avLst/>
+          </a:prstGeom>
+          <a:ln w="19050">
+            <a:solidFill>
+              <a:schemeClr val="tx1"/>
+            </a:solidFill>
+            <a:tailEnd type="arrow"/>
+          </a:ln>
+        </p:spPr>
+        <p:style>
+          <a:lnRef idx="2">
+            <a:schemeClr val="accent1"/>
+          </a:lnRef>
+          <a:fillRef idx="0">
+            <a:srgbClr val="FFFFFF"/>
+          </a:fillRef>
+          <a:effectRef idx="0">
+            <a:srgbClr val="FFFFFF"/>
+          </a:effectRef>
+          <a:fontRef idx="minor">
+            <a:schemeClr val="tx1"/>
+          </a:fontRef>
+        </p:style>
+      </p:cxnSp>
+      <p:cxnSp>
+        <p:nvCxnSpPr>
+          <p:cNvPr id="21" name="直接箭头连接符 20"/>
+          <p:cNvCxnSpPr>
+            <a:stCxn id="9" idx="2"/>
+            <a:endCxn id="16" idx="0"/>
+          </p:cNvCxnSpPr>
+          <p:nvPr/>
+        </p:nvCxnSpPr>
+        <p:spPr>
+          <a:xfrm>
+            <a:off x="7458075" y="4439285"/>
+            <a:ext cx="0" cy="752475"/>
+          </a:xfrm>
+          <a:prstGeom prst="straightConnector1">
+            <a:avLst/>
+          </a:prstGeom>
+          <a:ln w="19050">
+            <a:solidFill>
+              <a:schemeClr val="tx1"/>
+            </a:solidFill>
+            <a:tailEnd type="arrow"/>
+          </a:ln>
+        </p:spPr>
+        <p:style>
+          <a:lnRef idx="2">
+            <a:schemeClr val="accent1"/>
+          </a:lnRef>
+          <a:fillRef idx="0">
+            <a:srgbClr val="FFFFFF"/>
+          </a:fillRef>
+          <a:effectRef idx="0">
+            <a:srgbClr val="FFFFFF"/>
+          </a:effectRef>
+          <a:fontRef idx="minor">
+            <a:schemeClr val="tx1"/>
+          </a:fontRef>
+        </p:style>
+      </p:cxnSp>
+      <p:cxnSp>
+        <p:nvCxnSpPr>
+          <p:cNvPr id="22" name="直接箭头连接符 21"/>
+          <p:cNvCxnSpPr>
+            <a:stCxn id="10" idx="2"/>
+            <a:endCxn id="17" idx="0"/>
+          </p:cNvCxnSpPr>
+          <p:nvPr/>
+        </p:nvCxnSpPr>
+        <p:spPr>
+          <a:xfrm>
+            <a:off x="10516235" y="4439285"/>
+            <a:ext cx="0" cy="752475"/>
+          </a:xfrm>
+          <a:prstGeom prst="straightConnector1">
+            <a:avLst/>
+          </a:prstGeom>
+          <a:ln w="19050">
+            <a:solidFill>
+              <a:schemeClr val="tx1"/>
+            </a:solidFill>
+            <a:tailEnd type="arrow"/>
+          </a:ln>
+        </p:spPr>
+        <p:style>
+          <a:lnRef idx="2">
+            <a:schemeClr val="accent1"/>
+          </a:lnRef>
+          <a:fillRef idx="0">
+            <a:srgbClr val="FFFFFF"/>
+          </a:fillRef>
+          <a:effectRef idx="0">
+            <a:srgbClr val="FFFFFF"/>
+          </a:effectRef>
+          <a:fontRef idx="minor">
+            <a:schemeClr val="tx1"/>
+          </a:fontRef>
+        </p:style>
+      </p:cxnSp>
+    </p:spTree>
+    <p:custDataLst>
+      <p:tags r:id="rId1"/>
+    </p:custDataLst>
+  </p:cSld>
+  <p:clrMapOvr>
+    <a:masterClrMapping/>
+  </p:clrMapOvr>
+</p:sld>
+</file>
+
+<file path=ppt/slides/slide12.xml><?xml version="1.0" encoding="utf-8"?>
+<p:sld xmlns:a="http://schemas.openxmlformats.org/drawingml/2006/main" xmlns:r="http://schemas.openxmlformats.org/officeDocument/2006/relationships" xmlns:p="http://schemas.openxmlformats.org/presentationml/2006/main">
+  <p:cSld>
+    <p:spTree>
+      <p:nvGrpSpPr>
+        <p:cNvPr id="1" name=""/>
+        <p:cNvGrpSpPr/>
+        <p:nvPr/>
+      </p:nvGrpSpPr>
+      <p:grpSpPr/>
+      <p:sp>
+        <p:nvSpPr>
+          <p:cNvPr id="2" name="标题 1"/>
+          <p:cNvSpPr>
+            <a:spLocks noGrp="1"/>
+          </p:cNvSpPr>
+          <p:nvPr>
+            <p:ph type="title"/>
+          </p:nvPr>
+        </p:nvSpPr>
+        <p:spPr/>
+        <p:txBody>
+          <a:bodyPr/>
+          <a:p>
+            <a:r>
+              <a:rPr lang="zh-CN" altLang="en-US"/>
+              <a:t>实验</a:t>
+            </a:r>
+            <a:r>
+              <a:rPr lang="zh-CN" altLang="en-US"/>
+              <a:t>进展</a:t>
+            </a:r>
+            <a:endParaRPr lang="zh-CN" altLang="en-US"/>
+          </a:p>
+        </p:txBody>
+      </p:sp>
+      <p:sp>
+        <p:nvSpPr>
+          <p:cNvPr id="4" name="灯片编号占位符 3"/>
+          <p:cNvSpPr>
+            <a:spLocks noGrp="1"/>
+          </p:cNvSpPr>
+          <p:nvPr>
+            <p:ph type="sldNum" sz="quarter" idx="12"/>
+          </p:nvPr>
+        </p:nvSpPr>
+        <p:spPr/>
+        <p:txBody>
+          <a:bodyPr/>
+          <a:p>
+            <a:fld id="{3B469B21-F3E0-463C-B78A-30764B838394}" type="slidenum">
+              <a:rPr lang="zh-CN" altLang="en-US"/>
+            </a:fld>
+            <a:endParaRPr lang="zh-CN" altLang="en-US"/>
+          </a:p>
+        </p:txBody>
+      </p:sp>
+      <p:graphicFrame>
+        <p:nvGraphicFramePr>
+          <p:cNvPr id="31" name="硬件模块完成情况表"/>
+          <p:cNvGraphicFramePr>
+            <a:graphicFrameLocks noGrp="1"/>
+          </p:cNvGraphicFramePr>
+          <p:nvPr>
+            <p:custDataLst>
+              <p:tags r:id="rId1"/>
+            </p:custDataLst>
+          </p:nvPr>
+        </p:nvGraphicFramePr>
+        <p:xfrm>
+          <a:off x="1704975" y="1431290"/>
+          <a:ext cx="7934325" cy="4391660"/>
+        </p:xfrm>
+        <a:graphic>
+          <a:graphicData uri="http://schemas.openxmlformats.org/drawingml/2006/table">
+            <a:tbl>
+              <a:tblPr firstRow="1" bandRow="1">
+                <a:tableStyleId>{5C22544A-7EE6-4342-B048-85BDC9FD1C3A}</a:tableStyleId>
+              </a:tblPr>
+              <a:tblGrid>
+                <a:gridCol w="2155190"/>
+                <a:gridCol w="5779135"/>
+              </a:tblGrid>
+              <a:tr h="394970">
+                <a:tc>
+                  <a:txBody>
+                    <a:bodyPr wrap="square">
+                      <a:spAutoFit/>
+                    </a:bodyPr>
+                    <a:lstStyle/>
+                    <a:p>
+                      <a:pPr algn="ctr"/>
+                      <a:r>
+                        <a:rPr lang="zh-CN" altLang="en-US" sz="1250" b="1">
+                          <a:solidFill>
+                            <a:srgbClr val="FFFFFF"/>
+                          </a:solidFill>
+                          <a:latin typeface="微软雅黑"/>
+                          <a:ea typeface="微软雅黑"/>
+                        </a:rPr>
+                        <a:t>模块</a:t>
+                      </a:r>
+                      <a:endParaRPr lang="zh-CN" altLang="en-US" sz="1250"/>
+                    </a:p>
+                  </a:txBody>
+                  <a:tcPr marL="70000" marR="70000" marT="50000" marB="50000" anchor="ctr" anchorCtr="0">
+                    <a:lnL w="9525">
+                      <a:solidFill>
+                        <a:srgbClr val="D8DEE9"/>
+                      </a:solidFill>
+                    </a:lnL>
+                    <a:lnR w="9525">
+                      <a:solidFill>
+                        <a:srgbClr val="D8DEE9"/>
+                      </a:solidFill>
+                    </a:lnR>
+                    <a:lnT w="9525">
+                      <a:solidFill>
+                        <a:srgbClr val="D8DEE9"/>
+                      </a:solidFill>
+                    </a:lnT>
+                    <a:lnB w="9525">
+                      <a:solidFill>
+                        <a:srgbClr val="D8DEE9"/>
+                      </a:solidFill>
+                    </a:lnB>
+                    <a:solidFill>
+                      <a:srgbClr val="2F5597"/>
+                    </a:solidFill>
+                  </a:tcPr>
+                </a:tc>
+                <a:tc>
+                  <a:txBody>
+                    <a:bodyPr wrap="square">
+                      <a:spAutoFit/>
+                    </a:bodyPr>
+                    <a:lstStyle/>
+                    <a:p>
+                      <a:pPr algn="ctr"/>
+                      <a:r>
+                        <a:rPr lang="zh-CN" altLang="en-US" sz="1250" b="1">
+                          <a:solidFill>
+                            <a:srgbClr val="FFFFFF"/>
+                          </a:solidFill>
+                          <a:latin typeface="微软雅黑"/>
+                          <a:ea typeface="微软雅黑"/>
+                        </a:rPr>
+                        <a:t>主要功能</a:t>
+                      </a:r>
+                      <a:endParaRPr lang="zh-CN" altLang="en-US" sz="1250"/>
+                    </a:p>
+                  </a:txBody>
+                  <a:tcPr marL="70000" marR="70000" marT="50000" marB="50000" anchor="ctr" anchorCtr="0">
+                    <a:lnL w="9525">
+                      <a:solidFill>
+                        <a:srgbClr val="D8DEE9"/>
+                      </a:solidFill>
+                    </a:lnL>
+                    <a:lnR w="9525">
+                      <a:solidFill>
+                        <a:srgbClr val="D8DEE9"/>
+                      </a:solidFill>
+                    </a:lnR>
+                    <a:lnT w="9525">
+                      <a:solidFill>
+                        <a:srgbClr val="D8DEE9"/>
+                      </a:solidFill>
+                    </a:lnT>
+                    <a:lnB w="9525">
+                      <a:solidFill>
+                        <a:srgbClr val="D8DEE9"/>
+                      </a:solidFill>
+                    </a:lnB>
+                    <a:solidFill>
+                      <a:srgbClr val="2F5597"/>
+                    </a:solidFill>
+                  </a:tcPr>
+                </a:tc>
+              </a:tr>
+              <a:tr h="571500">
+                <a:tc>
+                  <a:txBody>
+                    <a:bodyPr wrap="square">
+                      <a:spAutoFit/>
+                    </a:bodyPr>
+                    <a:lstStyle/>
+                    <a:p>
+                      <a:pPr algn="ctr"/>
+                      <a:r>
+                        <a:rPr lang="zh-CN" altLang="en-US" sz="1600">
+                          <a:solidFill>
+                            <a:srgbClr val="1F2A44"/>
+                          </a:solidFill>
+                          <a:latin typeface="+mn-ea"/>
+                          <a:cs typeface="+mn-ea"/>
+                        </a:rPr>
+                        <a:t>矩阵</a:t>
+                      </a:r>
+                      <a:r>
+                        <a:rPr lang="zh-CN" altLang="en-US" sz="1600">
+                          <a:solidFill>
+                            <a:srgbClr val="1F2A44"/>
+                          </a:solidFill>
+                          <a:latin typeface="+mn-ea"/>
+                          <a:cs typeface="+mn-ea"/>
+                        </a:rPr>
+                        <a:t>输入</a:t>
+                      </a:r>
+                      <a:endParaRPr lang="zh-CN" altLang="en-US" sz="1600">
+                        <a:solidFill>
+                          <a:srgbClr val="1F2A44"/>
+                        </a:solidFill>
+                        <a:latin typeface="+mn-ea"/>
+                        <a:cs typeface="+mn-ea"/>
+                      </a:endParaRPr>
+                    </a:p>
+                  </a:txBody>
+                  <a:tcPr marL="70000" marR="70000" marT="50000" marB="50000" anchor="ctr" anchorCtr="0">
+                    <a:lnL w="9525">
+                      <a:solidFill>
+                        <a:srgbClr val="D8DEE9"/>
+                      </a:solidFill>
+                    </a:lnL>
+                    <a:lnR w="9525">
+                      <a:solidFill>
+                        <a:srgbClr val="D8DEE9"/>
+                      </a:solidFill>
+                    </a:lnR>
+                    <a:lnT w="9525">
+                      <a:solidFill>
+                        <a:srgbClr val="D8DEE9"/>
+                      </a:solidFill>
+                    </a:lnT>
+                    <a:lnB w="9525">
+                      <a:solidFill>
+                        <a:srgbClr val="D8DEE9"/>
+                      </a:solidFill>
+                    </a:lnB>
+                    <a:solidFill>
+                      <a:srgbClr val="FFFFFF"/>
+                    </a:solidFill>
+                  </a:tcPr>
+                </a:tc>
+                <a:tc>
+                  <a:txBody>
+                    <a:bodyPr wrap="square">
+                      <a:spAutoFit/>
+                    </a:bodyPr>
+                    <a:lstStyle/>
+                    <a:p>
+                      <a:pPr algn="ctr"/>
+                      <a:r>
+                        <a:rPr lang="zh-CN" altLang="en-US" sz="1600">
+                          <a:solidFill>
+                            <a:srgbClr val="1F2A44"/>
+                          </a:solidFill>
+                          <a:latin typeface="+mn-ea"/>
+                          <a:cs typeface="+mn-ea"/>
+                        </a:rPr>
+                        <a:t>统一矩阵输入</a:t>
+                      </a:r>
+                      <a:r>
+                        <a:rPr lang="en-US" altLang="zh-CN" sz="1600">
+                          <a:solidFill>
+                            <a:srgbClr val="1F2A44"/>
+                          </a:solidFill>
+                          <a:latin typeface="+mn-ea"/>
+                          <a:cs typeface="+mn-ea"/>
+                        </a:rPr>
+                        <a:t>，</a:t>
+                      </a:r>
+                      <a:r>
+                        <a:rPr lang="zh-CN" altLang="en-US" sz="1600">
+                          <a:solidFill>
+                            <a:srgbClr val="1F2A44"/>
+                          </a:solidFill>
+                          <a:latin typeface="+mn-ea"/>
+                          <a:cs typeface="+mn-ea"/>
+                        </a:rPr>
+                        <a:t>将其他压缩格式</a:t>
+                      </a:r>
+                      <a:r>
+                        <a:rPr lang="en-US" altLang="zh-CN" sz="1600">
+                          <a:solidFill>
+                            <a:srgbClr val="1F2A44"/>
+                          </a:solidFill>
+                          <a:latin typeface="+mn-ea"/>
+                          <a:cs typeface="+mn-ea"/>
+                        </a:rPr>
+                        <a:t>/</a:t>
+                      </a:r>
+                      <a:r>
+                        <a:rPr lang="zh-CN" altLang="en-US" sz="1600">
+                          <a:solidFill>
+                            <a:srgbClr val="1F2A44"/>
+                          </a:solidFill>
+                          <a:latin typeface="+mn-ea"/>
+                          <a:cs typeface="+mn-ea"/>
+                        </a:rPr>
+                        <a:t>无压缩矩阵变为</a:t>
+                      </a:r>
+                      <a:r>
+                        <a:rPr lang="en-US" altLang="zh-CN" sz="1600">
+                          <a:solidFill>
+                            <a:srgbClr val="1F2A44"/>
+                          </a:solidFill>
+                          <a:latin typeface="+mn-ea"/>
+                          <a:cs typeface="+mn-ea"/>
+                        </a:rPr>
+                        <a:t>CSR</a:t>
+                      </a:r>
+                      <a:r>
+                        <a:rPr lang="zh-CN" altLang="en-US" sz="1600">
+                          <a:solidFill>
+                            <a:srgbClr val="1F2A44"/>
+                          </a:solidFill>
+                          <a:latin typeface="+mn-ea"/>
+                          <a:cs typeface="+mn-ea"/>
+                        </a:rPr>
+                        <a:t>格式</a:t>
+                      </a:r>
+                      <a:endParaRPr lang="zh-CN" altLang="en-US" sz="1600">
+                        <a:solidFill>
+                          <a:srgbClr val="1F2A44"/>
+                        </a:solidFill>
+                        <a:latin typeface="+mn-ea"/>
+                        <a:cs typeface="+mn-ea"/>
+                      </a:endParaRPr>
+                    </a:p>
+                  </a:txBody>
+                  <a:tcPr marL="70000" marR="70000" marT="50000" marB="50000" anchor="ctr" anchorCtr="0">
+                    <a:lnL w="9525">
+                      <a:solidFill>
+                        <a:srgbClr val="D8DEE9"/>
+                      </a:solidFill>
+                    </a:lnL>
+                    <a:lnR w="9525">
+                      <a:solidFill>
+                        <a:srgbClr val="D8DEE9"/>
+                      </a:solidFill>
+                    </a:lnR>
+                    <a:lnT w="9525">
+                      <a:solidFill>
+                        <a:srgbClr val="D8DEE9"/>
+                      </a:solidFill>
+                    </a:lnT>
+                    <a:lnB w="9525">
+                      <a:solidFill>
+                        <a:srgbClr val="D8DEE9"/>
+                      </a:solidFill>
+                    </a:lnB>
+                    <a:solidFill>
+                      <a:srgbClr val="FFFFFF"/>
+                    </a:solidFill>
+                  </a:tcPr>
+                </a:tc>
+              </a:tr>
+              <a:tr h="570865">
+                <a:tc>
+                  <a:txBody>
+                    <a:bodyPr wrap="square">
+                      <a:spAutoFit/>
+                    </a:bodyPr>
+                    <a:lstStyle/>
+                    <a:p>
+                      <a:pPr algn="ctr"/>
+                      <a:r>
+                        <a:rPr lang="zh-CN" altLang="en-US" sz="1600">
+                          <a:solidFill>
+                            <a:srgbClr val="1F2A44"/>
+                          </a:solidFill>
+                          <a:latin typeface="+mn-ea"/>
+                          <a:cs typeface="+mn-ea"/>
+                        </a:rPr>
+                        <a:t>符号</a:t>
+                      </a:r>
+                      <a:r>
+                        <a:rPr lang="zh-CN" altLang="en-US" sz="1600">
+                          <a:solidFill>
+                            <a:srgbClr val="1F2A44"/>
+                          </a:solidFill>
+                          <a:latin typeface="+mn-ea"/>
+                          <a:cs typeface="+mn-ea"/>
+                        </a:rPr>
+                        <a:t>分析</a:t>
+                      </a:r>
+                      <a:endParaRPr lang="zh-CN" altLang="en-US" sz="1600">
+                        <a:solidFill>
+                          <a:srgbClr val="1F2A44"/>
+                        </a:solidFill>
+                        <a:latin typeface="+mn-ea"/>
+                        <a:cs typeface="+mn-ea"/>
+                      </a:endParaRPr>
+                    </a:p>
+                  </a:txBody>
+                  <a:tcPr marL="70000" marR="70000" marT="50000" marB="50000" anchor="ctr" anchorCtr="0">
+                    <a:lnL w="9525">
+                      <a:solidFill>
+                        <a:srgbClr val="D8DEE9"/>
+                      </a:solidFill>
+                    </a:lnL>
+                    <a:lnR w="9525">
+                      <a:solidFill>
+                        <a:srgbClr val="D8DEE9"/>
+                      </a:solidFill>
+                    </a:lnR>
+                    <a:lnT w="9525">
+                      <a:solidFill>
+                        <a:srgbClr val="D8DEE9"/>
+                      </a:solidFill>
+                    </a:lnT>
+                    <a:lnB w="9525">
+                      <a:solidFill>
+                        <a:srgbClr val="D8DEE9"/>
+                      </a:solidFill>
+                    </a:lnB>
+                    <a:solidFill>
+                      <a:srgbClr val="F7F9FC"/>
+                    </a:solidFill>
+                  </a:tcPr>
+                </a:tc>
+                <a:tc>
+                  <a:txBody>
+                    <a:bodyPr wrap="square">
+                      <a:spAutoFit/>
+                    </a:bodyPr>
+                    <a:lstStyle/>
+                    <a:p>
+                      <a:pPr algn="ctr"/>
+                      <a:r>
+                        <a:rPr lang="zh-CN" altLang="en-US" sz="1600">
+                          <a:solidFill>
+                            <a:srgbClr val="1F2A44"/>
+                          </a:solidFill>
+                          <a:latin typeface="+mn-ea"/>
+                        </a:rPr>
+                        <a:t>重排序</a:t>
+                      </a:r>
+                      <a:r>
+                        <a:rPr lang="en-US" altLang="zh-CN" sz="1600">
+                          <a:solidFill>
+                            <a:srgbClr val="1F2A44"/>
+                          </a:solidFill>
+                          <a:latin typeface="+mn-ea"/>
+                        </a:rPr>
+                        <a:t>、</a:t>
+                      </a:r>
+                      <a:r>
+                        <a:rPr lang="zh-CN" altLang="en-US" sz="1600">
+                          <a:solidFill>
+                            <a:srgbClr val="1F2A44"/>
+                          </a:solidFill>
+                          <a:latin typeface="+mn-ea"/>
+                        </a:rPr>
+                        <a:t>消去树生成和超节点</a:t>
+                      </a:r>
+                      <a:r>
+                        <a:rPr lang="zh-CN" altLang="en-US" sz="1600">
+                          <a:solidFill>
+                            <a:srgbClr val="1F2A44"/>
+                          </a:solidFill>
+                          <a:latin typeface="+mn-ea"/>
+                        </a:rPr>
+                        <a:t>生成</a:t>
+                      </a:r>
+                      <a:endParaRPr lang="zh-CN" altLang="en-US" sz="1600">
+                        <a:solidFill>
+                          <a:srgbClr val="1F2A44"/>
+                        </a:solidFill>
+                        <a:latin typeface="+mn-ea"/>
+                      </a:endParaRPr>
+                    </a:p>
+                  </a:txBody>
+                  <a:tcPr marL="70000" marR="70000" marT="50000" marB="50000" anchor="ctr" anchorCtr="0">
+                    <a:lnL w="9525">
+                      <a:solidFill>
+                        <a:srgbClr val="D8DEE9"/>
+                      </a:solidFill>
+                    </a:lnL>
+                    <a:lnR w="9525">
+                      <a:solidFill>
+                        <a:srgbClr val="D8DEE9"/>
+                      </a:solidFill>
+                    </a:lnR>
+                    <a:lnT w="9525">
+                      <a:solidFill>
+                        <a:srgbClr val="D8DEE9"/>
+                      </a:solidFill>
+                    </a:lnT>
+                    <a:lnB w="9525">
+                      <a:solidFill>
+                        <a:srgbClr val="D8DEE9"/>
+                      </a:solidFill>
+                    </a:lnB>
+                    <a:solidFill>
+                      <a:srgbClr val="F7F9FC"/>
+                    </a:solidFill>
+                  </a:tcPr>
+                </a:tc>
+              </a:tr>
+              <a:tr h="570865">
+                <a:tc>
+                  <a:txBody>
+                    <a:bodyPr wrap="square">
+                      <a:spAutoFit/>
+                    </a:bodyPr>
+                    <a:lstStyle/>
+                    <a:p>
+                      <a:pPr algn="ctr"/>
+                      <a:r>
+                        <a:rPr lang="zh-CN" altLang="en-US" sz="1600">
+                          <a:solidFill>
+                            <a:srgbClr val="1F2A44"/>
+                          </a:solidFill>
+                          <a:latin typeface="+mn-ea"/>
+                        </a:rPr>
+                        <a:t>前沿矩阵</a:t>
+                      </a:r>
+                      <a:r>
+                        <a:rPr lang="zh-CN" altLang="en-US" sz="1600">
+                          <a:solidFill>
+                            <a:srgbClr val="1F2A44"/>
+                          </a:solidFill>
+                          <a:latin typeface="+mn-ea"/>
+                        </a:rPr>
+                        <a:t>建模</a:t>
+                      </a:r>
+                      <a:endParaRPr lang="zh-CN" altLang="en-US" sz="1600">
+                        <a:solidFill>
+                          <a:srgbClr val="1F2A44"/>
+                        </a:solidFill>
+                        <a:latin typeface="+mn-ea"/>
+                      </a:endParaRPr>
+                    </a:p>
+                  </a:txBody>
+                  <a:tcPr marL="70000" marR="70000" marT="50000" marB="50000" anchor="ctr" anchorCtr="0">
+                    <a:lnL w="9525">
+                      <a:solidFill>
+                        <a:srgbClr val="D8DEE9"/>
+                      </a:solidFill>
+                    </a:lnL>
+                    <a:lnR w="9525">
+                      <a:solidFill>
+                        <a:srgbClr val="D8DEE9"/>
+                      </a:solidFill>
+                    </a:lnR>
+                    <a:lnT w="9525">
+                      <a:solidFill>
+                        <a:srgbClr val="D8DEE9"/>
+                      </a:solidFill>
+                    </a:lnT>
+                    <a:lnB w="9525">
+                      <a:solidFill>
+                        <a:srgbClr val="D8DEE9"/>
+                      </a:solidFill>
+                    </a:lnB>
+                    <a:solidFill>
+                      <a:srgbClr val="FFFFFF"/>
+                    </a:solidFill>
+                  </a:tcPr>
+                </a:tc>
+                <a:tc>
+                  <a:txBody>
+                    <a:bodyPr wrap="square">
+                      <a:spAutoFit/>
+                    </a:bodyPr>
+                    <a:lstStyle/>
+                    <a:p>
+                      <a:pPr algn="ctr"/>
+                      <a:r>
+                        <a:rPr lang="zh-CN" altLang="en-US" sz="1600">
+                          <a:solidFill>
+                            <a:srgbClr val="1F2A44"/>
+                          </a:solidFill>
+                          <a:latin typeface="+mn-ea"/>
+                          <a:cs typeface="+mn-ea"/>
+                        </a:rPr>
+                        <a:t>为每个节点确定存储空间大小与内存</a:t>
+                      </a:r>
+                      <a:r>
+                        <a:rPr lang="zh-CN" altLang="en-US" sz="1600">
+                          <a:solidFill>
+                            <a:srgbClr val="1F2A44"/>
+                          </a:solidFill>
+                          <a:latin typeface="+mn-ea"/>
+                          <a:cs typeface="+mn-ea"/>
+                        </a:rPr>
+                        <a:t>映射</a:t>
+                      </a:r>
+                      <a:endParaRPr lang="zh-CN" altLang="en-US" sz="1600">
+                        <a:solidFill>
+                          <a:srgbClr val="1F2A44"/>
+                        </a:solidFill>
+                        <a:latin typeface="+mn-ea"/>
+                        <a:cs typeface="+mn-ea"/>
+                      </a:endParaRPr>
+                    </a:p>
+                  </a:txBody>
+                  <a:tcPr marL="70000" marR="70000" marT="50000" marB="50000" anchor="ctr" anchorCtr="0">
+                    <a:lnL w="9525">
+                      <a:solidFill>
+                        <a:srgbClr val="D8DEE9"/>
+                      </a:solidFill>
+                    </a:lnL>
+                    <a:lnR w="9525">
+                      <a:solidFill>
+                        <a:srgbClr val="D8DEE9"/>
+                      </a:solidFill>
+                    </a:lnR>
+                    <a:lnT w="9525">
+                      <a:solidFill>
+                        <a:srgbClr val="D8DEE9"/>
+                      </a:solidFill>
+                    </a:lnT>
+                    <a:lnB w="9525">
+                      <a:solidFill>
+                        <a:srgbClr val="D8DEE9"/>
+                      </a:solidFill>
+                    </a:lnB>
+                    <a:solidFill>
+                      <a:srgbClr val="FFFFFF"/>
+                    </a:solidFill>
+                  </a:tcPr>
+                </a:tc>
+              </a:tr>
+              <a:tr h="570865">
+                <a:tc>
+                  <a:txBody>
+                    <a:bodyPr wrap="square">
+                      <a:spAutoFit/>
+                    </a:bodyPr>
+                    <a:lstStyle/>
+                    <a:p>
+                      <a:pPr algn="ctr"/>
+                      <a:r>
+                        <a:rPr lang="zh-CN" altLang="en-US" sz="1600">
+                          <a:solidFill>
+                            <a:srgbClr val="1F2A44"/>
+                          </a:solidFill>
+                          <a:latin typeface="+mn-ea"/>
+                        </a:rPr>
+                        <a:t>任务</a:t>
+                      </a:r>
+                      <a:r>
+                        <a:rPr lang="zh-CN" altLang="en-US" sz="1600">
+                          <a:solidFill>
+                            <a:srgbClr val="1F2A44"/>
+                          </a:solidFill>
+                          <a:latin typeface="+mn-ea"/>
+                        </a:rPr>
+                        <a:t>生成</a:t>
+                      </a:r>
+                      <a:endParaRPr lang="zh-CN" altLang="en-US" sz="1600">
+                        <a:solidFill>
+                          <a:srgbClr val="1F2A44"/>
+                        </a:solidFill>
+                        <a:latin typeface="+mn-ea"/>
+                      </a:endParaRPr>
+                    </a:p>
+                  </a:txBody>
+                  <a:tcPr marL="70000" marR="70000" marT="50000" marB="50000" anchor="ctr" anchorCtr="0">
+                    <a:lnL w="9525">
+                      <a:solidFill>
+                        <a:srgbClr val="D8DEE9"/>
+                      </a:solidFill>
+                    </a:lnL>
+                    <a:lnR w="9525">
+                      <a:solidFill>
+                        <a:srgbClr val="D8DEE9"/>
+                      </a:solidFill>
+                    </a:lnR>
+                    <a:lnT w="9525">
+                      <a:solidFill>
+                        <a:srgbClr val="D8DEE9"/>
+                      </a:solidFill>
+                    </a:lnT>
+                    <a:lnB w="9525">
+                      <a:solidFill>
+                        <a:srgbClr val="D8DEE9"/>
+                      </a:solidFill>
+                    </a:lnB>
+                    <a:solidFill>
+                      <a:srgbClr val="F7F9FC"/>
+                    </a:solidFill>
+                  </a:tcPr>
+                </a:tc>
+                <a:tc>
+                  <a:txBody>
+                    <a:bodyPr wrap="square">
+                      <a:spAutoFit/>
+                    </a:bodyPr>
+                    <a:lstStyle/>
+                    <a:p>
+                      <a:pPr algn="ctr"/>
+                      <a:r>
+                        <a:rPr lang="zh-CN" altLang="en-US" sz="1600">
+                          <a:solidFill>
+                            <a:srgbClr val="1F2A44"/>
+                          </a:solidFill>
+                          <a:latin typeface="+mn-ea"/>
+                          <a:cs typeface="+mn-ea"/>
+                        </a:rPr>
+                        <a:t>生成</a:t>
+                      </a:r>
+                      <a:r>
+                        <a:rPr lang="en-US" altLang="zh-CN" sz="1600">
+                          <a:solidFill>
+                            <a:srgbClr val="1F2A44"/>
+                          </a:solidFill>
+                          <a:latin typeface="+mn-ea"/>
+                          <a:cs typeface="+mn-ea"/>
+                        </a:rPr>
+                        <a:t>NodeTask</a:t>
+                      </a:r>
+                      <a:r>
+                        <a:rPr lang="zh-CN" altLang="en-US" sz="1600">
+                          <a:solidFill>
+                            <a:srgbClr val="1F2A44"/>
+                          </a:solidFill>
+                          <a:latin typeface="+mn-ea"/>
+                          <a:cs typeface="+mn-ea"/>
+                        </a:rPr>
+                        <a:t>二进制描述符</a:t>
+                      </a:r>
+                      <a:r>
+                        <a:rPr lang="en-US" altLang="zh-CN" sz="1600">
+                          <a:solidFill>
+                            <a:srgbClr val="1F2A44"/>
+                          </a:solidFill>
+                          <a:latin typeface="+mn-ea"/>
+                          <a:cs typeface="+mn-ea"/>
+                        </a:rPr>
+                        <a:t>，</a:t>
+                      </a:r>
+                      <a:r>
+                        <a:rPr lang="zh-CN" altLang="en-US" sz="1600">
+                          <a:solidFill>
+                            <a:srgbClr val="1F2A44"/>
+                          </a:solidFill>
+                          <a:latin typeface="+mn-ea"/>
+                          <a:cs typeface="+mn-ea"/>
+                        </a:rPr>
+                        <a:t>供硬件</a:t>
+                      </a:r>
+                      <a:r>
+                        <a:rPr lang="zh-CN" altLang="en-US" sz="1600">
+                          <a:solidFill>
+                            <a:srgbClr val="1F2A44"/>
+                          </a:solidFill>
+                          <a:latin typeface="+mn-ea"/>
+                          <a:cs typeface="+mn-ea"/>
+                        </a:rPr>
+                        <a:t>调度读取</a:t>
+                      </a:r>
+                      <a:endParaRPr lang="zh-CN" altLang="en-US" sz="1600">
+                        <a:solidFill>
+                          <a:srgbClr val="1F2A44"/>
+                        </a:solidFill>
+                        <a:latin typeface="+mn-ea"/>
+                        <a:cs typeface="+mn-ea"/>
+                      </a:endParaRPr>
+                    </a:p>
+                  </a:txBody>
+                  <a:tcPr marL="70000" marR="70000" marT="50000" marB="50000" anchor="ctr" anchorCtr="0">
+                    <a:lnL w="9525">
+                      <a:solidFill>
+                        <a:srgbClr val="D8DEE9"/>
+                      </a:solidFill>
+                    </a:lnL>
+                    <a:lnR w="9525">
+                      <a:solidFill>
+                        <a:srgbClr val="D8DEE9"/>
+                      </a:solidFill>
+                    </a:lnR>
+                    <a:lnT w="9525">
+                      <a:solidFill>
+                        <a:srgbClr val="D8DEE9"/>
+                      </a:solidFill>
+                    </a:lnT>
+                    <a:lnB w="9525">
+                      <a:solidFill>
+                        <a:srgbClr val="D8DEE9"/>
+                      </a:solidFill>
+                    </a:lnB>
+                    <a:solidFill>
+                      <a:srgbClr val="F7F9FC"/>
+                    </a:solidFill>
+                  </a:tcPr>
+                </a:tc>
+              </a:tr>
+              <a:tr h="569595">
+                <a:tc>
+                  <a:txBody>
+                    <a:bodyPr wrap="square">
+                      <a:spAutoFit/>
+                    </a:bodyPr>
+                    <a:lstStyle/>
+                    <a:p>
+                      <a:pPr algn="ctr"/>
+                      <a:r>
+                        <a:rPr lang="zh-CN" altLang="en-US" sz="1600">
+                          <a:solidFill>
+                            <a:srgbClr val="1F2A44"/>
+                          </a:solidFill>
+                          <a:latin typeface="+mn-ea"/>
+                        </a:rPr>
+                        <a:t>映射表</a:t>
+                      </a:r>
+                      <a:r>
+                        <a:rPr lang="zh-CN" altLang="en-US" sz="1600">
+                          <a:solidFill>
+                            <a:srgbClr val="1F2A44"/>
+                          </a:solidFill>
+                          <a:latin typeface="+mn-ea"/>
+                        </a:rPr>
+                        <a:t>生成</a:t>
+                      </a:r>
+                      <a:endParaRPr lang="zh-CN" altLang="en-US" sz="1600">
+                        <a:solidFill>
+                          <a:srgbClr val="1F2A44"/>
+                        </a:solidFill>
+                        <a:latin typeface="+mn-ea"/>
+                      </a:endParaRPr>
+                    </a:p>
+                  </a:txBody>
+                  <a:tcPr marL="70000" marR="70000" marT="50000" marB="50000" anchor="ctr" anchorCtr="0">
+                    <a:lnL w="9525">
+                      <a:solidFill>
+                        <a:srgbClr val="D8DEE9"/>
+                      </a:solidFill>
+                    </a:lnL>
+                    <a:lnR w="9525">
+                      <a:solidFill>
+                        <a:srgbClr val="D8DEE9"/>
+                      </a:solidFill>
+                    </a:lnR>
+                    <a:lnT w="9525">
+                      <a:solidFill>
+                        <a:srgbClr val="D8DEE9"/>
+                      </a:solidFill>
+                    </a:lnT>
+                    <a:lnB w="9525">
+                      <a:solidFill>
+                        <a:srgbClr val="D8DEE9"/>
+                      </a:solidFill>
+                    </a:lnB>
+                    <a:solidFill>
+                      <a:srgbClr val="FFFFFF"/>
+                    </a:solidFill>
+                  </a:tcPr>
+                </a:tc>
+                <a:tc>
+                  <a:txBody>
+                    <a:bodyPr wrap="square">
+                      <a:spAutoFit/>
+                    </a:bodyPr>
+                    <a:lstStyle/>
+                    <a:p>
+                      <a:pPr algn="ctr"/>
+                      <a:r>
+                        <a:rPr lang="zh-CN" altLang="en-US" sz="1600">
+                          <a:solidFill>
+                            <a:srgbClr val="1F2A44"/>
+                          </a:solidFill>
+                          <a:latin typeface="+mn-ea"/>
+                          <a:cs typeface="+mn-ea"/>
+                        </a:rPr>
+                        <a:t>确定子节点到父节点的映射</a:t>
+                      </a:r>
+                      <a:r>
+                        <a:rPr lang="zh-CN" altLang="en-US" sz="1600">
+                          <a:solidFill>
+                            <a:srgbClr val="1F2A44"/>
+                          </a:solidFill>
+                          <a:latin typeface="+mn-ea"/>
+                          <a:cs typeface="+mn-ea"/>
+                        </a:rPr>
+                        <a:t>关系</a:t>
+                      </a:r>
+                      <a:endParaRPr lang="zh-CN" altLang="en-US" sz="1600">
+                        <a:solidFill>
+                          <a:srgbClr val="1F2A44"/>
+                        </a:solidFill>
+                        <a:latin typeface="+mn-ea"/>
+                        <a:cs typeface="+mn-ea"/>
+                      </a:endParaRPr>
+                    </a:p>
+                  </a:txBody>
+                  <a:tcPr marL="70000" marR="70000" marT="50000" marB="50000" anchor="ctr" anchorCtr="0">
+                    <a:lnL w="9525">
+                      <a:solidFill>
+                        <a:srgbClr val="D8DEE9"/>
+                      </a:solidFill>
+                    </a:lnL>
+                    <a:lnR w="9525">
+                      <a:solidFill>
+                        <a:srgbClr val="D8DEE9"/>
+                      </a:solidFill>
+                    </a:lnR>
+                    <a:lnT w="9525">
+                      <a:solidFill>
+                        <a:srgbClr val="D8DEE9"/>
+                      </a:solidFill>
+                    </a:lnT>
+                    <a:lnB w="9525">
+                      <a:solidFill>
+                        <a:srgbClr val="D8DEE9"/>
+                      </a:solidFill>
+                    </a:lnB>
+                    <a:solidFill>
+                      <a:srgbClr val="FFFFFF"/>
+                    </a:solidFill>
+                  </a:tcPr>
+                </a:tc>
+              </a:tr>
+              <a:tr h="571500">
+                <a:tc>
+                  <a:txBody>
+                    <a:bodyPr wrap="square">
+                      <a:spAutoFit/>
+                    </a:bodyPr>
+                    <a:lstStyle/>
+                    <a:p>
+                      <a:pPr algn="ctr"/>
+                      <a:r>
+                        <a:rPr lang="zh-CN" altLang="en-US" sz="1600">
+                          <a:solidFill>
+                            <a:srgbClr val="1F2A44"/>
+                          </a:solidFill>
+                          <a:latin typeface="+mn-ea"/>
+                        </a:rPr>
+                        <a:t>初始</a:t>
+                      </a:r>
+                      <a:r>
+                        <a:rPr lang="zh-CN" altLang="en-US" sz="1600">
+                          <a:solidFill>
+                            <a:srgbClr val="1F2A44"/>
+                          </a:solidFill>
+                          <a:latin typeface="+mn-ea"/>
+                        </a:rPr>
+                        <a:t>量化</a:t>
+                      </a:r>
+                      <a:endParaRPr lang="zh-CN" altLang="en-US" sz="1600">
+                        <a:solidFill>
+                          <a:srgbClr val="1F2A44"/>
+                        </a:solidFill>
+                        <a:latin typeface="+mn-ea"/>
+                      </a:endParaRPr>
+                    </a:p>
+                  </a:txBody>
+                  <a:tcPr marL="70000" marR="70000" marT="50000" marB="50000" anchor="ctr" anchorCtr="0">
+                    <a:lnL w="9525">
+                      <a:solidFill>
+                        <a:srgbClr val="D8DEE9"/>
+                      </a:solidFill>
+                    </a:lnL>
+                    <a:lnR w="9525">
+                      <a:solidFill>
+                        <a:srgbClr val="D8DEE9"/>
+                      </a:solidFill>
+                    </a:lnR>
+                    <a:lnT w="9525">
+                      <a:solidFill>
+                        <a:srgbClr val="D8DEE9"/>
+                      </a:solidFill>
+                    </a:lnT>
+                    <a:lnB w="9525">
+                      <a:solidFill>
+                        <a:srgbClr val="D8DEE9"/>
+                      </a:solidFill>
+                    </a:lnB>
+                    <a:solidFill>
+                      <a:srgbClr val="F7F9FC"/>
+                    </a:solidFill>
+                  </a:tcPr>
+                </a:tc>
+                <a:tc>
+                  <a:txBody>
+                    <a:bodyPr wrap="square">
+                      <a:spAutoFit/>
+                    </a:bodyPr>
+                    <a:lstStyle/>
+                    <a:p>
+                      <a:pPr algn="ctr"/>
+                      <a:r>
+                        <a:rPr lang="zh-CN" altLang="en-US" sz="1600">
+                          <a:solidFill>
+                            <a:srgbClr val="1F2A44"/>
+                          </a:solidFill>
+                          <a:latin typeface="+mn-ea"/>
+                          <a:cs typeface="+mn-ea"/>
+                        </a:rPr>
+                        <a:t>对矩阵的原始数据进行</a:t>
+                      </a:r>
+                      <a:r>
+                        <a:rPr lang="zh-CN" altLang="en-US" sz="1600">
+                          <a:solidFill>
+                            <a:srgbClr val="1F2A44"/>
+                          </a:solidFill>
+                          <a:latin typeface="+mn-ea"/>
+                          <a:cs typeface="+mn-ea"/>
+                        </a:rPr>
+                        <a:t>量化</a:t>
+                      </a:r>
+                      <a:endParaRPr lang="zh-CN" altLang="en-US" sz="1600">
+                        <a:solidFill>
+                          <a:srgbClr val="1F2A44"/>
+                        </a:solidFill>
+                        <a:latin typeface="+mn-ea"/>
+                        <a:cs typeface="+mn-ea"/>
+                      </a:endParaRPr>
+                    </a:p>
+                  </a:txBody>
+                  <a:tcPr marL="70000" marR="70000" marT="50000" marB="50000" anchor="ctr" anchorCtr="0">
+                    <a:lnL w="9525">
+                      <a:solidFill>
+                        <a:srgbClr val="D8DEE9"/>
+                      </a:solidFill>
+                    </a:lnL>
+                    <a:lnR w="9525">
+                      <a:solidFill>
+                        <a:srgbClr val="D8DEE9"/>
+                      </a:solidFill>
+                    </a:lnR>
+                    <a:lnT w="9525">
+                      <a:solidFill>
+                        <a:srgbClr val="D8DEE9"/>
+                      </a:solidFill>
+                    </a:lnT>
+                    <a:lnB w="9525">
+                      <a:solidFill>
+                        <a:srgbClr val="D8DEE9"/>
+                      </a:solidFill>
+                    </a:lnB>
+                    <a:solidFill>
+                      <a:srgbClr val="F7F9FC"/>
+                    </a:solidFill>
+                  </a:tcPr>
+                </a:tc>
+              </a:tr>
+              <a:tr h="571500">
+                <a:tc>
+                  <a:txBody>
+                    <a:bodyPr/>
+                    <a:p>
+                      <a:pPr algn="ctr">
+                        <a:buNone/>
+                      </a:pPr>
+                      <a:r>
+                        <a:rPr lang="zh-CN" altLang="en-US" sz="1600">
+                          <a:solidFill>
+                            <a:srgbClr val="1F2A44"/>
+                          </a:solidFill>
+                          <a:latin typeface="+mn-ea"/>
+                        </a:rPr>
+                        <a:t>产物</a:t>
+                      </a:r>
+                      <a:r>
+                        <a:rPr lang="zh-CN" altLang="en-US" sz="1600">
+                          <a:solidFill>
+                            <a:srgbClr val="1F2A44"/>
+                          </a:solidFill>
+                          <a:latin typeface="+mn-ea"/>
+                        </a:rPr>
+                        <a:t>检验</a:t>
+                      </a:r>
+                      <a:endParaRPr lang="zh-CN" altLang="en-US" sz="1600">
+                        <a:solidFill>
+                          <a:srgbClr val="1F2A44"/>
+                        </a:solidFill>
+                        <a:latin typeface="+mn-ea"/>
+                      </a:endParaRPr>
+                    </a:p>
+                  </a:txBody>
+                  <a:tcPr marL="70000" marR="70000" marT="50000" marB="50000" anchor="ctr" anchorCtr="0">
+                    <a:lnL w="9525">
+                      <a:solidFill>
+                        <a:srgbClr val="D8DEE9"/>
+                      </a:solidFill>
+                    </a:lnL>
+                    <a:lnR w="9525">
+                      <a:solidFill>
+                        <a:srgbClr val="D8DEE9"/>
+                      </a:solidFill>
+                    </a:lnR>
+                    <a:lnT w="9525">
+                      <a:solidFill>
+                        <a:srgbClr val="D8DEE9"/>
+                      </a:solidFill>
+                    </a:lnT>
+                    <a:lnB w="9525">
+                      <a:solidFill>
+                        <a:srgbClr val="D8DEE9"/>
+                      </a:solidFill>
+                    </a:lnB>
+                    <a:solidFill>
+                      <a:srgbClr val="F7F9FC"/>
+                    </a:solidFill>
+                  </a:tcPr>
+                </a:tc>
+                <a:tc>
+                  <a:txBody>
+                    <a:bodyPr/>
+                    <a:p>
+                      <a:pPr algn="ctr">
+                        <a:buNone/>
+                      </a:pPr>
+                      <a:r>
+                        <a:rPr lang="zh-CN" altLang="en-US" sz="1600">
+                          <a:solidFill>
+                            <a:srgbClr val="1F2A44"/>
+                          </a:solidFill>
+                          <a:latin typeface="+mn-ea"/>
+                          <a:cs typeface="+mn-ea"/>
+                        </a:rPr>
+                        <a:t>校验文件大小、</a:t>
+                      </a:r>
+                      <a:r>
+                        <a:rPr lang="en-US" altLang="zh-CN" sz="1600">
+                          <a:solidFill>
+                            <a:srgbClr val="1F2A44"/>
+                          </a:solidFill>
+                          <a:latin typeface="+mn-ea"/>
+                          <a:cs typeface="+mn-ea"/>
+                        </a:rPr>
+                        <a:t>ABI、</a:t>
+                      </a:r>
+                      <a:r>
+                        <a:rPr lang="zh-CN" altLang="en-US" sz="1600">
+                          <a:solidFill>
+                            <a:srgbClr val="1F2A44"/>
+                          </a:solidFill>
+                          <a:latin typeface="+mn-ea"/>
+                          <a:cs typeface="+mn-ea"/>
+                        </a:rPr>
+                        <a:t>内存布局、</a:t>
+                      </a:r>
+                      <a:r>
+                        <a:rPr lang="en-US" altLang="zh-CN" sz="1600">
+                          <a:solidFill>
+                            <a:srgbClr val="1F2A44"/>
+                          </a:solidFill>
+                          <a:latin typeface="+mn-ea"/>
+                          <a:cs typeface="+mn-ea"/>
+                        </a:rPr>
+                        <a:t>map table</a:t>
+                      </a:r>
+                      <a:endParaRPr lang="en-US" altLang="zh-CN" sz="1600">
+                        <a:solidFill>
+                          <a:srgbClr val="1F2A44"/>
+                        </a:solidFill>
+                        <a:latin typeface="+mn-ea"/>
+                        <a:cs typeface="+mn-ea"/>
+                      </a:endParaRPr>
+                    </a:p>
+                  </a:txBody>
+                  <a:tcPr marL="70000" marR="70000" marT="50000" marB="50000" anchor="ctr" anchorCtr="0">
+                    <a:lnL w="9525">
+                      <a:solidFill>
+                        <a:srgbClr val="D8DEE9"/>
+                      </a:solidFill>
+                    </a:lnL>
+                    <a:lnR w="9525">
+                      <a:solidFill>
+                        <a:srgbClr val="D8DEE9"/>
+                      </a:solidFill>
+                    </a:lnR>
+                    <a:lnT w="9525">
+                      <a:solidFill>
+                        <a:srgbClr val="D8DEE9"/>
+                      </a:solidFill>
+                    </a:lnT>
+                    <a:lnB w="9525">
+                      <a:solidFill>
+                        <a:srgbClr val="D8DEE9"/>
+                      </a:solidFill>
+                    </a:lnB>
+                    <a:solidFill>
+                      <a:srgbClr val="F7F9FC"/>
+                    </a:solidFill>
+                  </a:tcPr>
+                </a:tc>
+              </a:tr>
+            </a:tbl>
+          </a:graphicData>
+        </a:graphic>
+      </p:graphicFrame>
+    </p:spTree>
+    <p:custDataLst>
+      <p:tags r:id="rId2"/>
+    </p:custDataLst>
+  </p:cSld>
+  <p:clrMapOvr>
+    <a:masterClrMapping/>
+  </p:clrMapOvr>
+</p:sld>
+</file>
+
+<file path=ppt/slides/slide13.xml><?xml version="1.0" encoding="utf-8"?>
+<p:sld xmlns:a="http://schemas.openxmlformats.org/drawingml/2006/main" xmlns:r="http://schemas.openxmlformats.org/officeDocument/2006/relationships" xmlns:p="http://schemas.openxmlformats.org/presentationml/2006/main">
+  <p:cSld>
+    <p:spTree>
+      <p:nvGrpSpPr>
+        <p:cNvPr id="1" name=""/>
+        <p:cNvGrpSpPr/>
+        <p:nvPr/>
+      </p:nvGrpSpPr>
+      <p:grpSpPr/>
+      <p:sp>
+        <p:nvSpPr>
+          <p:cNvPr id="2" name="标题 1"/>
+          <p:cNvSpPr>
+            <a:spLocks noGrp="1"/>
+          </p:cNvSpPr>
+          <p:nvPr>
+            <p:ph type="title"/>
+          </p:nvPr>
+        </p:nvSpPr>
+        <p:spPr/>
+        <p:txBody>
+          <a:bodyPr/>
+          <a:p>
+            <a:r>
+              <a:rPr lang="zh-CN" altLang="en-US"/>
+              <a:t>实验</a:t>
+            </a:r>
+            <a:r>
+              <a:rPr lang="zh-CN" altLang="en-US"/>
+              <a:t>进展</a:t>
+            </a:r>
+            <a:endParaRPr lang="zh-CN" altLang="en-US"/>
+          </a:p>
+        </p:txBody>
+      </p:sp>
+      <p:sp>
+        <p:nvSpPr>
+          <p:cNvPr id="4" name="灯片编号占位符 3"/>
+          <p:cNvSpPr>
+            <a:spLocks noGrp="1"/>
+          </p:cNvSpPr>
+          <p:nvPr>
+            <p:ph type="sldNum" sz="quarter" idx="12"/>
+          </p:nvPr>
+        </p:nvSpPr>
+        <p:spPr/>
+        <p:txBody>
+          <a:bodyPr/>
+          <a:p>
+            <a:fld id="{3B469B21-F3E0-463C-B78A-30764B838394}" type="slidenum">
+              <a:rPr lang="zh-CN" altLang="en-US"/>
+            </a:fld>
+            <a:endParaRPr lang="zh-CN" altLang="en-US"/>
+          </a:p>
+        </p:txBody>
+      </p:sp>
+      <p:sp>
+        <p:nvSpPr>
+          <p:cNvPr id="5" name="文本框 4"/>
+          <p:cNvSpPr txBox="1"/>
+          <p:nvPr/>
+        </p:nvSpPr>
+        <p:spPr>
+          <a:xfrm>
+            <a:off x="304800" y="1056005"/>
+            <a:ext cx="11600180" cy="922020"/>
+          </a:xfrm>
+          <a:prstGeom prst="rect">
+            <a:avLst/>
+          </a:prstGeom>
+          <a:noFill/>
+        </p:spPr>
+        <p:txBody>
+          <a:bodyPr wrap="square" rtlCol="0">
+            <a:spAutoFit/>
+          </a:bodyPr>
+          <a:p>
+            <a:r>
+              <a:rPr lang="zh-CN" altLang="en-US"/>
+              <a:t>为验证所设计硬件架构的数值可行性，构建了行为级仿真模型。该模型模拟了量化格式、</a:t>
+            </a:r>
+            <a:r>
+              <a:rPr lang="en-US" altLang="zh-CN"/>
+              <a:t>ATU </a:t>
+            </a:r>
+            <a:r>
+              <a:rPr lang="zh-CN" altLang="en-US"/>
+              <a:t>行映射、</a:t>
+            </a:r>
+            <a:r>
+              <a:rPr lang="en-US" altLang="zh-CN"/>
+              <a:t>HPU </a:t>
+            </a:r>
+            <a:r>
+              <a:rPr lang="zh-CN" altLang="en-US"/>
+              <a:t>动态主元选择、定点 </a:t>
+            </a:r>
+            <a:r>
+              <a:rPr lang="en-US" altLang="zh-CN"/>
+              <a:t>LU </a:t>
+            </a:r>
+            <a:r>
+              <a:rPr lang="zh-CN" altLang="en-US"/>
+              <a:t>分解、</a:t>
+            </a:r>
+            <a:r>
+              <a:rPr lang="en-US" altLang="zh-CN"/>
+              <a:t>TRSM、Schur </a:t>
+            </a:r>
+            <a:r>
+              <a:rPr lang="zh-CN" altLang="en-US"/>
+              <a:t>更新及迭代求精过程。实验结果表明，在定点量化计算条件下，行为模型能够完成矩阵分解与求解，并可通过迭代求精将误差控制到一定</a:t>
+            </a:r>
+            <a:r>
+              <a:rPr lang="zh-CN" altLang="en-US"/>
+              <a:t>水平。</a:t>
+            </a:r>
+            <a:endParaRPr lang="zh-CN" altLang="en-US"/>
+          </a:p>
+        </p:txBody>
+      </p:sp>
+      <p:sp>
+        <p:nvSpPr>
+          <p:cNvPr id="7" name="文本框 6"/>
+          <p:cNvSpPr txBox="1"/>
+          <p:nvPr/>
+        </p:nvSpPr>
+        <p:spPr>
+          <a:xfrm>
+            <a:off x="304800" y="2552065"/>
+            <a:ext cx="4792980" cy="1753235"/>
+          </a:xfrm>
+          <a:prstGeom prst="rect">
+            <a:avLst/>
+          </a:prstGeom>
+          <a:noFill/>
+        </p:spPr>
+        <p:txBody>
+          <a:bodyPr wrap="square" rtlCol="0">
+            <a:spAutoFit/>
+          </a:bodyPr>
+          <a:p>
+            <a:r>
+              <a:rPr lang="zh-CN" altLang="en-US"/>
+              <a:t>矩阵模式</a:t>
+            </a:r>
+            <a:r>
+              <a:rPr lang="en-US" altLang="zh-CN"/>
+              <a:t>：stable pivot radom </a:t>
+            </a:r>
+            <a:r>
+              <a:rPr lang="en-US" altLang="zh-CN"/>
+              <a:t>large_value</a:t>
+            </a:r>
+            <a:endParaRPr lang="en-US" altLang="zh-CN"/>
+          </a:p>
+          <a:p>
+            <a:r>
+              <a:rPr lang="zh-CN" altLang="en-US"/>
+              <a:t>矩阵规模</a:t>
+            </a:r>
+            <a:r>
+              <a:rPr lang="en-US" altLang="zh-CN"/>
+              <a:t>：128 256 512</a:t>
+            </a:r>
+            <a:endParaRPr lang="en-US" altLang="zh-CN"/>
+          </a:p>
+          <a:p>
+            <a:r>
+              <a:rPr lang="zh-CN" altLang="en-US"/>
+              <a:t>随机种子</a:t>
+            </a:r>
+            <a:r>
+              <a:rPr lang="en-US" altLang="zh-CN"/>
+              <a:t>：1 2 3</a:t>
+            </a:r>
+            <a:endParaRPr lang="en-US" altLang="zh-CN"/>
+          </a:p>
+          <a:p>
+            <a:r>
+              <a:rPr lang="zh-CN" altLang="en-US"/>
+              <a:t>分块大小</a:t>
+            </a:r>
+            <a:r>
+              <a:rPr lang="en-US" altLang="zh-CN"/>
+              <a:t>： 16</a:t>
+            </a:r>
+            <a:endParaRPr lang="en-US" altLang="zh-CN"/>
+          </a:p>
+          <a:p>
+            <a:r>
+              <a:rPr lang="zh-CN" altLang="en-US"/>
+              <a:t>最大迭代次数</a:t>
+            </a:r>
+            <a:r>
+              <a:rPr lang="en-US" altLang="zh-CN"/>
+              <a:t>：10</a:t>
+            </a:r>
+            <a:endParaRPr lang="en-US" altLang="zh-CN"/>
+          </a:p>
+          <a:p>
+            <a:r>
+              <a:rPr lang="zh-CN" altLang="en-US"/>
+              <a:t>精度要求</a:t>
+            </a:r>
+            <a:r>
+              <a:rPr lang="en-US" altLang="zh-CN"/>
+              <a:t>：1</a:t>
+            </a:r>
+            <a:r>
+              <a:rPr lang="en-US" altLang="zh-CN"/>
+              <a:t>e-10 </a:t>
+            </a:r>
+            <a:endParaRPr lang="en-US" altLang="zh-CN"/>
+          </a:p>
+        </p:txBody>
+      </p:sp>
+      <p:sp>
+        <p:nvSpPr>
+          <p:cNvPr id="8" name="文本框 7"/>
+          <p:cNvSpPr txBox="1"/>
+          <p:nvPr/>
+        </p:nvSpPr>
+        <p:spPr>
+          <a:xfrm>
+            <a:off x="6408420" y="2552065"/>
+            <a:ext cx="4792980" cy="922020"/>
+          </a:xfrm>
+          <a:prstGeom prst="rect">
+            <a:avLst/>
+          </a:prstGeom>
+          <a:noFill/>
+        </p:spPr>
+        <p:txBody>
+          <a:bodyPr wrap="square" rtlCol="0">
+            <a:spAutoFit/>
+          </a:bodyPr>
+          <a:p>
+            <a:r>
+              <a:rPr lang="zh-CN" altLang="en-US"/>
+              <a:t>直接求解误差中位数</a:t>
+            </a:r>
+            <a:r>
+              <a:rPr lang="en-US" altLang="zh-CN"/>
+              <a:t>：1.334e-01</a:t>
+            </a:r>
+            <a:endParaRPr lang="en-US" altLang="zh-CN"/>
+          </a:p>
+          <a:p>
+            <a:r>
+              <a:rPr lang="zh-CN" altLang="en-US"/>
+              <a:t>迭代求解后误差中位数</a:t>
+            </a:r>
+            <a:r>
+              <a:rPr lang="en-US" altLang="zh-CN"/>
+              <a:t>：1.068</a:t>
+            </a:r>
+            <a:r>
+              <a:rPr lang="en-US" altLang="zh-CN"/>
+              <a:t>e-11</a:t>
+            </a:r>
+            <a:endParaRPr lang="en-US" altLang="zh-CN"/>
+          </a:p>
+          <a:p>
+            <a:r>
+              <a:rPr lang="en-US" altLang="zh-CN"/>
+              <a:t>LU</a:t>
+            </a:r>
+            <a:r>
+              <a:rPr lang="zh-CN" altLang="en-US"/>
+              <a:t>分解相对误差中位数</a:t>
+            </a:r>
+            <a:r>
+              <a:rPr lang="en-US" altLang="zh-CN"/>
+              <a:t>：	4.415</a:t>
+            </a:r>
+            <a:r>
+              <a:rPr lang="en-US" altLang="zh-CN"/>
+              <a:t>e-06</a:t>
+            </a:r>
+            <a:endParaRPr lang="en-US" altLang="zh-CN"/>
+          </a:p>
+        </p:txBody>
+      </p:sp>
+    </p:spTree>
+    <p:custDataLst>
+      <p:tags r:id="rId1"/>
+    </p:custDataLst>
+  </p:cSld>
+  <p:clrMapOvr>
+    <a:masterClrMapping/>
+  </p:clrMapOvr>
+</p:sld>
+</file>
+
+<file path=ppt/slides/slide14.xml><?xml version="1.0" encoding="utf-8"?>
+<p:sld xmlns:a="http://schemas.openxmlformats.org/drawingml/2006/main" xmlns:r="http://schemas.openxmlformats.org/officeDocument/2006/relationships" xmlns:p="http://schemas.openxmlformats.org/presentationml/2006/main">
+  <p:cSld>
+    <p:spTree>
+      <p:nvGrpSpPr>
+        <p:cNvPr id="1" name=""/>
+        <p:cNvGrpSpPr/>
+        <p:nvPr/>
+      </p:nvGrpSpPr>
+      <p:grpSpPr/>
+      <p:sp>
+        <p:nvSpPr>
+          <p:cNvPr id="2" name="标题 1"/>
+          <p:cNvSpPr>
+            <a:spLocks noGrp="1"/>
+          </p:cNvSpPr>
+          <p:nvPr>
+            <p:ph type="title"/>
+          </p:nvPr>
+        </p:nvSpPr>
+        <p:spPr/>
+        <p:txBody>
+          <a:bodyPr/>
+          <a:p>
+            <a:r>
+              <a:rPr lang="zh-CN" altLang="en-US"/>
+              <a:t>实验</a:t>
+            </a:r>
+            <a:r>
+              <a:rPr lang="zh-CN" altLang="en-US"/>
+              <a:t>进展</a:t>
+            </a:r>
+            <a:endParaRPr lang="zh-CN" altLang="en-US"/>
+          </a:p>
+        </p:txBody>
+      </p:sp>
+      <p:sp>
+        <p:nvSpPr>
+          <p:cNvPr id="4" name="灯片编号占位符 3"/>
+          <p:cNvSpPr>
+            <a:spLocks noGrp="1"/>
+          </p:cNvSpPr>
+          <p:nvPr>
+            <p:ph type="sldNum" sz="quarter" idx="12"/>
+          </p:nvPr>
+        </p:nvSpPr>
+        <p:spPr/>
+        <p:txBody>
+          <a:bodyPr/>
+          <a:p>
+            <a:fld id="{3B469B21-F3E0-463C-B78A-30764B838394}" type="slidenum">
+              <a:rPr lang="zh-CN" altLang="en-US"/>
+            </a:fld>
+            <a:endParaRPr lang="zh-CN" altLang="en-US"/>
+          </a:p>
+        </p:txBody>
+      </p:sp>
+      <p:graphicFrame>
+        <p:nvGraphicFramePr>
+          <p:cNvPr id="5" name="表格 4"/>
+          <p:cNvGraphicFramePr/>
+          <p:nvPr>
+            <p:custDataLst>
+              <p:tags r:id="rId1"/>
+            </p:custDataLst>
+          </p:nvPr>
+        </p:nvGraphicFramePr>
+        <p:xfrm>
+          <a:off x="142875" y="2044065"/>
+          <a:ext cx="11536045" cy="3827145"/>
+        </p:xfrm>
+        <a:graphic>
+          <a:graphicData uri="http://schemas.openxmlformats.org/drawingml/2006/table">
+            <a:tbl>
+              <a:tblPr firstRow="1" bandRow="1">
+                <a:tableStyleId>{D12C8BAE-DE2C-43F4-B110-6855FB1A3B69}</a:tableStyleId>
+              </a:tblPr>
+              <a:tblGrid>
+                <a:gridCol w="1596390"/>
+                <a:gridCol w="953770"/>
+                <a:gridCol w="1005205"/>
+                <a:gridCol w="1496695"/>
+                <a:gridCol w="1710690"/>
+                <a:gridCol w="1622425"/>
+                <a:gridCol w="1767205"/>
+                <a:gridCol w="1383665"/>
+              </a:tblGrid>
+              <a:tr h="755650">
+                <a:tc>
+                  <a:txBody>
+                    <a:bodyPr/>
+                    <a:p>
+                      <a:pPr algn="ctr">
+                        <a:lnSpc>
+                          <a:spcPct val="120000"/>
+                        </a:lnSpc>
+                        <a:buNone/>
+                      </a:pPr>
+                      <a:r>
+                        <a:rPr lang="en-US" altLang="en-US" sz="1400" spc="130">
+                          <a:latin typeface="+mn-ea"/>
+                        </a:rPr>
+                        <a:t>矩阵模式</a:t>
+                      </a:r>
+                      <a:endParaRPr lang="en-US" altLang="en-US" sz="1400" spc="130">
+                        <a:latin typeface="+mn-ea"/>
+                      </a:endParaRPr>
+                    </a:p>
+                  </a:txBody>
+                  <a:tcPr marL="254000" marR="254000" marT="177800" marB="177800" anchor="ctr" anchorCtr="0"/>
+                </a:tc>
+                <a:tc>
+                  <a:txBody>
+                    <a:bodyPr/>
+                    <a:p>
+                      <a:pPr algn="ctr">
+                        <a:lnSpc>
+                          <a:spcPct val="120000"/>
+                        </a:lnSpc>
+                        <a:buNone/>
+                      </a:pPr>
+                      <a:r>
+                        <a:rPr lang="en-US" altLang="en-US" sz="1400" spc="130">
+                          <a:latin typeface="+mn-ea"/>
+                        </a:rPr>
+                        <a:t>规模</a:t>
+                      </a:r>
+                      <a:endParaRPr lang="en-US" altLang="en-US" sz="1400" spc="130">
+                        <a:latin typeface="+mn-ea"/>
+                      </a:endParaRPr>
+                    </a:p>
+                  </a:txBody>
+                  <a:tcPr marL="254000" marR="254000" marT="177800" marB="177800" anchor="ctr" anchorCtr="0"/>
+                </a:tc>
+                <a:tc>
+                  <a:txBody>
+                    <a:bodyPr/>
+                    <a:p>
+                      <a:pPr algn="ctr">
+                        <a:lnSpc>
+                          <a:spcPct val="120000"/>
+                        </a:lnSpc>
+                        <a:buNone/>
+                      </a:pPr>
+                      <a:r>
+                        <a:rPr lang="en-US" altLang="zh-CN" sz="1400" b="0" spc="130">
+                          <a:latin typeface="+mn-ea"/>
+                        </a:rPr>
+                        <a:t>seed</a:t>
+                      </a:r>
+                      <a:endParaRPr lang="en-US" altLang="zh-CN" sz="1400" b="0" spc="130">
+                        <a:latin typeface="+mn-ea"/>
+                      </a:endParaRPr>
+                    </a:p>
+                  </a:txBody>
+                  <a:tcPr marL="254000" marR="254000" marT="177800" marB="177800" anchor="ctr" anchorCtr="0"/>
+                </a:tc>
+                <a:tc>
+                  <a:txBody>
+                    <a:bodyPr/>
+                    <a:p>
+                      <a:pPr algn="ctr">
+                        <a:lnSpc>
+                          <a:spcPct val="120000"/>
+                        </a:lnSpc>
+                        <a:buNone/>
+                      </a:pPr>
+                      <a:r>
+                        <a:rPr lang="en-US" altLang="en-US" sz="1400" b="0" spc="130">
+                          <a:latin typeface="+mn-ea"/>
+                        </a:rPr>
+                        <a:t>交换次数</a:t>
+                      </a:r>
+                      <a:endParaRPr lang="en-US" altLang="en-US" sz="1400" b="0" spc="130">
+                        <a:latin typeface="+mn-ea"/>
+                      </a:endParaRPr>
+                    </a:p>
+                  </a:txBody>
+                  <a:tcPr marL="254000" marR="254000" marT="177800" marB="177800" anchor="ctr" anchorCtr="0"/>
+                </a:tc>
+                <a:tc>
+                  <a:txBody>
+                    <a:bodyPr/>
+                    <a:p>
+                      <a:pPr algn="ctr">
+                        <a:lnSpc>
+                          <a:spcPct val="120000"/>
+                        </a:lnSpc>
+                        <a:buNone/>
+                      </a:pPr>
+                      <a:r>
+                        <a:rPr lang="en-US" altLang="zh-CN" sz="1400" b="0" spc="130">
+                          <a:latin typeface="+mn-ea"/>
+                          <a:cs typeface="+mn-ea"/>
+                        </a:rPr>
+                        <a:t>LU相对误差</a:t>
+                      </a:r>
+                      <a:endParaRPr lang="en-US" altLang="zh-CN" sz="1400" b="0" spc="130">
+                        <a:latin typeface="+mn-ea"/>
+                        <a:cs typeface="+mn-ea"/>
+                      </a:endParaRPr>
+                    </a:p>
+                  </a:txBody>
+                  <a:tcPr marL="254000" marR="254000" marT="177800" marB="177800" anchor="ctr" anchorCtr="0"/>
+                </a:tc>
+                <a:tc>
+                  <a:txBody>
+                    <a:bodyPr/>
+                    <a:p>
+                      <a:pPr algn="ctr">
+                        <a:lnSpc>
+                          <a:spcPct val="120000"/>
+                        </a:lnSpc>
+                        <a:buNone/>
+                      </a:pPr>
+                      <a:r>
+                        <a:rPr lang="zh-CN" altLang="en-US" sz="1600" b="0"/>
+                        <a:t>直接</a:t>
+                      </a:r>
+                      <a:r>
+                        <a:rPr lang="zh-CN" altLang="en-US" sz="1600" b="0"/>
+                        <a:t>误差</a:t>
+                      </a:r>
+                      <a:endParaRPr lang="zh-CN" altLang="en-US" sz="1600" b="0"/>
+                    </a:p>
+                  </a:txBody>
+                  <a:tcPr marL="254000" marR="254000" marT="177800" marB="177800" anchor="ctr" anchorCtr="0"/>
+                </a:tc>
+                <a:tc>
+                  <a:txBody>
+                    <a:bodyPr/>
+                    <a:p>
+                      <a:pPr algn="ctr">
+                        <a:lnSpc>
+                          <a:spcPct val="120000"/>
+                        </a:lnSpc>
+                        <a:buNone/>
+                      </a:pPr>
+                      <a:r>
+                        <a:rPr lang="zh-CN" altLang="en-US" sz="1600" b="0"/>
+                        <a:t>迭代后误差</a:t>
+                      </a:r>
+                      <a:endParaRPr lang="zh-CN" altLang="en-US" sz="1600" b="0"/>
+                    </a:p>
+                  </a:txBody>
+                  <a:tcPr marL="254000" marR="254000" marT="177800" marB="177800" anchor="ctr" anchorCtr="0"/>
+                </a:tc>
+                <a:tc>
+                  <a:txBody>
+                    <a:bodyPr/>
+                    <a:p>
+                      <a:pPr algn="ctr">
+                        <a:lnSpc>
+                          <a:spcPct val="120000"/>
+                        </a:lnSpc>
+                        <a:buNone/>
+                      </a:pPr>
+                      <a:r>
+                        <a:rPr lang="zh-CN" altLang="en-US" sz="1600" b="0"/>
+                        <a:t>是否收敛</a:t>
+                      </a:r>
+                      <a:endParaRPr lang="zh-CN" altLang="en-US" sz="1600" b="0"/>
+                    </a:p>
+                  </a:txBody>
+                  <a:tcPr marL="254000" marR="254000" marT="177800" marB="177800" anchor="ctr" anchorCtr="0"/>
+                </a:tc>
+              </a:tr>
+              <a:tr h="767715">
+                <a:tc>
+                  <a:txBody>
+                    <a:bodyPr/>
+                    <a:p>
+                      <a:pPr algn="ctr">
+                        <a:lnSpc>
+                          <a:spcPct val="120000"/>
+                        </a:lnSpc>
+                        <a:buNone/>
+                      </a:pPr>
+                      <a:r>
+                        <a:rPr lang="en-US" altLang="zh-CN" sz="1600"/>
+                        <a:t>stable</a:t>
+                      </a:r>
+                      <a:endParaRPr lang="en-US" altLang="zh-CN" sz="1600"/>
+                    </a:p>
+                  </a:txBody>
+                  <a:tcPr marL="254000" marR="254000" marT="177800" marB="177800" anchor="ctr" anchorCtr="0"/>
+                </a:tc>
+                <a:tc>
+                  <a:txBody>
+                    <a:bodyPr/>
+                    <a:p>
+                      <a:pPr algn="ctr">
+                        <a:lnSpc>
+                          <a:spcPct val="120000"/>
+                        </a:lnSpc>
+                        <a:buNone/>
+                      </a:pPr>
+                      <a:r>
+                        <a:rPr lang="en-US" altLang="zh-CN" sz="1600"/>
+                        <a:t>512</a:t>
+                      </a:r>
+                      <a:endParaRPr lang="en-US" altLang="zh-CN" sz="1600"/>
+                    </a:p>
+                  </a:txBody>
+                  <a:tcPr marL="254000" marR="254000" marT="177800" marB="177800" anchor="ctr" anchorCtr="0"/>
+                </a:tc>
+                <a:tc>
+                  <a:txBody>
+                    <a:bodyPr/>
+                    <a:p>
+                      <a:pPr algn="ctr">
+                        <a:lnSpc>
+                          <a:spcPct val="120000"/>
+                        </a:lnSpc>
+                        <a:buNone/>
+                      </a:pPr>
+                      <a:r>
+                        <a:rPr lang="en-US" altLang="zh-CN" sz="1600"/>
+                        <a:t>1</a:t>
+                      </a:r>
+                      <a:endParaRPr lang="en-US" altLang="zh-CN" sz="1600"/>
+                    </a:p>
+                  </a:txBody>
+                  <a:tcPr marL="254000" marR="254000" marT="177800" marB="177800" anchor="ctr" anchorCtr="0"/>
+                </a:tc>
+                <a:tc>
+                  <a:txBody>
+                    <a:bodyPr/>
+                    <a:p>
+                      <a:pPr algn="ctr">
+                        <a:lnSpc>
+                          <a:spcPct val="120000"/>
+                        </a:lnSpc>
+                        <a:buNone/>
+                      </a:pPr>
+                      <a:r>
+                        <a:rPr lang="en-US" altLang="zh-CN" sz="1600"/>
+                        <a:t>0</a:t>
+                      </a:r>
+                      <a:endParaRPr lang="en-US" altLang="zh-CN" sz="1600"/>
+                    </a:p>
+                  </a:txBody>
+                  <a:tcPr marL="254000" marR="254000" marT="177800" marB="177800" anchor="ctr" anchorCtr="0"/>
+                </a:tc>
+                <a:tc>
+                  <a:txBody>
+                    <a:bodyPr/>
+                    <a:p>
+                      <a:pPr algn="ctr">
+                        <a:lnSpc>
+                          <a:spcPct val="120000"/>
+                        </a:lnSpc>
+                        <a:buNone/>
+                      </a:pPr>
+                      <a:r>
+                        <a:rPr lang="en-US" altLang="zh-CN" sz="1600"/>
+                        <a:t>4.419e-06</a:t>
+                      </a:r>
+                      <a:endParaRPr lang="en-US" altLang="zh-CN" sz="1600"/>
+                    </a:p>
+                  </a:txBody>
+                  <a:tcPr marL="254000" marR="254000" marT="177800" marB="177800" anchor="ctr" anchorCtr="0"/>
+                </a:tc>
+                <a:tc>
+                  <a:txBody>
+                    <a:bodyPr/>
+                    <a:p>
+                      <a:pPr algn="ctr">
+                        <a:lnSpc>
+                          <a:spcPct val="120000"/>
+                        </a:lnSpc>
+                        <a:buNone/>
+                      </a:pPr>
+                      <a:r>
+                        <a:rPr lang="en-US" altLang="zh-CN" sz="1600"/>
+                        <a:t>3.133e-01</a:t>
+                      </a:r>
+                      <a:endParaRPr lang="en-US" altLang="zh-CN" sz="1600"/>
+                    </a:p>
+                  </a:txBody>
+                  <a:tcPr marL="254000" marR="254000" marT="177800" marB="177800" anchor="ctr" anchorCtr="0"/>
+                </a:tc>
+                <a:tc>
+                  <a:txBody>
+                    <a:bodyPr/>
+                    <a:p>
+                      <a:pPr algn="ctr">
+                        <a:lnSpc>
+                          <a:spcPct val="120000"/>
+                        </a:lnSpc>
+                        <a:buNone/>
+                      </a:pPr>
+                      <a:r>
+                        <a:rPr lang="en-US" altLang="zh-CN" sz="1600"/>
+                        <a:t>3.088e-11</a:t>
+                      </a:r>
+                      <a:endParaRPr lang="en-US" altLang="zh-CN" sz="1600"/>
+                    </a:p>
+                  </a:txBody>
+                  <a:tcPr marL="254000" marR="254000" marT="177800" marB="177800" anchor="ctr" anchorCtr="0"/>
+                </a:tc>
+                <a:tc>
+                  <a:txBody>
+                    <a:bodyPr/>
+                    <a:p>
+                      <a:pPr algn="ctr">
+                        <a:lnSpc>
+                          <a:spcPct val="120000"/>
+                        </a:lnSpc>
+                        <a:buNone/>
+                      </a:pPr>
+                      <a:r>
+                        <a:rPr lang="zh-CN" altLang="en-US" sz="1600"/>
+                        <a:t>是</a:t>
+                      </a:r>
+                      <a:endParaRPr lang="zh-CN" altLang="en-US" sz="1600"/>
+                    </a:p>
+                  </a:txBody>
+                  <a:tcPr marL="254000" marR="254000" marT="177800" marB="177800" anchor="ctr" anchorCtr="0"/>
+                </a:tc>
+              </a:tr>
+              <a:tr h="768350">
+                <a:tc>
+                  <a:txBody>
+                    <a:bodyPr/>
+                    <a:p>
+                      <a:pPr algn="ctr">
+                        <a:lnSpc>
+                          <a:spcPct val="120000"/>
+                        </a:lnSpc>
+                        <a:buNone/>
+                      </a:pPr>
+                      <a:r>
+                        <a:rPr lang="en-US" altLang="zh-CN" sz="1600"/>
+                        <a:t>pivot</a:t>
+                      </a:r>
+                      <a:endParaRPr lang="en-US" altLang="zh-CN" sz="1600"/>
+                    </a:p>
+                  </a:txBody>
+                  <a:tcPr marL="254000" marR="254000" marT="177800" marB="177800" anchor="ctr" anchorCtr="0"/>
+                </a:tc>
+                <a:tc>
+                  <a:txBody>
+                    <a:bodyPr/>
+                    <a:p>
+                      <a:pPr algn="ctr">
+                        <a:lnSpc>
+                          <a:spcPct val="120000"/>
+                        </a:lnSpc>
+                        <a:buNone/>
+                      </a:pPr>
+                      <a:r>
+                        <a:rPr lang="en-US" altLang="zh-CN" sz="1600"/>
+                        <a:t>512</a:t>
+                      </a:r>
+                      <a:endParaRPr lang="en-US" altLang="zh-CN" sz="1600"/>
+                    </a:p>
+                  </a:txBody>
+                  <a:tcPr marL="254000" marR="254000" marT="177800" marB="177800" anchor="ctr" anchorCtr="0"/>
+                </a:tc>
+                <a:tc>
+                  <a:txBody>
+                    <a:bodyPr/>
+                    <a:p>
+                      <a:pPr algn="ctr">
+                        <a:lnSpc>
+                          <a:spcPct val="120000"/>
+                        </a:lnSpc>
+                        <a:buNone/>
+                      </a:pPr>
+                      <a:r>
+                        <a:rPr lang="en-US" altLang="zh-CN" sz="1600"/>
+                        <a:t>1</a:t>
+                      </a:r>
+                      <a:endParaRPr lang="en-US" altLang="zh-CN" sz="1600"/>
+                    </a:p>
+                  </a:txBody>
+                  <a:tcPr marL="254000" marR="254000" marT="177800" marB="177800" anchor="ctr" anchorCtr="0"/>
+                </a:tc>
+                <a:tc>
+                  <a:txBody>
+                    <a:bodyPr/>
+                    <a:p>
+                      <a:pPr algn="ctr">
+                        <a:lnSpc>
+                          <a:spcPct val="120000"/>
+                        </a:lnSpc>
+                        <a:buNone/>
+                      </a:pPr>
+                      <a:r>
+                        <a:rPr lang="en-US" altLang="zh-CN" sz="1600"/>
+                        <a:t>401</a:t>
+                      </a:r>
+                      <a:endParaRPr lang="en-US" altLang="zh-CN" sz="1600"/>
+                    </a:p>
+                  </a:txBody>
+                  <a:tcPr marL="254000" marR="254000" marT="177800" marB="177800" anchor="ctr" anchorCtr="0"/>
+                </a:tc>
+                <a:tc>
+                  <a:txBody>
+                    <a:bodyPr/>
+                    <a:p>
+                      <a:pPr algn="ctr">
+                        <a:lnSpc>
+                          <a:spcPct val="120000"/>
+                        </a:lnSpc>
+                        <a:buNone/>
+                      </a:pPr>
+                      <a:r>
+                        <a:rPr lang="en-US" altLang="zh-CN" sz="1600"/>
+                        <a:t>1.031e-06</a:t>
+                      </a:r>
+                      <a:endParaRPr lang="en-US" altLang="zh-CN" sz="1600"/>
+                    </a:p>
+                  </a:txBody>
+                  <a:tcPr marL="254000" marR="254000" marT="177800" marB="177800" anchor="ctr" anchorCtr="0"/>
+                </a:tc>
+                <a:tc>
+                  <a:txBody>
+                    <a:bodyPr/>
+                    <a:p>
+                      <a:pPr algn="ctr">
+                        <a:lnSpc>
+                          <a:spcPct val="120000"/>
+                        </a:lnSpc>
+                        <a:buNone/>
+                      </a:pPr>
+                      <a:r>
+                        <a:rPr lang="en-US" altLang="zh-CN" sz="1600"/>
+                        <a:t>1.545e-01</a:t>
+                      </a:r>
+                      <a:endParaRPr lang="en-US" altLang="zh-CN" sz="1600"/>
+                    </a:p>
+                  </a:txBody>
+                  <a:tcPr marL="254000" marR="254000" marT="177800" marB="177800" anchor="ctr" anchorCtr="0"/>
+                </a:tc>
+                <a:tc>
+                  <a:txBody>
+                    <a:bodyPr/>
+                    <a:p>
+                      <a:pPr algn="ctr">
+                        <a:lnSpc>
+                          <a:spcPct val="120000"/>
+                        </a:lnSpc>
+                        <a:buNone/>
+                      </a:pPr>
+                      <a:r>
+                        <a:rPr lang="en-US" altLang="zh-CN" sz="1600"/>
+                        <a:t>1.348</a:t>
+                      </a:r>
+                      <a:r>
+                        <a:rPr lang="en-US" altLang="zh-CN" sz="1600"/>
+                        <a:t>e-12</a:t>
+                      </a:r>
+                      <a:endParaRPr lang="en-US" altLang="zh-CN" sz="1600"/>
+                    </a:p>
+                  </a:txBody>
+                  <a:tcPr marL="254000" marR="254000" marT="177800" marB="177800" anchor="ctr" anchorCtr="0"/>
+                </a:tc>
+                <a:tc>
+                  <a:txBody>
+                    <a:bodyPr/>
+                    <a:p>
+                      <a:pPr algn="ctr">
+                        <a:lnSpc>
+                          <a:spcPct val="120000"/>
+                        </a:lnSpc>
+                        <a:buNone/>
+                      </a:pPr>
+                      <a:r>
+                        <a:rPr lang="zh-CN" altLang="en-US" sz="1600"/>
+                        <a:t>是</a:t>
+                      </a:r>
+                      <a:endParaRPr lang="zh-CN" altLang="en-US" sz="1600"/>
+                    </a:p>
+                  </a:txBody>
+                  <a:tcPr marL="254000" marR="254000" marT="177800" marB="177800" anchor="ctr" anchorCtr="0"/>
+                </a:tc>
+              </a:tr>
+              <a:tr h="767715">
+                <a:tc>
+                  <a:txBody>
+                    <a:bodyPr/>
+                    <a:p>
+                      <a:pPr algn="ctr">
+                        <a:lnSpc>
+                          <a:spcPct val="120000"/>
+                        </a:lnSpc>
+                        <a:buNone/>
+                      </a:pPr>
+                      <a:r>
+                        <a:rPr lang="en-US" altLang="zh-CN" sz="1600"/>
+                        <a:t>random</a:t>
+                      </a:r>
+                      <a:endParaRPr lang="en-US" altLang="zh-CN" sz="1600"/>
+                    </a:p>
+                  </a:txBody>
+                  <a:tcPr marL="254000" marR="254000" marT="177800" marB="177800" anchor="ctr" anchorCtr="0"/>
+                </a:tc>
+                <a:tc>
+                  <a:txBody>
+                    <a:bodyPr/>
+                    <a:p>
+                      <a:pPr algn="ctr">
+                        <a:lnSpc>
+                          <a:spcPct val="120000"/>
+                        </a:lnSpc>
+                        <a:buNone/>
+                      </a:pPr>
+                      <a:r>
+                        <a:rPr lang="en-US" altLang="zh-CN" sz="1600"/>
+                        <a:t>512</a:t>
+                      </a:r>
+                      <a:endParaRPr lang="en-US" altLang="zh-CN" sz="1600"/>
+                    </a:p>
+                  </a:txBody>
+                  <a:tcPr marL="254000" marR="254000" marT="177800" marB="177800" anchor="ctr" anchorCtr="0"/>
+                </a:tc>
+                <a:tc>
+                  <a:txBody>
+                    <a:bodyPr/>
+                    <a:p>
+                      <a:pPr algn="ctr">
+                        <a:lnSpc>
+                          <a:spcPct val="120000"/>
+                        </a:lnSpc>
+                        <a:buNone/>
+                      </a:pPr>
+                      <a:r>
+                        <a:rPr lang="en-US" altLang="zh-CN" sz="1600"/>
+                        <a:t>1</a:t>
+                      </a:r>
+                      <a:endParaRPr lang="en-US" altLang="zh-CN" sz="1600"/>
+                    </a:p>
+                  </a:txBody>
+                  <a:tcPr marL="254000" marR="254000" marT="177800" marB="177800" anchor="ctr" anchorCtr="0"/>
+                </a:tc>
+                <a:tc>
+                  <a:txBody>
+                    <a:bodyPr/>
+                    <a:p>
+                      <a:pPr algn="ctr">
+                        <a:lnSpc>
+                          <a:spcPct val="120000"/>
+                        </a:lnSpc>
+                        <a:buNone/>
+                      </a:pPr>
+                      <a:r>
+                        <a:rPr lang="en-US" altLang="zh-CN" sz="1600"/>
+                        <a:t>403</a:t>
+                      </a:r>
+                      <a:endParaRPr lang="en-US" altLang="zh-CN" sz="1600"/>
+                    </a:p>
+                  </a:txBody>
+                  <a:tcPr marL="254000" marR="254000" marT="177800" marB="177800" anchor="ctr" anchorCtr="0"/>
+                </a:tc>
+                <a:tc>
+                  <a:txBody>
+                    <a:bodyPr/>
+                    <a:p>
+                      <a:pPr algn="ctr">
+                        <a:lnSpc>
+                          <a:spcPct val="120000"/>
+                        </a:lnSpc>
+                        <a:buNone/>
+                      </a:pPr>
+                      <a:r>
+                        <a:rPr lang="en-US" altLang="zh-CN" sz="1600"/>
+                        <a:t>5.835e-05</a:t>
+                      </a:r>
+                      <a:endParaRPr lang="en-US" altLang="zh-CN" sz="1600"/>
+                    </a:p>
+                  </a:txBody>
+                  <a:tcPr marL="254000" marR="254000" marT="177800" marB="177800" anchor="ctr" anchorCtr="0"/>
+                </a:tc>
+                <a:tc>
+                  <a:txBody>
+                    <a:bodyPr/>
+                    <a:p>
+                      <a:pPr algn="ctr">
+                        <a:lnSpc>
+                          <a:spcPct val="120000"/>
+                        </a:lnSpc>
+                        <a:buNone/>
+                      </a:pPr>
+                      <a:r>
+                        <a:rPr lang="en-US" altLang="zh-CN" sz="1600"/>
+                        <a:t>8.693e-01</a:t>
+                      </a:r>
+                      <a:endParaRPr lang="en-US" altLang="zh-CN" sz="1600"/>
+                    </a:p>
+                  </a:txBody>
+                  <a:tcPr marL="254000" marR="254000" marT="177800" marB="177800" anchor="ctr" anchorCtr="0"/>
+                </a:tc>
+                <a:tc>
+                  <a:txBody>
+                    <a:bodyPr/>
+                    <a:p>
+                      <a:pPr algn="ctr">
+                        <a:lnSpc>
+                          <a:spcPct val="120000"/>
+                        </a:lnSpc>
+                        <a:buNone/>
+                      </a:pPr>
+                      <a:r>
+                        <a:rPr lang="en-US" altLang="zh-CN" sz="1600"/>
+                        <a:t>1.245e-12</a:t>
+                      </a:r>
+                      <a:endParaRPr lang="en-US" altLang="zh-CN" sz="1600"/>
+                    </a:p>
+                  </a:txBody>
+                  <a:tcPr marL="254000" marR="254000" marT="177800" marB="177800" anchor="ctr" anchorCtr="0"/>
+                </a:tc>
+                <a:tc>
+                  <a:txBody>
+                    <a:bodyPr/>
+                    <a:p>
+                      <a:pPr algn="ctr">
+                        <a:lnSpc>
+                          <a:spcPct val="120000"/>
+                        </a:lnSpc>
+                        <a:buNone/>
+                      </a:pPr>
+                      <a:r>
+                        <a:rPr lang="zh-CN" altLang="en-US" sz="1600"/>
+                        <a:t>是</a:t>
+                      </a:r>
+                      <a:endParaRPr lang="zh-CN" altLang="en-US" sz="1600"/>
+                    </a:p>
+                  </a:txBody>
+                  <a:tcPr marL="254000" marR="254000" marT="177800" marB="177800" anchor="ctr" anchorCtr="0"/>
+                </a:tc>
+              </a:tr>
+              <a:tr h="767715">
+                <a:tc>
+                  <a:txBody>
+                    <a:bodyPr/>
+                    <a:p>
+                      <a:pPr algn="ctr">
+                        <a:lnSpc>
+                          <a:spcPct val="120000"/>
+                        </a:lnSpc>
+                        <a:buNone/>
+                      </a:pPr>
+                      <a:r>
+                        <a:rPr lang="en-US" altLang="zh-CN" sz="1600"/>
+                        <a:t>large_value</a:t>
+                      </a:r>
+                      <a:endParaRPr lang="en-US" altLang="zh-CN" sz="1600"/>
+                    </a:p>
+                  </a:txBody>
+                  <a:tcPr marL="254000" marR="254000" marT="177800" marB="177800" anchor="ctr" anchorCtr="0"/>
+                </a:tc>
+                <a:tc>
+                  <a:txBody>
+                    <a:bodyPr/>
+                    <a:p>
+                      <a:pPr algn="ctr">
+                        <a:lnSpc>
+                          <a:spcPct val="120000"/>
+                        </a:lnSpc>
+                        <a:buNone/>
+                      </a:pPr>
+                      <a:r>
+                        <a:rPr lang="en-US" altLang="zh-CN" sz="1600"/>
+                        <a:t>512</a:t>
+                      </a:r>
+                      <a:endParaRPr lang="en-US" altLang="zh-CN" sz="1600"/>
+                    </a:p>
+                  </a:txBody>
+                  <a:tcPr marL="254000" marR="254000" marT="177800" marB="177800" anchor="ctr" anchorCtr="0"/>
+                </a:tc>
+                <a:tc>
+                  <a:txBody>
+                    <a:bodyPr/>
+                    <a:p>
+                      <a:pPr algn="ctr">
+                        <a:lnSpc>
+                          <a:spcPct val="120000"/>
+                        </a:lnSpc>
+                        <a:buNone/>
+                      </a:pPr>
+                      <a:r>
+                        <a:rPr lang="en-US" altLang="zh-CN" sz="1600"/>
+                        <a:t>1</a:t>
+                      </a:r>
+                      <a:endParaRPr lang="en-US" altLang="zh-CN" sz="1600"/>
+                    </a:p>
+                  </a:txBody>
+                  <a:tcPr marL="254000" marR="254000" marT="177800" marB="177800" anchor="ctr" anchorCtr="0"/>
+                </a:tc>
+                <a:tc>
+                  <a:txBody>
+                    <a:bodyPr/>
+                    <a:p>
+                      <a:pPr algn="ctr">
+                        <a:lnSpc>
+                          <a:spcPct val="120000"/>
+                        </a:lnSpc>
+                        <a:buNone/>
+                      </a:pPr>
+                      <a:r>
+                        <a:rPr lang="en-US" altLang="zh-CN" sz="1600"/>
+                        <a:t>404</a:t>
+                      </a:r>
+                      <a:endParaRPr lang="en-US" altLang="zh-CN" sz="1600"/>
+                    </a:p>
+                  </a:txBody>
+                  <a:tcPr marL="254000" marR="254000" marT="177800" marB="177800" anchor="ctr" anchorCtr="0"/>
+                </a:tc>
+                <a:tc>
+                  <a:txBody>
+                    <a:bodyPr/>
+                    <a:p>
+                      <a:pPr algn="ctr">
+                        <a:lnSpc>
+                          <a:spcPct val="120000"/>
+                        </a:lnSpc>
+                        <a:buNone/>
+                      </a:pPr>
+                      <a:r>
+                        <a:rPr lang="en-US" altLang="zh-CN" sz="1600"/>
+                        <a:t>7.758e-06</a:t>
+                      </a:r>
+                      <a:endParaRPr lang="en-US" altLang="zh-CN" sz="1600"/>
+                    </a:p>
+                  </a:txBody>
+                  <a:tcPr marL="254000" marR="254000" marT="177800" marB="177800" anchor="ctr" anchorCtr="0"/>
+                </a:tc>
+                <a:tc>
+                  <a:txBody>
+                    <a:bodyPr/>
+                    <a:p>
+                      <a:pPr algn="ctr">
+                        <a:lnSpc>
+                          <a:spcPct val="120000"/>
+                        </a:lnSpc>
+                        <a:buNone/>
+                      </a:pPr>
+                      <a:r>
+                        <a:rPr lang="en-US" altLang="zh-CN" sz="1600"/>
+                        <a:t>1.719e+03</a:t>
+                      </a:r>
+                      <a:endParaRPr lang="en-US" altLang="zh-CN" sz="1600"/>
+                    </a:p>
+                  </a:txBody>
+                  <a:tcPr marL="254000" marR="254000" marT="177800" marB="177800" anchor="ctr" anchorCtr="0"/>
+                </a:tc>
+                <a:tc>
+                  <a:txBody>
+                    <a:bodyPr/>
+                    <a:p>
+                      <a:pPr algn="ctr">
+                        <a:lnSpc>
+                          <a:spcPct val="120000"/>
+                        </a:lnSpc>
+                        <a:buNone/>
+                      </a:pPr>
+                      <a:r>
+                        <a:rPr lang="en-US" altLang="zh-CN" sz="1600"/>
+                        <a:t>9.065e-09</a:t>
+                      </a:r>
+                      <a:endParaRPr lang="en-US" altLang="zh-CN" sz="1600"/>
+                    </a:p>
+                  </a:txBody>
+                  <a:tcPr marL="254000" marR="254000" marT="177800" marB="177800" anchor="ctr" anchorCtr="0"/>
+                </a:tc>
+                <a:tc>
+                  <a:txBody>
+                    <a:bodyPr/>
+                    <a:p>
+                      <a:pPr algn="ctr">
+                        <a:lnSpc>
+                          <a:spcPct val="120000"/>
+                        </a:lnSpc>
+                        <a:buNone/>
+                      </a:pPr>
+                      <a:r>
+                        <a:rPr lang="zh-CN" altLang="en-US" sz="1600"/>
+                        <a:t>否</a:t>
+                      </a:r>
+                      <a:endParaRPr lang="zh-CN" altLang="en-US" sz="1600"/>
+                    </a:p>
+                  </a:txBody>
+                  <a:tcPr marL="254000" marR="254000" marT="177800" marB="177800" anchor="ctr" anchorCtr="0"/>
+                </a:tc>
+              </a:tr>
+            </a:tbl>
+          </a:graphicData>
+        </a:graphic>
+      </p:graphicFrame>
+    </p:spTree>
+    <p:custDataLst>
+      <p:tags r:id="rId2"/>
+    </p:custDataLst>
+  </p:cSld>
+  <p:clrMapOvr>
+    <a:masterClrMapping/>
+  </p:clrMapOvr>
+</p:sld>
+</file>
+
+<file path=ppt/slides/slide15.xml><?xml version="1.0" encoding="utf-8"?>
+<p:sld xmlns:a="http://schemas.openxmlformats.org/drawingml/2006/main" xmlns:r="http://schemas.openxmlformats.org/officeDocument/2006/relationships" xmlns:p="http://schemas.openxmlformats.org/presentationml/2006/main">
+  <p:cSld>
+    <p:spTree>
+      <p:nvGrpSpPr>
+        <p:cNvPr id="1" name=""/>
+        <p:cNvGrpSpPr/>
+        <p:nvPr/>
+      </p:nvGrpSpPr>
+      <p:grpSpPr/>
+      <p:sp>
+        <p:nvSpPr>
+          <p:cNvPr id="2" name="标题 1"/>
+          <p:cNvSpPr>
+            <a:spLocks noGrp="1"/>
+          </p:cNvSpPr>
+          <p:nvPr>
+            <p:ph type="title"/>
+          </p:nvPr>
+        </p:nvSpPr>
+        <p:spPr/>
+        <p:txBody>
+          <a:bodyPr/>
+          <a:p>
+            <a:r>
+              <a:rPr lang="zh-CN" altLang="en-US"/>
+              <a:t>实验</a:t>
+            </a:r>
+            <a:r>
+              <a:rPr lang="zh-CN" altLang="en-US"/>
+              <a:t>进展</a:t>
+            </a:r>
+            <a:endParaRPr lang="zh-CN" altLang="en-US"/>
+          </a:p>
+        </p:txBody>
+      </p:sp>
+      <p:sp>
+        <p:nvSpPr>
+          <p:cNvPr id="4" name="灯片编号占位符 3"/>
+          <p:cNvSpPr>
+            <a:spLocks noGrp="1"/>
+          </p:cNvSpPr>
+          <p:nvPr>
+            <p:ph type="sldNum" sz="quarter" idx="12"/>
+          </p:nvPr>
+        </p:nvSpPr>
+        <p:spPr/>
+        <p:txBody>
+          <a:bodyPr/>
+          <a:p>
+            <a:fld id="{3B469B21-F3E0-463C-B78A-30764B838394}" type="slidenum">
+              <a:rPr lang="zh-CN" altLang="en-US"/>
+            </a:fld>
+            <a:endParaRPr lang="zh-CN" altLang="en-US"/>
+          </a:p>
+        </p:txBody>
+      </p:sp>
+      <p:pic>
+        <p:nvPicPr>
+          <p:cNvPr id="5" name="图片 4" descr="op_counts_by_size"/>
+          <p:cNvPicPr>
+            <a:picLocks noChangeAspect="1"/>
+          </p:cNvPicPr>
+          <p:nvPr/>
+        </p:nvPicPr>
+        <p:blipFill>
+          <a:blip r:embed="rId1"/>
+          <a:stretch>
+            <a:fillRect/>
+          </a:stretch>
+        </p:blipFill>
+        <p:spPr>
+          <a:xfrm>
+            <a:off x="1779905" y="1234440"/>
+            <a:ext cx="8459470" cy="4777105"/>
+          </a:xfrm>
+          <a:prstGeom prst="rect">
+            <a:avLst/>
+          </a:prstGeom>
+        </p:spPr>
+      </p:pic>
+    </p:spTree>
+    <p:custDataLst>
+      <p:tags r:id="rId2"/>
+    </p:custDataLst>
+  </p:cSld>
+  <p:clrMapOvr>
+    <a:masterClrMapping/>
+  </p:clrMapOvr>
+</p:sld>
+</file>
+
+<file path=ppt/slides/slide16.xml><?xml version="1.0" encoding="utf-8"?>
+<p:sld xmlns:a="http://schemas.openxmlformats.org/drawingml/2006/main" xmlns:r="http://schemas.openxmlformats.org/officeDocument/2006/relationships" xmlns:p="http://schemas.openxmlformats.org/presentationml/2006/main">
+  <p:cSld>
+    <p:spTree>
+      <p:nvGrpSpPr>
+        <p:cNvPr id="1" name=""/>
+        <p:cNvGrpSpPr/>
+        <p:nvPr/>
+      </p:nvGrpSpPr>
+      <p:grpSpPr/>
+      <p:sp>
+        <p:nvSpPr>
+          <p:cNvPr id="2" name="标题 1"/>
+          <p:cNvSpPr>
+            <a:spLocks noGrp="1"/>
+          </p:cNvSpPr>
+          <p:nvPr>
+            <p:ph type="title"/>
+          </p:nvPr>
+        </p:nvSpPr>
+        <p:spPr/>
+        <p:txBody>
+          <a:bodyPr/>
+          <a:p>
+            <a:r>
+              <a:rPr lang="zh-CN" altLang="en-US"/>
+              <a:t>实验</a:t>
+            </a:r>
+            <a:r>
+              <a:rPr lang="zh-CN" altLang="en-US"/>
+              <a:t>进展</a:t>
+            </a:r>
+            <a:endParaRPr lang="zh-CN" altLang="en-US"/>
+          </a:p>
+        </p:txBody>
+      </p:sp>
+      <p:sp>
+        <p:nvSpPr>
+          <p:cNvPr id="4" name="灯片编号占位符 3"/>
+          <p:cNvSpPr>
+            <a:spLocks noGrp="1"/>
+          </p:cNvSpPr>
+          <p:nvPr>
+            <p:ph type="sldNum" sz="quarter" idx="12"/>
+          </p:nvPr>
+        </p:nvSpPr>
+        <p:spPr/>
+        <p:txBody>
+          <a:bodyPr/>
+          <a:p>
+            <a:fld id="{3B469B21-F3E0-463C-B78A-30764B838394}" type="slidenum">
+              <a:rPr lang="zh-CN" altLang="en-US"/>
+            </a:fld>
+            <a:endParaRPr lang="zh-CN" altLang="en-US"/>
+          </a:p>
+        </p:txBody>
+      </p:sp>
+      <p:pic>
+        <p:nvPicPr>
+          <p:cNvPr id="5" name="图片 4" descr="final_residual_by_mode"/>
+          <p:cNvPicPr>
+            <a:picLocks noChangeAspect="1"/>
+          </p:cNvPicPr>
+          <p:nvPr/>
+        </p:nvPicPr>
+        <p:blipFill>
+          <a:blip r:embed="rId1"/>
+          <a:stretch>
+            <a:fillRect/>
+          </a:stretch>
+        </p:blipFill>
+        <p:spPr>
+          <a:xfrm>
+            <a:off x="1464945" y="1018540"/>
+            <a:ext cx="8755380" cy="4944110"/>
+          </a:xfrm>
+          <a:prstGeom prst="rect">
+            <a:avLst/>
+          </a:prstGeom>
+        </p:spPr>
+      </p:pic>
+    </p:spTree>
+    <p:custDataLst>
+      <p:tags r:id="rId2"/>
+    </p:custDataLst>
+  </p:cSld>
+  <p:clrMapOvr>
+    <a:masterClrMapping/>
+  </p:clrMapOvr>
+</p:sld>
+</file>
+
+<file path=ppt/slides/slide17.xml><?xml version="1.0" encoding="utf-8"?>
+<p:sld xmlns:a="http://schemas.openxmlformats.org/drawingml/2006/main" xmlns:r="http://schemas.openxmlformats.org/officeDocument/2006/relationships" xmlns:p="http://schemas.openxmlformats.org/presentationml/2006/main">
+  <p:cSld>
+    <p:spTree>
+      <p:nvGrpSpPr>
+        <p:cNvPr id="1" name=""/>
+        <p:cNvGrpSpPr/>
+        <p:nvPr/>
+      </p:nvGrpSpPr>
+      <p:grpSpPr/>
+      <p:sp>
+        <p:nvSpPr>
+          <p:cNvPr id="2" name="标题 1"/>
+          <p:cNvSpPr>
+            <a:spLocks noGrp="1"/>
+          </p:cNvSpPr>
+          <p:nvPr>
+            <p:ph type="title"/>
+          </p:nvPr>
+        </p:nvSpPr>
+        <p:spPr/>
+        <p:txBody>
+          <a:bodyPr/>
+          <a:p>
+            <a:r>
+              <a:rPr lang="zh-CN" altLang="en-US"/>
+              <a:t>实验</a:t>
+            </a:r>
+            <a:r>
+              <a:rPr lang="zh-CN" altLang="en-US"/>
+              <a:t>进展</a:t>
+            </a:r>
+            <a:endParaRPr lang="zh-CN" altLang="en-US"/>
+          </a:p>
+        </p:txBody>
+      </p:sp>
+      <p:sp>
+        <p:nvSpPr>
+          <p:cNvPr id="4" name="灯片编号占位符 3"/>
+          <p:cNvSpPr>
+            <a:spLocks noGrp="1"/>
+          </p:cNvSpPr>
+          <p:nvPr>
+            <p:ph type="sldNum" sz="quarter" idx="12"/>
+          </p:nvPr>
+        </p:nvSpPr>
+        <p:spPr/>
+        <p:txBody>
+          <a:bodyPr/>
+          <a:p>
+            <a:fld id="{3B469B21-F3E0-463C-B78A-30764B838394}" type="slidenum">
+              <a:rPr lang="zh-CN" altLang="en-US"/>
+            </a:fld>
+            <a:endParaRPr lang="zh-CN" altLang="en-US"/>
+          </a:p>
+        </p:txBody>
+      </p:sp>
+      <p:pic>
+        <p:nvPicPr>
+          <p:cNvPr id="5" name="图片 4" descr="residual_convergence_by_mode"/>
+          <p:cNvPicPr>
+            <a:picLocks noChangeAspect="1"/>
+          </p:cNvPicPr>
+          <p:nvPr/>
+        </p:nvPicPr>
+        <p:blipFill>
+          <a:blip r:embed="rId1"/>
+          <a:stretch>
+            <a:fillRect/>
+          </a:stretch>
+        </p:blipFill>
+        <p:spPr>
+          <a:xfrm>
+            <a:off x="2209800" y="1143000"/>
+            <a:ext cx="7772400" cy="4572000"/>
+          </a:xfrm>
+          <a:prstGeom prst="rect">
+            <a:avLst/>
+          </a:prstGeom>
+        </p:spPr>
+      </p:pic>
+    </p:spTree>
+    <p:custDataLst>
+      <p:tags r:id="rId2"/>
+    </p:custDataLst>
+  </p:cSld>
+  <p:clrMapOvr>
+    <a:masterClrMapping/>
+  </p:clrMapOvr>
+</p:sld>
+</file>
+
+<file path=ppt/slides/slide18.xml><?xml version="1.0" encoding="utf-8"?>
 <p:sld xmlns:a="http://schemas.openxmlformats.org/drawingml/2006/main" xmlns:r="http://schemas.openxmlformats.org/officeDocument/2006/relationships" xmlns:p="http://schemas.openxmlformats.org/presentationml/2006/main">
   <p:cSld>
     <p:spTree>
@@ -30412,9 +34999,9 @@
                 <a:effectLst/>
                 <a:uLnTx/>
                 <a:uFillTx/>
-                <a:latin typeface="Arial" panose="020B0604020202020204" pitchFamily="34" charset="0"/>
+                <a:latin typeface="Arial" panose="020B0604020202090204" pitchFamily="34" charset="0"/>
                 <a:ea typeface="华文楷体" panose="02010600040101010101" charset="-122"/>
-                <a:cs typeface="Arial" panose="020B0604020202020204" pitchFamily="34" charset="0"/>
+                <a:cs typeface="Arial" panose="020B0604020202090204" pitchFamily="34" charset="0"/>
               </a:rPr>
               <a:t>04</a:t>
             </a:r>
@@ -30428,9 +35015,9 @@
               <a:effectLst/>
               <a:uLnTx/>
               <a:uFillTx/>
-              <a:latin typeface="Arial" panose="020B0604020202020204" pitchFamily="34" charset="0"/>
+              <a:latin typeface="Arial" panose="020B0604020202090204" pitchFamily="34" charset="0"/>
               <a:ea typeface="华文楷体" panose="02010600040101010101" charset="-122"/>
-              <a:cs typeface="Arial" panose="020B0604020202020204" pitchFamily="34" charset="0"/>
+              <a:cs typeface="Arial" panose="020B0604020202090204" pitchFamily="34" charset="0"/>
             </a:endParaRPr>
           </a:p>
         </p:txBody>
@@ -30500,7 +35087,7 @@
 </p:sld>
 </file>
 
-<file path=ppt/slides/slide11.xml><?xml version="1.0" encoding="utf-8"?>
+<file path=ppt/slides/slide19.xml><?xml version="1.0" encoding="utf-8"?>
 <p:sld xmlns:a="http://schemas.openxmlformats.org/drawingml/2006/main" xmlns:r="http://schemas.openxmlformats.org/officeDocument/2006/relationships" xmlns:p="http://schemas.openxmlformats.org/presentationml/2006/main">
   <p:cSld>
     <p:spTree>
@@ -30570,905 +35157,6 @@
           </a:p>
         </p:txBody>
       </p:sp>
-    </p:spTree>
-    <p:custDataLst>
-      <p:tags r:id="rId1"/>
-    </p:custDataLst>
-  </p:cSld>
-  <p:clrMapOvr>
-    <a:masterClrMapping/>
-  </p:clrMapOvr>
-</p:sld>
-</file>
-
-<file path=ppt/slides/slide12.xml><?xml version="1.0" encoding="utf-8"?>
-<p:sld xmlns:a="http://schemas.openxmlformats.org/drawingml/2006/main" xmlns:r="http://schemas.openxmlformats.org/officeDocument/2006/relationships" xmlns:p="http://schemas.openxmlformats.org/presentationml/2006/main">
-  <p:cSld>
-    <p:spTree>
-      <p:nvGrpSpPr>
-        <p:cNvPr id="1" name=""/>
-        <p:cNvGrpSpPr/>
-        <p:nvPr/>
-      </p:nvGrpSpPr>
-      <p:grpSpPr>
-        <a:xfrm>
-          <a:off x="0" y="0"/>
-          <a:ext cx="0" cy="0"/>
-          <a:chOff x="0" y="0"/>
-          <a:chExt cx="0" cy="0"/>
-        </a:xfrm>
-      </p:grpSpPr>
-      <p:sp>
-        <p:nvSpPr>
-          <p:cNvPr id="6" name="标题 5"/>
-          <p:cNvSpPr>
-            <a:spLocks noGrp="1"/>
-          </p:cNvSpPr>
-          <p:nvPr>
-            <p:ph type="ctrTitle"/>
-          </p:nvPr>
-        </p:nvSpPr>
-        <p:spPr>
-          <a:xfrm>
-            <a:off x="1871675" y="1269787"/>
-            <a:ext cx="7999578" cy="858203"/>
-          </a:xfrm>
-          <a:noFill/>
-        </p:spPr>
-        <p:txBody>
-          <a:bodyPr>
-            <a:noAutofit/>
-          </a:bodyPr>
-          <a:lstStyle/>
-          <a:p>
-            <a:r>
-              <a:rPr lang="zh-CN" altLang="en-US" sz="7200" dirty="0">
-                <a:solidFill>
-                  <a:schemeClr val="bg1">
-                    <a:lumMod val="85000"/>
-                  </a:schemeClr>
-                </a:solidFill>
-                <a:latin typeface="华文行楷" panose="02010800040101010101" pitchFamily="2" charset="-122"/>
-                <a:ea typeface="华文行楷" panose="02010800040101010101" pitchFamily="2" charset="-122"/>
-              </a:rPr>
-              <a:t>兰州大学</a:t>
-            </a:r>
-            <a:endParaRPr lang="zh-CN" altLang="en-US" sz="7200" dirty="0">
-              <a:solidFill>
-                <a:schemeClr val="bg1">
-                  <a:lumMod val="85000"/>
-                </a:schemeClr>
-              </a:solidFill>
-              <a:latin typeface="华文行楷" panose="02010800040101010101" pitchFamily="2" charset="-122"/>
-              <a:ea typeface="华文行楷" panose="02010800040101010101" pitchFamily="2" charset="-122"/>
-            </a:endParaRPr>
-          </a:p>
-        </p:txBody>
-      </p:sp>
-      <p:sp>
-        <p:nvSpPr>
-          <p:cNvPr id="7" name="副标题 6"/>
-          <p:cNvSpPr>
-            <a:spLocks noGrp="1"/>
-          </p:cNvSpPr>
-          <p:nvPr>
-            <p:ph type="subTitle" idx="1"/>
-          </p:nvPr>
-        </p:nvSpPr>
-        <p:spPr>
-          <a:xfrm>
-            <a:off x="1871980" y="3461385"/>
-            <a:ext cx="8284845" cy="745490"/>
-          </a:xfrm>
-        </p:spPr>
-        <p:txBody>
-          <a:bodyPr>
-            <a:noAutofit/>
-          </a:bodyPr>
-          <a:lstStyle/>
-          <a:p>
-            <a:pPr defTabSz="543560">
-              <a:lnSpc>
-                <a:spcPct val="100000"/>
-              </a:lnSpc>
-              <a:defRPr sz="5580"/>
-            </a:pPr>
-            <a:r>
-              <a:rPr lang="zh-CN" altLang="en-US" sz="4000" b="1" dirty="0">
-                <a:solidFill>
-                  <a:srgbClr val="0070C0"/>
-                </a:solidFill>
-                <a:latin typeface="华文楷体" panose="02010600040101010101" charset="-122"/>
-                <a:ea typeface="华文楷体" panose="02010600040101010101" charset="-122"/>
-              </a:rPr>
-              <a:t>请各位专家批评指正</a:t>
-            </a:r>
-            <a:endParaRPr lang="zh-CN" altLang="en-US" sz="4000" b="1" dirty="0">
-              <a:solidFill>
-                <a:srgbClr val="0070C0"/>
-              </a:solidFill>
-              <a:latin typeface="华文楷体" panose="02010600040101010101" charset="-122"/>
-              <a:ea typeface="华文楷体" panose="02010600040101010101" charset="-122"/>
-            </a:endParaRPr>
-          </a:p>
-        </p:txBody>
-      </p:sp>
-      <p:pic>
-        <p:nvPicPr>
-          <p:cNvPr id="5" name="图片 4"/>
-          <p:cNvPicPr>
-            <a:picLocks noChangeAspect="1"/>
-          </p:cNvPicPr>
-          <p:nvPr/>
-        </p:nvPicPr>
-        <p:blipFill>
-          <a:blip r:embed="rId1">
-            <a:extLst>
-              <a:ext uri="{28A0092B-C50C-407E-A947-70E740481C1C}">
-                <a14:useLocalDpi xmlns:a14="http://schemas.microsoft.com/office/drawing/2010/main" val="0"/>
-              </a:ext>
-            </a:extLst>
-          </a:blip>
-          <a:stretch>
-            <a:fillRect/>
-          </a:stretch>
-        </p:blipFill>
-        <p:spPr>
-          <a:xfrm>
-            <a:off x="11451590" y="5930900"/>
-            <a:ext cx="654050" cy="855345"/>
-          </a:xfrm>
-          <a:prstGeom prst="rect">
-            <a:avLst/>
-          </a:prstGeom>
-        </p:spPr>
-      </p:pic>
-      <p:sp>
-        <p:nvSpPr>
-          <p:cNvPr id="3" name="矩形 2"/>
-          <p:cNvSpPr/>
-          <p:nvPr/>
-        </p:nvSpPr>
-        <p:spPr>
-          <a:xfrm>
-            <a:off x="211455" y="191770"/>
-            <a:ext cx="1821180" cy="617220"/>
-          </a:xfrm>
-          <a:prstGeom prst="rect">
-            <a:avLst/>
-          </a:prstGeom>
-          <a:solidFill>
-            <a:srgbClr val="034779"/>
-          </a:solidFill>
-          <a:ln>
-            <a:solidFill>
-              <a:srgbClr val="034779"/>
-            </a:solidFill>
-          </a:ln>
-        </p:spPr>
-        <p:style>
-          <a:lnRef idx="2">
-            <a:schemeClr val="accent1">
-              <a:shade val="50000"/>
-            </a:schemeClr>
-          </a:lnRef>
-          <a:fillRef idx="1">
-            <a:schemeClr val="accent1"/>
-          </a:fillRef>
-          <a:effectRef idx="0">
-            <a:schemeClr val="accent1"/>
-          </a:effectRef>
-          <a:fontRef idx="minor">
-            <a:schemeClr val="lt1"/>
-          </a:fontRef>
-        </p:style>
-        <p:txBody>
-          <a:bodyPr rtlCol="0" anchor="ctr"/>
-          <a:lstStyle/>
-          <a:p>
-            <a:pPr algn="ctr"/>
-            <a:endParaRPr lang="zh-CN" altLang="en-US"/>
-          </a:p>
-        </p:txBody>
-      </p:sp>
-      <p:sp>
-        <p:nvSpPr>
-          <p:cNvPr id="4" name="矩形 3"/>
-          <p:cNvSpPr/>
-          <p:nvPr/>
-        </p:nvSpPr>
-        <p:spPr>
-          <a:xfrm>
-            <a:off x="9266555" y="302895"/>
-            <a:ext cx="2559685" cy="262890"/>
-          </a:xfrm>
-          <a:prstGeom prst="rect">
-            <a:avLst/>
-          </a:prstGeom>
-          <a:solidFill>
-            <a:srgbClr val="034779"/>
-          </a:solidFill>
-          <a:ln>
-            <a:solidFill>
-              <a:srgbClr val="034779"/>
-            </a:solidFill>
-          </a:ln>
-        </p:spPr>
-        <p:style>
-          <a:lnRef idx="2">
-            <a:schemeClr val="accent1">
-              <a:shade val="50000"/>
-            </a:schemeClr>
-          </a:lnRef>
-          <a:fillRef idx="1">
-            <a:schemeClr val="accent1"/>
-          </a:fillRef>
-          <a:effectRef idx="0">
-            <a:schemeClr val="accent1"/>
-          </a:effectRef>
-          <a:fontRef idx="minor">
-            <a:schemeClr val="lt1"/>
-          </a:fontRef>
-        </p:style>
-        <p:txBody>
-          <a:bodyPr rtlCol="0" anchor="ctr"/>
-          <a:lstStyle/>
-          <a:p>
-            <a:pPr algn="ctr"/>
-            <a:endParaRPr lang="zh-CN" altLang="en-US"/>
-          </a:p>
-        </p:txBody>
-      </p:sp>
-      <p:sp>
-        <p:nvSpPr>
-          <p:cNvPr id="14" name="Freeform 90"/>
-          <p:cNvSpPr/>
-          <p:nvPr/>
-        </p:nvSpPr>
-        <p:spPr>
-          <a:xfrm>
-            <a:off x="3044735" y="5187854"/>
-            <a:ext cx="297818" cy="400359"/>
-          </a:xfrm>
-          <a:custGeom>
-            <a:avLst/>
-            <a:gdLst/>
-            <a:ahLst/>
-            <a:cxnLst>
-              <a:cxn ang="0">
-                <a:pos x="wd2" y="hd2"/>
-              </a:cxn>
-              <a:cxn ang="5400000">
-                <a:pos x="wd2" y="hd2"/>
-              </a:cxn>
-              <a:cxn ang="10800000">
-                <a:pos x="wd2" y="hd2"/>
-              </a:cxn>
-              <a:cxn ang="16200000">
-                <a:pos x="wd2" y="hd2"/>
-              </a:cxn>
-            </a:cxnLst>
-            <a:rect l="0" t="0" r="r" b="b"/>
-            <a:pathLst>
-              <a:path w="21133" h="21600" extrusionOk="0">
-                <a:moveTo>
-                  <a:pt x="10533" y="8436"/>
-                </a:moveTo>
-                <a:cubicBezTo>
-                  <a:pt x="12978" y="8436"/>
-                  <a:pt x="15016" y="6518"/>
-                  <a:pt x="15016" y="4218"/>
-                </a:cubicBezTo>
-                <a:cubicBezTo>
-                  <a:pt x="15016" y="1917"/>
-                  <a:pt x="12978" y="0"/>
-                  <a:pt x="10533" y="0"/>
-                </a:cubicBezTo>
-                <a:cubicBezTo>
-                  <a:pt x="8088" y="0"/>
-                  <a:pt x="6050" y="1917"/>
-                  <a:pt x="6050" y="4218"/>
-                </a:cubicBezTo>
-                <a:cubicBezTo>
-                  <a:pt x="6050" y="6518"/>
-                  <a:pt x="8088" y="8436"/>
-                  <a:pt x="10533" y="8436"/>
-                </a:cubicBezTo>
-                <a:close/>
-                <a:moveTo>
-                  <a:pt x="20993" y="14954"/>
-                </a:moveTo>
-                <a:cubicBezTo>
-                  <a:pt x="18005" y="10992"/>
-                  <a:pt x="18005" y="10992"/>
-                  <a:pt x="18005" y="10992"/>
-                </a:cubicBezTo>
-                <a:cubicBezTo>
-                  <a:pt x="17733" y="12398"/>
-                  <a:pt x="17326" y="13804"/>
-                  <a:pt x="16782" y="15209"/>
-                </a:cubicBezTo>
-                <a:cubicBezTo>
-                  <a:pt x="17190" y="15593"/>
-                  <a:pt x="17190" y="15593"/>
-                  <a:pt x="17190" y="15593"/>
-                </a:cubicBezTo>
-                <a:cubicBezTo>
-                  <a:pt x="14880" y="16615"/>
-                  <a:pt x="14880" y="16615"/>
-                  <a:pt x="14880" y="16615"/>
-                </a:cubicBezTo>
-                <a:cubicBezTo>
-                  <a:pt x="13929" y="16999"/>
-                  <a:pt x="13658" y="18149"/>
-                  <a:pt x="14201" y="18916"/>
-                </a:cubicBezTo>
-                <a:cubicBezTo>
-                  <a:pt x="14609" y="19683"/>
-                  <a:pt x="15831" y="19938"/>
-                  <a:pt x="16646" y="19555"/>
-                </a:cubicBezTo>
-                <a:cubicBezTo>
-                  <a:pt x="20178" y="18021"/>
-                  <a:pt x="20178" y="18021"/>
-                  <a:pt x="20178" y="18021"/>
-                </a:cubicBezTo>
-                <a:cubicBezTo>
-                  <a:pt x="20858" y="17766"/>
-                  <a:pt x="21401" y="15465"/>
-                  <a:pt x="20993" y="14954"/>
-                </a:cubicBezTo>
-                <a:close/>
-                <a:moveTo>
-                  <a:pt x="13250" y="19555"/>
-                </a:moveTo>
-                <a:cubicBezTo>
-                  <a:pt x="12163" y="19811"/>
-                  <a:pt x="11076" y="20194"/>
-                  <a:pt x="10669" y="20705"/>
-                </a:cubicBezTo>
-                <a:cubicBezTo>
-                  <a:pt x="10805" y="18277"/>
-                  <a:pt x="11076" y="15721"/>
-                  <a:pt x="11212" y="13164"/>
-                </a:cubicBezTo>
-                <a:cubicBezTo>
-                  <a:pt x="11484" y="12909"/>
-                  <a:pt x="12027" y="12781"/>
-                  <a:pt x="12435" y="12525"/>
-                </a:cubicBezTo>
-                <a:cubicBezTo>
-                  <a:pt x="12978" y="12398"/>
-                  <a:pt x="13386" y="12270"/>
-                  <a:pt x="13929" y="12142"/>
-                </a:cubicBezTo>
-                <a:cubicBezTo>
-                  <a:pt x="14337" y="11886"/>
-                  <a:pt x="14880" y="11759"/>
-                  <a:pt x="15288" y="11631"/>
-                </a:cubicBezTo>
-                <a:cubicBezTo>
-                  <a:pt x="16239" y="11247"/>
-                  <a:pt x="17054" y="10736"/>
-                  <a:pt x="17597" y="10353"/>
-                </a:cubicBezTo>
-                <a:cubicBezTo>
-                  <a:pt x="17461" y="10097"/>
-                  <a:pt x="17190" y="9841"/>
-                  <a:pt x="16918" y="9586"/>
-                </a:cubicBezTo>
-                <a:cubicBezTo>
-                  <a:pt x="16782" y="9458"/>
-                  <a:pt x="16782" y="9458"/>
-                  <a:pt x="16646" y="9458"/>
-                </a:cubicBezTo>
-                <a:cubicBezTo>
-                  <a:pt x="16239" y="9075"/>
-                  <a:pt x="15695" y="8947"/>
-                  <a:pt x="15016" y="8947"/>
-                </a:cubicBezTo>
-                <a:cubicBezTo>
-                  <a:pt x="13386" y="8947"/>
-                  <a:pt x="13386" y="8947"/>
-                  <a:pt x="13386" y="8947"/>
-                </a:cubicBezTo>
-                <a:cubicBezTo>
-                  <a:pt x="10533" y="10992"/>
-                  <a:pt x="10533" y="10992"/>
-                  <a:pt x="10533" y="10992"/>
-                </a:cubicBezTo>
-                <a:cubicBezTo>
-                  <a:pt x="7816" y="8947"/>
-                  <a:pt x="7816" y="8947"/>
-                  <a:pt x="7816" y="8947"/>
-                </a:cubicBezTo>
-                <a:cubicBezTo>
-                  <a:pt x="6186" y="8947"/>
-                  <a:pt x="6186" y="8947"/>
-                  <a:pt x="6186" y="8947"/>
-                </a:cubicBezTo>
-                <a:cubicBezTo>
-                  <a:pt x="5507" y="8947"/>
-                  <a:pt x="4963" y="9075"/>
-                  <a:pt x="4420" y="9458"/>
-                </a:cubicBezTo>
-                <a:cubicBezTo>
-                  <a:pt x="4420" y="9458"/>
-                  <a:pt x="4284" y="9458"/>
-                  <a:pt x="4284" y="9586"/>
-                </a:cubicBezTo>
-                <a:cubicBezTo>
-                  <a:pt x="4012" y="9841"/>
-                  <a:pt x="3741" y="10097"/>
-                  <a:pt x="3605" y="10353"/>
-                </a:cubicBezTo>
-                <a:cubicBezTo>
-                  <a:pt x="4148" y="10736"/>
-                  <a:pt x="4963" y="11247"/>
-                  <a:pt x="5914" y="11631"/>
-                </a:cubicBezTo>
-                <a:cubicBezTo>
-                  <a:pt x="6322" y="11759"/>
-                  <a:pt x="6865" y="11886"/>
-                  <a:pt x="7273" y="12142"/>
-                </a:cubicBezTo>
-                <a:cubicBezTo>
-                  <a:pt x="7816" y="12270"/>
-                  <a:pt x="8224" y="12398"/>
-                  <a:pt x="8631" y="12525"/>
-                </a:cubicBezTo>
-                <a:cubicBezTo>
-                  <a:pt x="9175" y="12781"/>
-                  <a:pt x="9582" y="12909"/>
-                  <a:pt x="9990" y="13164"/>
-                </a:cubicBezTo>
-                <a:cubicBezTo>
-                  <a:pt x="10126" y="15721"/>
-                  <a:pt x="10261" y="18277"/>
-                  <a:pt x="10397" y="20705"/>
-                </a:cubicBezTo>
-                <a:cubicBezTo>
-                  <a:pt x="9990" y="20194"/>
-                  <a:pt x="8903" y="19811"/>
-                  <a:pt x="7816" y="19427"/>
-                </a:cubicBezTo>
-                <a:cubicBezTo>
-                  <a:pt x="7273" y="20194"/>
-                  <a:pt x="6458" y="20578"/>
-                  <a:pt x="5643" y="20705"/>
-                </a:cubicBezTo>
-                <a:cubicBezTo>
-                  <a:pt x="6593" y="20961"/>
-                  <a:pt x="8495" y="21472"/>
-                  <a:pt x="10533" y="21600"/>
-                </a:cubicBezTo>
-                <a:cubicBezTo>
-                  <a:pt x="10669" y="21600"/>
-                  <a:pt x="10669" y="21600"/>
-                  <a:pt x="10669" y="21600"/>
-                </a:cubicBezTo>
-                <a:cubicBezTo>
-                  <a:pt x="10669" y="21600"/>
-                  <a:pt x="10669" y="21600"/>
-                  <a:pt x="10669" y="21600"/>
-                </a:cubicBezTo>
-                <a:cubicBezTo>
-                  <a:pt x="12707" y="21600"/>
-                  <a:pt x="14609" y="20961"/>
-                  <a:pt x="15559" y="20705"/>
-                </a:cubicBezTo>
-                <a:cubicBezTo>
-                  <a:pt x="14609" y="20705"/>
-                  <a:pt x="13793" y="20194"/>
-                  <a:pt x="13250" y="19555"/>
-                </a:cubicBezTo>
-                <a:close/>
-                <a:moveTo>
-                  <a:pt x="7001" y="18916"/>
-                </a:moveTo>
-                <a:cubicBezTo>
-                  <a:pt x="7409" y="18149"/>
-                  <a:pt x="7137" y="16999"/>
-                  <a:pt x="6322" y="16615"/>
-                </a:cubicBezTo>
-                <a:cubicBezTo>
-                  <a:pt x="3876" y="15593"/>
-                  <a:pt x="3876" y="15593"/>
-                  <a:pt x="3876" y="15593"/>
-                </a:cubicBezTo>
-                <a:cubicBezTo>
-                  <a:pt x="4284" y="15082"/>
-                  <a:pt x="4284" y="15082"/>
-                  <a:pt x="4284" y="15082"/>
-                </a:cubicBezTo>
-                <a:cubicBezTo>
-                  <a:pt x="3876" y="13804"/>
-                  <a:pt x="3469" y="12398"/>
-                  <a:pt x="3061" y="10992"/>
-                </a:cubicBezTo>
-                <a:cubicBezTo>
-                  <a:pt x="73" y="14954"/>
-                  <a:pt x="73" y="14954"/>
-                  <a:pt x="73" y="14954"/>
-                </a:cubicBezTo>
-                <a:cubicBezTo>
-                  <a:pt x="-199" y="15465"/>
-                  <a:pt x="344" y="17766"/>
-                  <a:pt x="888" y="18021"/>
-                </a:cubicBezTo>
-                <a:cubicBezTo>
-                  <a:pt x="4556" y="19555"/>
-                  <a:pt x="4556" y="19555"/>
-                  <a:pt x="4556" y="19555"/>
-                </a:cubicBezTo>
-                <a:cubicBezTo>
-                  <a:pt x="5371" y="19938"/>
-                  <a:pt x="6458" y="19683"/>
-                  <a:pt x="7001" y="18916"/>
-                </a:cubicBezTo>
-                <a:close/>
-              </a:path>
-            </a:pathLst>
-          </a:custGeom>
-          <a:solidFill>
-            <a:srgbClr val="0070C0"/>
-          </a:solidFill>
-          <a:ln w="12700" cap="flat">
-            <a:noFill/>
-            <a:miter lim="400000"/>
-          </a:ln>
-          <a:effectLst/>
-        </p:spPr>
-        <p:txBody>
-          <a:bodyPr wrap="square" lIns="91439" tIns="91439" rIns="91439" bIns="91439" numCol="1" anchor="t">
-            <a:noAutofit/>
-          </a:bodyPr>
-          <a:lstStyle/>
-          <a:p>
-            <a:endParaRPr sz="1600" dirty="0"/>
-          </a:p>
-        </p:txBody>
-      </p:sp>
-      <p:sp>
-        <p:nvSpPr>
-          <p:cNvPr id="18" name="Freeform 88"/>
-          <p:cNvSpPr/>
-          <p:nvPr/>
-        </p:nvSpPr>
-        <p:spPr>
-          <a:xfrm>
-            <a:off x="7201285" y="5161915"/>
-            <a:ext cx="398928" cy="420029"/>
-          </a:xfrm>
-          <a:custGeom>
-            <a:avLst/>
-            <a:gdLst/>
-            <a:ahLst/>
-            <a:cxnLst>
-              <a:cxn ang="0">
-                <a:pos x="wd2" y="hd2"/>
-              </a:cxn>
-              <a:cxn ang="5400000">
-                <a:pos x="wd2" y="hd2"/>
-              </a:cxn>
-              <a:cxn ang="10800000">
-                <a:pos x="wd2" y="hd2"/>
-              </a:cxn>
-              <a:cxn ang="16200000">
-                <a:pos x="wd2" y="hd2"/>
-              </a:cxn>
-            </a:cxnLst>
-            <a:rect l="0" t="0" r="r" b="b"/>
-            <a:pathLst>
-              <a:path w="21535" h="21600" extrusionOk="0">
-                <a:moveTo>
-                  <a:pt x="20500" y="0"/>
-                </a:moveTo>
-                <a:cubicBezTo>
-                  <a:pt x="12481" y="0"/>
-                  <a:pt x="12481" y="0"/>
-                  <a:pt x="12481" y="0"/>
-                </a:cubicBezTo>
-                <a:cubicBezTo>
-                  <a:pt x="11964" y="0"/>
-                  <a:pt x="11446" y="584"/>
-                  <a:pt x="11446" y="1314"/>
-                </a:cubicBezTo>
-                <a:cubicBezTo>
-                  <a:pt x="11446" y="7589"/>
-                  <a:pt x="11446" y="7589"/>
-                  <a:pt x="11446" y="7589"/>
-                </a:cubicBezTo>
-                <a:cubicBezTo>
-                  <a:pt x="11964" y="6859"/>
-                  <a:pt x="11964" y="6859"/>
-                  <a:pt x="11964" y="6859"/>
-                </a:cubicBezTo>
-                <a:cubicBezTo>
-                  <a:pt x="12222" y="6714"/>
-                  <a:pt x="12481" y="6568"/>
-                  <a:pt x="12740" y="6422"/>
-                </a:cubicBezTo>
-                <a:cubicBezTo>
-                  <a:pt x="13645" y="2919"/>
-                  <a:pt x="13645" y="2919"/>
-                  <a:pt x="13645" y="2919"/>
-                </a:cubicBezTo>
-                <a:cubicBezTo>
-                  <a:pt x="15327" y="3357"/>
-                  <a:pt x="15327" y="3357"/>
-                  <a:pt x="15327" y="3357"/>
-                </a:cubicBezTo>
-                <a:cubicBezTo>
-                  <a:pt x="14421" y="7297"/>
-                  <a:pt x="14421" y="7297"/>
-                  <a:pt x="14421" y="7297"/>
-                </a:cubicBezTo>
-                <a:cubicBezTo>
-                  <a:pt x="14680" y="7881"/>
-                  <a:pt x="14680" y="8465"/>
-                  <a:pt x="14292" y="9049"/>
-                </a:cubicBezTo>
-                <a:cubicBezTo>
-                  <a:pt x="20500" y="9049"/>
-                  <a:pt x="20500" y="9049"/>
-                  <a:pt x="20500" y="9049"/>
-                </a:cubicBezTo>
-                <a:cubicBezTo>
-                  <a:pt x="21018" y="9049"/>
-                  <a:pt x="21535" y="8465"/>
-                  <a:pt x="21535" y="7881"/>
-                </a:cubicBezTo>
-                <a:cubicBezTo>
-                  <a:pt x="21535" y="1314"/>
-                  <a:pt x="21535" y="1314"/>
-                  <a:pt x="21535" y="1314"/>
-                </a:cubicBezTo>
-                <a:cubicBezTo>
-                  <a:pt x="21535" y="584"/>
-                  <a:pt x="21018" y="0"/>
-                  <a:pt x="20500" y="0"/>
-                </a:cubicBezTo>
-                <a:close/>
-                <a:moveTo>
-                  <a:pt x="6402" y="6714"/>
-                </a:moveTo>
-                <a:cubicBezTo>
-                  <a:pt x="7437" y="6714"/>
-                  <a:pt x="8213" y="5692"/>
-                  <a:pt x="8213" y="4524"/>
-                </a:cubicBezTo>
-                <a:cubicBezTo>
-                  <a:pt x="8213" y="3357"/>
-                  <a:pt x="7437" y="2481"/>
-                  <a:pt x="6402" y="2481"/>
-                </a:cubicBezTo>
-                <a:cubicBezTo>
-                  <a:pt x="5367" y="2481"/>
-                  <a:pt x="4462" y="3357"/>
-                  <a:pt x="4462" y="4524"/>
-                </a:cubicBezTo>
-                <a:cubicBezTo>
-                  <a:pt x="4462" y="5692"/>
-                  <a:pt x="5367" y="6714"/>
-                  <a:pt x="6402" y="6714"/>
-                </a:cubicBezTo>
-                <a:close/>
-                <a:moveTo>
-                  <a:pt x="6661" y="20724"/>
-                </a:moveTo>
-                <a:cubicBezTo>
-                  <a:pt x="6661" y="21308"/>
-                  <a:pt x="7049" y="21600"/>
-                  <a:pt x="7437" y="21600"/>
-                </a:cubicBezTo>
-                <a:cubicBezTo>
-                  <a:pt x="7954" y="21600"/>
-                  <a:pt x="8213" y="21308"/>
-                  <a:pt x="8213" y="20724"/>
-                </a:cubicBezTo>
-                <a:cubicBezTo>
-                  <a:pt x="8213" y="15616"/>
-                  <a:pt x="8213" y="15616"/>
-                  <a:pt x="8213" y="15616"/>
-                </a:cubicBezTo>
-                <a:cubicBezTo>
-                  <a:pt x="6661" y="15616"/>
-                  <a:pt x="6661" y="15616"/>
-                  <a:pt x="6661" y="15616"/>
-                </a:cubicBezTo>
-                <a:lnTo>
-                  <a:pt x="6661" y="20724"/>
-                </a:lnTo>
-                <a:close/>
-                <a:moveTo>
-                  <a:pt x="4462" y="20724"/>
-                </a:moveTo>
-                <a:cubicBezTo>
-                  <a:pt x="4462" y="21308"/>
-                  <a:pt x="4850" y="21600"/>
-                  <a:pt x="5367" y="21600"/>
-                </a:cubicBezTo>
-                <a:cubicBezTo>
-                  <a:pt x="5755" y="21600"/>
-                  <a:pt x="6143" y="21308"/>
-                  <a:pt x="6143" y="20724"/>
-                </a:cubicBezTo>
-                <a:cubicBezTo>
-                  <a:pt x="6143" y="15616"/>
-                  <a:pt x="6143" y="15616"/>
-                  <a:pt x="6143" y="15616"/>
-                </a:cubicBezTo>
-                <a:cubicBezTo>
-                  <a:pt x="4462" y="15616"/>
-                  <a:pt x="4462" y="15616"/>
-                  <a:pt x="4462" y="15616"/>
-                </a:cubicBezTo>
-                <a:lnTo>
-                  <a:pt x="4462" y="20724"/>
-                </a:lnTo>
-                <a:close/>
-                <a:moveTo>
-                  <a:pt x="14551" y="4086"/>
-                </a:moveTo>
-                <a:cubicBezTo>
-                  <a:pt x="14033" y="3941"/>
-                  <a:pt x="14033" y="3941"/>
-                  <a:pt x="14033" y="3941"/>
-                </a:cubicBezTo>
-                <a:cubicBezTo>
-                  <a:pt x="13257" y="7297"/>
-                  <a:pt x="13257" y="7297"/>
-                  <a:pt x="13257" y="7297"/>
-                </a:cubicBezTo>
-                <a:cubicBezTo>
-                  <a:pt x="12998" y="7297"/>
-                  <a:pt x="12740" y="7297"/>
-                  <a:pt x="12481" y="7589"/>
-                </a:cubicBezTo>
-                <a:cubicBezTo>
-                  <a:pt x="10670" y="9632"/>
-                  <a:pt x="10670" y="9632"/>
-                  <a:pt x="10670" y="9632"/>
-                </a:cubicBezTo>
-                <a:cubicBezTo>
-                  <a:pt x="8730" y="7443"/>
-                  <a:pt x="8730" y="7443"/>
-                  <a:pt x="8730" y="7443"/>
-                </a:cubicBezTo>
-                <a:cubicBezTo>
-                  <a:pt x="8601" y="7297"/>
-                  <a:pt x="7825" y="7297"/>
-                  <a:pt x="7695" y="7297"/>
-                </a:cubicBezTo>
-                <a:cubicBezTo>
-                  <a:pt x="7695" y="7297"/>
-                  <a:pt x="7695" y="7297"/>
-                  <a:pt x="7695" y="7297"/>
-                </a:cubicBezTo>
-                <a:cubicBezTo>
-                  <a:pt x="6402" y="8465"/>
-                  <a:pt x="6402" y="8465"/>
-                  <a:pt x="6402" y="8465"/>
-                </a:cubicBezTo>
-                <a:cubicBezTo>
-                  <a:pt x="5109" y="7297"/>
-                  <a:pt x="5109" y="7297"/>
-                  <a:pt x="5109" y="7297"/>
-                </a:cubicBezTo>
-                <a:cubicBezTo>
-                  <a:pt x="5109" y="7297"/>
-                  <a:pt x="5109" y="7297"/>
-                  <a:pt x="5109" y="7297"/>
-                </a:cubicBezTo>
-                <a:cubicBezTo>
-                  <a:pt x="4979" y="7297"/>
-                  <a:pt x="4203" y="7297"/>
-                  <a:pt x="3945" y="7589"/>
-                </a:cubicBezTo>
-                <a:cubicBezTo>
-                  <a:pt x="194" y="11822"/>
-                  <a:pt x="194" y="11822"/>
-                  <a:pt x="194" y="11822"/>
-                </a:cubicBezTo>
-                <a:cubicBezTo>
-                  <a:pt x="-65" y="12114"/>
-                  <a:pt x="-65" y="12697"/>
-                  <a:pt x="194" y="12989"/>
-                </a:cubicBezTo>
-                <a:cubicBezTo>
-                  <a:pt x="582" y="13427"/>
-                  <a:pt x="970" y="13427"/>
-                  <a:pt x="1358" y="12989"/>
-                </a:cubicBezTo>
-                <a:cubicBezTo>
-                  <a:pt x="3945" y="10070"/>
-                  <a:pt x="3945" y="10070"/>
-                  <a:pt x="3945" y="10070"/>
-                </a:cubicBezTo>
-                <a:cubicBezTo>
-                  <a:pt x="3945" y="15032"/>
-                  <a:pt x="3945" y="15032"/>
-                  <a:pt x="3945" y="15032"/>
-                </a:cubicBezTo>
-                <a:cubicBezTo>
-                  <a:pt x="8730" y="15032"/>
-                  <a:pt x="8730" y="15032"/>
-                  <a:pt x="8730" y="15032"/>
-                </a:cubicBezTo>
-                <a:cubicBezTo>
-                  <a:pt x="8730" y="10070"/>
-                  <a:pt x="8730" y="10070"/>
-                  <a:pt x="8730" y="10070"/>
-                </a:cubicBezTo>
-                <a:cubicBezTo>
-                  <a:pt x="9765" y="11238"/>
-                  <a:pt x="9765" y="11238"/>
-                  <a:pt x="9765" y="11238"/>
-                </a:cubicBezTo>
-                <a:cubicBezTo>
-                  <a:pt x="10024" y="11384"/>
-                  <a:pt x="11188" y="11530"/>
-                  <a:pt x="11446" y="11238"/>
-                </a:cubicBezTo>
-                <a:cubicBezTo>
-                  <a:pt x="13645" y="8757"/>
-                  <a:pt x="13645" y="8757"/>
-                  <a:pt x="13645" y="8757"/>
-                </a:cubicBezTo>
-                <a:cubicBezTo>
-                  <a:pt x="13904" y="8465"/>
-                  <a:pt x="13904" y="8027"/>
-                  <a:pt x="13645" y="7735"/>
-                </a:cubicBezTo>
-                <a:lnTo>
-                  <a:pt x="14551" y="4086"/>
-                </a:lnTo>
-                <a:close/>
-                <a:moveTo>
-                  <a:pt x="6402" y="13573"/>
-                </a:moveTo>
-                <a:cubicBezTo>
-                  <a:pt x="5626" y="12405"/>
-                  <a:pt x="5626" y="12405"/>
-                  <a:pt x="5626" y="12405"/>
-                </a:cubicBezTo>
-                <a:cubicBezTo>
-                  <a:pt x="6402" y="8757"/>
-                  <a:pt x="6402" y="8757"/>
-                  <a:pt x="6402" y="8757"/>
-                </a:cubicBezTo>
-                <a:cubicBezTo>
-                  <a:pt x="7178" y="12405"/>
-                  <a:pt x="7178" y="12405"/>
-                  <a:pt x="7178" y="12405"/>
-                </a:cubicBezTo>
-                <a:lnTo>
-                  <a:pt x="6402" y="13573"/>
-                </a:lnTo>
-                <a:close/>
-              </a:path>
-            </a:pathLst>
-          </a:custGeom>
-          <a:solidFill>
-            <a:srgbClr val="0070C0"/>
-          </a:solidFill>
-          <a:ln w="12700" cap="flat">
-            <a:noFill/>
-            <a:miter lim="400000"/>
-          </a:ln>
-          <a:effectLst/>
-        </p:spPr>
-        <p:txBody>
-          <a:bodyPr wrap="square" lIns="91439" tIns="91439" rIns="91439" bIns="91439" numCol="1" anchor="t">
-            <a:noAutofit/>
-          </a:bodyPr>
-          <a:lstStyle/>
-          <a:p>
-            <a:endParaRPr sz="1600"/>
-          </a:p>
-        </p:txBody>
-      </p:sp>
       <p:sp>
         <p:nvSpPr>
           <p:cNvPr id="2" name="文本框 1"/>
@@ -31477,8 +35165,8 @@
         </p:nvSpPr>
         <p:spPr>
           <a:xfrm>
-            <a:off x="3515159" y="5220746"/>
-            <a:ext cx="1822222" cy="398780"/>
+            <a:off x="229235" y="1685925"/>
+            <a:ext cx="11275060" cy="2861310"/>
           </a:xfrm>
           <a:prstGeom prst="rect">
             <a:avLst/>
@@ -31489,121 +35177,114 @@
           <a:bodyPr wrap="square" rtlCol="0">
             <a:spAutoFit/>
           </a:bodyPr>
-          <a:lstStyle/>
           <a:p>
+            <a:pPr marL="285750" indent="-285750" fontAlgn="auto">
+              <a:lnSpc>
+                <a:spcPct val="150000"/>
+              </a:lnSpc>
+              <a:buFont typeface="Wingdings" panose="05000000000000000000" charset="0"/>
+              <a:buChar char=""/>
+            </a:pPr>
             <a:r>
-              <a:rPr lang="zh-CN" altLang="en-US" sz="2000" b="1" dirty="0">
-                <a:solidFill>
-                  <a:srgbClr val="0070C0"/>
-                </a:solidFill>
-                <a:latin typeface="华文楷体" panose="02010600040101010101" charset="-122"/>
-                <a:ea typeface="华文楷体" panose="02010600040101010101" charset="-122"/>
-              </a:rPr>
-              <a:t>答辩人：黄渊</a:t>
+              <a:rPr lang="zh-CN" altLang="en-US" sz="2400"/>
+              <a:t>完成对软件侧代码的测试</a:t>
             </a:r>
-            <a:endParaRPr lang="zh-CN" altLang="en-US" sz="2000" b="1" dirty="0">
-              <a:solidFill>
-                <a:srgbClr val="0070C0"/>
-              </a:solidFill>
-              <a:latin typeface="华文楷体" panose="02010600040101010101" charset="-122"/>
-              <a:ea typeface="华文楷体" panose="02010600040101010101" charset="-122"/>
-            </a:endParaRPr>
+            <a:r>
+              <a:rPr lang="en-US" altLang="zh-CN" sz="2400"/>
+              <a:t>，</a:t>
+            </a:r>
+            <a:r>
+              <a:rPr lang="zh-CN" altLang="en-US" sz="2400"/>
+              <a:t>确保真实例子能够生成自己所需的产物</a:t>
+            </a:r>
+            <a:endParaRPr lang="zh-CN" altLang="en-US" sz="2400"/>
+          </a:p>
+          <a:p>
+            <a:pPr marL="285750" indent="-285750" fontAlgn="auto">
+              <a:lnSpc>
+                <a:spcPct val="150000"/>
+              </a:lnSpc>
+              <a:buFont typeface="Wingdings" panose="05000000000000000000" charset="0"/>
+              <a:buChar char=""/>
+            </a:pPr>
+            <a:r>
+              <a:rPr lang="zh-CN" altLang="en-US" sz="2400"/>
+              <a:t>细化硬件侧架构的设计</a:t>
+            </a:r>
+            <a:r>
+              <a:rPr lang="en-US" altLang="zh-CN" sz="2400"/>
+              <a:t>，</a:t>
+            </a:r>
+            <a:r>
+              <a:rPr lang="zh-CN" altLang="en-US" sz="2400"/>
+              <a:t>继续完成全局控制单元和硬件调度的代码</a:t>
+            </a:r>
+            <a:endParaRPr lang="zh-CN" altLang="en-US" sz="2400"/>
+          </a:p>
+          <a:p>
+            <a:pPr marL="285750" indent="-285750" fontAlgn="auto">
+              <a:lnSpc>
+                <a:spcPct val="150000"/>
+              </a:lnSpc>
+              <a:buFont typeface="Wingdings" panose="05000000000000000000" charset="0"/>
+              <a:buChar char=""/>
+            </a:pPr>
+            <a:r>
+              <a:rPr lang="zh-CN" altLang="en-US" sz="2400"/>
+              <a:t>完成其余模块与张量计算单元的适配</a:t>
+            </a:r>
+            <a:r>
+              <a:rPr lang="en-US" altLang="zh-CN" sz="2400"/>
+              <a:t>，</a:t>
+            </a:r>
+            <a:r>
+              <a:rPr lang="zh-CN" altLang="en-US" sz="2400"/>
+              <a:t>搭建完整的硬件架构</a:t>
+            </a:r>
+            <a:r>
+              <a:rPr lang="en-US" altLang="zh-CN" sz="2400"/>
+              <a:t>，</a:t>
+            </a:r>
+            <a:r>
+              <a:rPr lang="zh-CN" altLang="en-US" sz="2400"/>
+              <a:t>并进行时序仿真</a:t>
+            </a:r>
+            <a:endParaRPr lang="zh-CN" altLang="en-US" sz="2400"/>
+          </a:p>
+          <a:p>
+            <a:pPr marL="285750" indent="-285750" fontAlgn="auto">
+              <a:lnSpc>
+                <a:spcPct val="150000"/>
+              </a:lnSpc>
+              <a:buFont typeface="Wingdings" panose="05000000000000000000" charset="0"/>
+              <a:buChar char=""/>
+            </a:pPr>
+            <a:r>
+              <a:rPr lang="zh-CN" altLang="en-US" sz="2400"/>
+              <a:t>完成软硬件之间的交互协同</a:t>
+            </a:r>
+            <a:endParaRPr lang="zh-CN" altLang="en-US" sz="2400"/>
+          </a:p>
+          <a:p>
+            <a:pPr marL="285750" indent="-285750" fontAlgn="auto">
+              <a:lnSpc>
+                <a:spcPct val="150000"/>
+              </a:lnSpc>
+              <a:buFont typeface="Wingdings" panose="05000000000000000000" charset="0"/>
+              <a:buChar char=""/>
+            </a:pPr>
+            <a:r>
+              <a:rPr lang="zh-CN" altLang="en-US" sz="2400"/>
+              <a:t>继续完成论文的剩余部分</a:t>
+            </a:r>
+            <a:endParaRPr lang="zh-CN" altLang="en-US" sz="2400"/>
           </a:p>
         </p:txBody>
       </p:sp>
-      <p:sp>
-        <p:nvSpPr>
-          <p:cNvPr id="19" name="文本框 18"/>
-          <p:cNvSpPr txBox="1"/>
-          <p:nvPr/>
-        </p:nvSpPr>
-        <p:spPr>
-          <a:xfrm>
-            <a:off x="7724140" y="5181600"/>
-            <a:ext cx="3275330" cy="398780"/>
-          </a:xfrm>
-          <a:prstGeom prst="rect">
-            <a:avLst/>
-          </a:prstGeom>
-          <a:noFill/>
-        </p:spPr>
-        <p:txBody>
-          <a:bodyPr wrap="square" rtlCol="0">
-            <a:spAutoFit/>
-          </a:bodyPr>
-          <a:lstStyle/>
-          <a:p>
-            <a:r>
-              <a:rPr lang="zh-CN" altLang="en-US" sz="2000" b="1" dirty="0">
-                <a:solidFill>
-                  <a:srgbClr val="0070C0"/>
-                </a:solidFill>
-                <a:latin typeface="华文楷体" panose="02010600040101010101" charset="-122"/>
-                <a:ea typeface="华文楷体" panose="02010600040101010101" charset="-122"/>
-              </a:rPr>
-              <a:t>指导教师：冯晓琴</a:t>
-            </a:r>
-            <a:r>
-              <a:rPr lang="en-US" altLang="zh-CN" sz="2000" b="1" dirty="0">
-                <a:solidFill>
-                  <a:srgbClr val="0070C0"/>
-                </a:solidFill>
-                <a:latin typeface="华文楷体" panose="02010600040101010101" charset="-122"/>
-                <a:ea typeface="华文楷体" panose="02010600040101010101" charset="-122"/>
-              </a:rPr>
-              <a:t>   </a:t>
-            </a:r>
-            <a:r>
-              <a:rPr lang="zh-CN" altLang="en-US" sz="2000" b="1" dirty="0">
-                <a:solidFill>
-                  <a:srgbClr val="0070C0"/>
-                </a:solidFill>
-                <a:latin typeface="华文楷体" panose="02010600040101010101" charset="-122"/>
-                <a:ea typeface="华文楷体" panose="02010600040101010101" charset="-122"/>
-              </a:rPr>
-              <a:t>何安平</a:t>
-            </a:r>
-            <a:endParaRPr lang="zh-CN" altLang="en-US" sz="2000" b="1" dirty="0">
-              <a:solidFill>
-                <a:srgbClr val="0070C0"/>
-              </a:solidFill>
-              <a:latin typeface="华文楷体" panose="02010600040101010101" charset="-122"/>
-              <a:ea typeface="华文楷体" panose="02010600040101010101" charset="-122"/>
-            </a:endParaRPr>
-          </a:p>
-        </p:txBody>
-      </p:sp>
-      <p:pic>
-        <p:nvPicPr>
-          <p:cNvPr id="11" name="图片 10"/>
-          <p:cNvPicPr>
-            <a:picLocks noChangeAspect="1"/>
-          </p:cNvPicPr>
-          <p:nvPr/>
-        </p:nvPicPr>
-        <p:blipFill>
-          <a:blip r:embed="rId2" cstate="print">
-            <a:extLst>
-              <a:ext uri="{28A0092B-C50C-407E-A947-70E740481C1C}">
-                <a14:useLocalDpi xmlns:a14="http://schemas.microsoft.com/office/drawing/2010/main" val="0"/>
-              </a:ext>
-            </a:extLst>
-          </a:blip>
-          <a:stretch>
-            <a:fillRect/>
-          </a:stretch>
-        </p:blipFill>
-        <p:spPr>
-          <a:xfrm>
-            <a:off x="211455" y="5698703"/>
-            <a:ext cx="967527" cy="967527"/>
-          </a:xfrm>
-          <a:prstGeom prst="rect">
-            <a:avLst/>
-          </a:prstGeom>
-        </p:spPr>
-      </p:pic>
     </p:spTree>
+    <p:custDataLst>
+      <p:tags r:id="rId1"/>
+    </p:custDataLst>
   </p:cSld>
   <p:clrMapOvr>
     <a:masterClrMapping/>
@@ -31921,9 +35602,9 @@
                 <a:effectLst/>
                 <a:uLnTx/>
                 <a:uFillTx/>
-                <a:latin typeface="Times New Roman" panose="02020603050405020304" pitchFamily="18" charset="0"/>
+                <a:latin typeface="Times New Roman" panose="02020503050405090304" pitchFamily="18" charset="0"/>
                 <a:ea typeface="Mongolian Baiti" panose="03000500000000000000" charset="0"/>
-                <a:cs typeface="Times New Roman" panose="02020603050405020304" pitchFamily="18" charset="0"/>
+                <a:cs typeface="Times New Roman" panose="02020503050405090304" pitchFamily="18" charset="0"/>
               </a:rPr>
               <a:t>Contents</a:t>
             </a:r>
@@ -31937,9 +35618,9 @@
               <a:effectLst/>
               <a:uLnTx/>
               <a:uFillTx/>
-              <a:latin typeface="Times New Roman" panose="02020603050405020304" pitchFamily="18" charset="0"/>
+              <a:latin typeface="Times New Roman" panose="02020503050405090304" pitchFamily="18" charset="0"/>
               <a:ea typeface="Mongolian Baiti" panose="03000500000000000000" charset="0"/>
-              <a:cs typeface="Times New Roman" panose="02020603050405020304" pitchFamily="18" charset="0"/>
+              <a:cs typeface="Times New Roman" panose="02020503050405090304" pitchFamily="18" charset="0"/>
             </a:endParaRPr>
           </a:p>
         </p:txBody>
@@ -32447,8 +36128,8 @@
                 <a:effectLst/>
                 <a:uLnTx/>
                 <a:uFillTx/>
-                <a:latin typeface="Arial" panose="020B0604020202020204" pitchFamily="34" charset="0"/>
-                <a:ea typeface="Arial" panose="020B0604020202020204" pitchFamily="34" charset="0"/>
+                <a:latin typeface="Arial" panose="020B0604020202090204" pitchFamily="34" charset="0"/>
+                <a:ea typeface="Arial" panose="020B0604020202090204" pitchFamily="34" charset="0"/>
                 <a:cs typeface="+mn-cs"/>
               </a:endParaRPr>
             </a:p>
@@ -32507,8 +36188,8 @@
                   <a:effectLst/>
                   <a:uLnTx/>
                   <a:uFillTx/>
-                  <a:latin typeface="Arial" panose="020B0604020202020204" pitchFamily="34" charset="0"/>
-                  <a:ea typeface="Arial" panose="020B0604020202020204" pitchFamily="34" charset="0"/>
+                  <a:latin typeface="Arial" panose="020B0604020202090204" pitchFamily="34" charset="0"/>
+                  <a:ea typeface="Arial" panose="020B0604020202090204" pitchFamily="34" charset="0"/>
                   <a:cs typeface="+mn-cs"/>
                 </a:rPr>
                 <a:t>02</a:t>
@@ -32523,8 +36204,8 @@
                 <a:effectLst/>
                 <a:uLnTx/>
                 <a:uFillTx/>
-                <a:latin typeface="Arial" panose="020B0604020202020204" pitchFamily="34" charset="0"/>
-                <a:ea typeface="Arial" panose="020B0604020202020204" pitchFamily="34" charset="0"/>
+                <a:latin typeface="Arial" panose="020B0604020202090204" pitchFamily="34" charset="0"/>
+                <a:ea typeface="Arial" panose="020B0604020202090204" pitchFamily="34" charset="0"/>
                 <a:cs typeface="+mn-cs"/>
               </a:endParaRPr>
             </a:p>
@@ -32715,8 +36396,8 @@
                 <a:effectLst/>
                 <a:uLnTx/>
                 <a:uFillTx/>
-                <a:latin typeface="Arial" panose="020B0604020202020204" pitchFamily="34" charset="0"/>
-                <a:ea typeface="Arial" panose="020B0604020202020204" pitchFamily="34" charset="0"/>
+                <a:latin typeface="Arial" panose="020B0604020202090204" pitchFamily="34" charset="0"/>
+                <a:ea typeface="Arial" panose="020B0604020202090204" pitchFamily="34" charset="0"/>
                 <a:cs typeface="+mn-cs"/>
               </a:rPr>
               <a:t>0</a:t>
@@ -32731,8 +36412,8 @@
               <a:effectLst/>
               <a:uLnTx/>
               <a:uFillTx/>
-              <a:latin typeface="Arial" panose="020B0604020202020204" pitchFamily="34" charset="0"/>
-              <a:ea typeface="Arial" panose="020B0604020202020204" pitchFamily="34" charset="0"/>
+              <a:latin typeface="Arial" panose="020B0604020202090204" pitchFamily="34" charset="0"/>
+              <a:ea typeface="Arial" panose="020B0604020202090204" pitchFamily="34" charset="0"/>
               <a:cs typeface="+mn-cs"/>
             </a:endParaRPr>
           </a:p>
@@ -34456,8 +38137,8 @@
                 <a:effectLst/>
                 <a:uLnTx/>
                 <a:uFillTx/>
-                <a:latin typeface="Arial" panose="020B0604020202020204" pitchFamily="34" charset="0"/>
-                <a:ea typeface="Arial" panose="020B0604020202020204" pitchFamily="34" charset="0"/>
+                <a:latin typeface="Arial" panose="020B0604020202090204" pitchFamily="34" charset="0"/>
+                <a:ea typeface="Arial" panose="020B0604020202090204" pitchFamily="34" charset="0"/>
                 <a:cs typeface="+mn-cs"/>
               </a:endParaRPr>
             </a:p>
@@ -34516,8 +38197,8 @@
                   <a:effectLst/>
                   <a:uLnTx/>
                   <a:uFillTx/>
-                  <a:latin typeface="Arial" panose="020B0604020202020204" pitchFamily="34" charset="0"/>
-                  <a:ea typeface="Arial" panose="020B0604020202020204" pitchFamily="34" charset="0"/>
+                  <a:latin typeface="Arial" panose="020B0604020202090204" pitchFamily="34" charset="0"/>
+                  <a:ea typeface="Arial" panose="020B0604020202090204" pitchFamily="34" charset="0"/>
                   <a:cs typeface="+mn-cs"/>
                 </a:rPr>
                 <a:t>01</a:t>
@@ -34532,8 +38213,8 @@
                 <a:effectLst/>
                 <a:uLnTx/>
                 <a:uFillTx/>
-                <a:latin typeface="Arial" panose="020B0604020202020204" pitchFamily="34" charset="0"/>
-                <a:ea typeface="Arial" panose="020B0604020202020204" pitchFamily="34" charset="0"/>
+                <a:latin typeface="Arial" panose="020B0604020202090204" pitchFamily="34" charset="0"/>
+                <a:ea typeface="Arial" panose="020B0604020202090204" pitchFamily="34" charset="0"/>
                 <a:cs typeface="+mn-cs"/>
               </a:endParaRPr>
             </a:p>
@@ -34638,8 +38319,8 @@
                 <a:effectLst/>
                 <a:uLnTx/>
                 <a:uFillTx/>
-                <a:latin typeface="Arial" panose="020B0604020202020204" pitchFamily="34" charset="0"/>
-                <a:ea typeface="Arial" panose="020B0604020202020204" pitchFamily="34" charset="0"/>
+                <a:latin typeface="Arial" panose="020B0604020202090204" pitchFamily="34" charset="0"/>
+                <a:ea typeface="Arial" panose="020B0604020202090204" pitchFamily="34" charset="0"/>
                 <a:cs typeface="+mn-cs"/>
               </a:endParaRPr>
             </a:p>
@@ -34698,8 +38379,8 @@
                   <a:effectLst/>
                   <a:uLnTx/>
                   <a:uFillTx/>
-                  <a:latin typeface="Arial" panose="020B0604020202020204" pitchFamily="34" charset="0"/>
-                  <a:ea typeface="Arial" panose="020B0604020202020204" pitchFamily="34" charset="0"/>
+                  <a:latin typeface="Arial" panose="020B0604020202090204" pitchFamily="34" charset="0"/>
+                  <a:ea typeface="Arial" panose="020B0604020202090204" pitchFamily="34" charset="0"/>
                   <a:cs typeface="+mn-cs"/>
                 </a:rPr>
                 <a:t>04</a:t>
@@ -34714,8 +38395,8 @@
                 <a:effectLst/>
                 <a:uLnTx/>
                 <a:uFillTx/>
-                <a:latin typeface="Arial" panose="020B0604020202020204" pitchFamily="34" charset="0"/>
-                <a:ea typeface="Arial" panose="020B0604020202020204" pitchFamily="34" charset="0"/>
+                <a:latin typeface="Arial" panose="020B0604020202090204" pitchFamily="34" charset="0"/>
+                <a:ea typeface="Arial" panose="020B0604020202090204" pitchFamily="34" charset="0"/>
                 <a:cs typeface="+mn-cs"/>
               </a:endParaRPr>
             </a:p>
@@ -34820,8 +38501,8 @@
                 <a:effectLst/>
                 <a:uLnTx/>
                 <a:uFillTx/>
-                <a:latin typeface="Arial" panose="020B0604020202020204" pitchFamily="34" charset="0"/>
-                <a:ea typeface="Arial" panose="020B0604020202020204" pitchFamily="34" charset="0"/>
+                <a:latin typeface="Arial" panose="020B0604020202090204" pitchFamily="34" charset="0"/>
+                <a:ea typeface="Arial" panose="020B0604020202090204" pitchFamily="34" charset="0"/>
                 <a:cs typeface="+mn-cs"/>
               </a:endParaRPr>
             </a:p>
@@ -34880,8 +38561,8 @@
                   <a:effectLst/>
                   <a:uLnTx/>
                   <a:uFillTx/>
-                  <a:latin typeface="Arial" panose="020B0604020202020204" pitchFamily="34" charset="0"/>
-                  <a:ea typeface="Arial" panose="020B0604020202020204" pitchFamily="34" charset="0"/>
+                  <a:latin typeface="Arial" panose="020B0604020202090204" pitchFamily="34" charset="0"/>
+                  <a:ea typeface="Arial" panose="020B0604020202090204" pitchFamily="34" charset="0"/>
                   <a:cs typeface="+mn-cs"/>
                 </a:rPr>
                 <a:t>03</a:t>
@@ -34896,8 +38577,8 @@
                 <a:effectLst/>
                 <a:uLnTx/>
                 <a:uFillTx/>
-                <a:latin typeface="Arial" panose="020B0604020202020204" pitchFamily="34" charset="0"/>
-                <a:ea typeface="Arial" panose="020B0604020202020204" pitchFamily="34" charset="0"/>
+                <a:latin typeface="Arial" panose="020B0604020202090204" pitchFamily="34" charset="0"/>
+                <a:ea typeface="Arial" panose="020B0604020202090204" pitchFamily="34" charset="0"/>
                 <a:cs typeface="+mn-cs"/>
               </a:endParaRPr>
             </a:p>
@@ -34925,6 +38606,1036 @@
           </a:p>
         </p:txBody>
       </p:sp>
+    </p:spTree>
+  </p:cSld>
+  <p:clrMapOvr>
+    <a:masterClrMapping/>
+  </p:clrMapOvr>
+</p:sld>
+</file>
+
+<file path=ppt/slides/slide20.xml><?xml version="1.0" encoding="utf-8"?>
+<p:sld xmlns:a="http://schemas.openxmlformats.org/drawingml/2006/main" xmlns:r="http://schemas.openxmlformats.org/officeDocument/2006/relationships" xmlns:p="http://schemas.openxmlformats.org/presentationml/2006/main">
+  <p:cSld>
+    <p:spTree>
+      <p:nvGrpSpPr>
+        <p:cNvPr id="1" name=""/>
+        <p:cNvGrpSpPr/>
+        <p:nvPr/>
+      </p:nvGrpSpPr>
+      <p:grpSpPr>
+        <a:xfrm>
+          <a:off x="0" y="0"/>
+          <a:ext cx="0" cy="0"/>
+          <a:chOff x="0" y="0"/>
+          <a:chExt cx="0" cy="0"/>
+        </a:xfrm>
+      </p:grpSpPr>
+      <p:sp>
+        <p:nvSpPr>
+          <p:cNvPr id="6" name="标题 5"/>
+          <p:cNvSpPr>
+            <a:spLocks noGrp="1"/>
+          </p:cNvSpPr>
+          <p:nvPr>
+            <p:ph type="ctrTitle"/>
+          </p:nvPr>
+        </p:nvSpPr>
+        <p:spPr>
+          <a:xfrm>
+            <a:off x="1871675" y="1269787"/>
+            <a:ext cx="7999578" cy="858203"/>
+          </a:xfrm>
+          <a:noFill/>
+        </p:spPr>
+        <p:txBody>
+          <a:bodyPr>
+            <a:noAutofit/>
+          </a:bodyPr>
+          <a:lstStyle/>
+          <a:p>
+            <a:r>
+              <a:rPr lang="zh-CN" altLang="en-US" sz="7200" dirty="0">
+                <a:solidFill>
+                  <a:schemeClr val="bg1">
+                    <a:lumMod val="85000"/>
+                  </a:schemeClr>
+                </a:solidFill>
+                <a:latin typeface="华文行楷" panose="02010800040101010101" pitchFamily="2" charset="-122"/>
+                <a:ea typeface="华文行楷" panose="02010800040101010101" pitchFamily="2" charset="-122"/>
+              </a:rPr>
+              <a:t>兰州大学</a:t>
+            </a:r>
+            <a:endParaRPr lang="zh-CN" altLang="en-US" sz="7200" dirty="0">
+              <a:solidFill>
+                <a:schemeClr val="bg1">
+                  <a:lumMod val="85000"/>
+                </a:schemeClr>
+              </a:solidFill>
+              <a:latin typeface="华文行楷" panose="02010800040101010101" pitchFamily="2" charset="-122"/>
+              <a:ea typeface="华文行楷" panose="02010800040101010101" pitchFamily="2" charset="-122"/>
+            </a:endParaRPr>
+          </a:p>
+        </p:txBody>
+      </p:sp>
+      <p:sp>
+        <p:nvSpPr>
+          <p:cNvPr id="7" name="副标题 6"/>
+          <p:cNvSpPr>
+            <a:spLocks noGrp="1"/>
+          </p:cNvSpPr>
+          <p:nvPr>
+            <p:ph type="subTitle" idx="1"/>
+          </p:nvPr>
+        </p:nvSpPr>
+        <p:spPr>
+          <a:xfrm>
+            <a:off x="1871980" y="3461385"/>
+            <a:ext cx="8284845" cy="745490"/>
+          </a:xfrm>
+        </p:spPr>
+        <p:txBody>
+          <a:bodyPr>
+            <a:noAutofit/>
+          </a:bodyPr>
+          <a:lstStyle/>
+          <a:p>
+            <a:pPr defTabSz="543560">
+              <a:lnSpc>
+                <a:spcPct val="100000"/>
+              </a:lnSpc>
+              <a:defRPr sz="5580"/>
+            </a:pPr>
+            <a:r>
+              <a:rPr lang="zh-CN" altLang="en-US" sz="4000" b="1" dirty="0">
+                <a:solidFill>
+                  <a:srgbClr val="0070C0"/>
+                </a:solidFill>
+                <a:latin typeface="华文楷体" panose="02010600040101010101" charset="-122"/>
+                <a:ea typeface="华文楷体" panose="02010600040101010101" charset="-122"/>
+              </a:rPr>
+              <a:t>请各位专家批评指正</a:t>
+            </a:r>
+            <a:endParaRPr lang="zh-CN" altLang="en-US" sz="4000" b="1" dirty="0">
+              <a:solidFill>
+                <a:srgbClr val="0070C0"/>
+              </a:solidFill>
+              <a:latin typeface="华文楷体" panose="02010600040101010101" charset="-122"/>
+              <a:ea typeface="华文楷体" panose="02010600040101010101" charset="-122"/>
+            </a:endParaRPr>
+          </a:p>
+        </p:txBody>
+      </p:sp>
+      <p:pic>
+        <p:nvPicPr>
+          <p:cNvPr id="5" name="图片 4"/>
+          <p:cNvPicPr>
+            <a:picLocks noChangeAspect="1"/>
+          </p:cNvPicPr>
+          <p:nvPr/>
+        </p:nvPicPr>
+        <p:blipFill>
+          <a:blip r:embed="rId1">
+            <a:extLst>
+              <a:ext uri="{28A0092B-C50C-407E-A947-70E740481C1C}">
+                <a14:useLocalDpi xmlns:a14="http://schemas.microsoft.com/office/drawing/2010/main" val="0"/>
+              </a:ext>
+            </a:extLst>
+          </a:blip>
+          <a:stretch>
+            <a:fillRect/>
+          </a:stretch>
+        </p:blipFill>
+        <p:spPr>
+          <a:xfrm>
+            <a:off x="11451590" y="5930900"/>
+            <a:ext cx="654050" cy="855345"/>
+          </a:xfrm>
+          <a:prstGeom prst="rect">
+            <a:avLst/>
+          </a:prstGeom>
+        </p:spPr>
+      </p:pic>
+      <p:sp>
+        <p:nvSpPr>
+          <p:cNvPr id="3" name="矩形 2"/>
+          <p:cNvSpPr/>
+          <p:nvPr/>
+        </p:nvSpPr>
+        <p:spPr>
+          <a:xfrm>
+            <a:off x="211455" y="191770"/>
+            <a:ext cx="1821180" cy="617220"/>
+          </a:xfrm>
+          <a:prstGeom prst="rect">
+            <a:avLst/>
+          </a:prstGeom>
+          <a:solidFill>
+            <a:srgbClr val="034779"/>
+          </a:solidFill>
+          <a:ln>
+            <a:solidFill>
+              <a:srgbClr val="034779"/>
+            </a:solidFill>
+          </a:ln>
+        </p:spPr>
+        <p:style>
+          <a:lnRef idx="2">
+            <a:schemeClr val="accent1">
+              <a:shade val="50000"/>
+            </a:schemeClr>
+          </a:lnRef>
+          <a:fillRef idx="1">
+            <a:schemeClr val="accent1"/>
+          </a:fillRef>
+          <a:effectRef idx="0">
+            <a:schemeClr val="accent1"/>
+          </a:effectRef>
+          <a:fontRef idx="minor">
+            <a:schemeClr val="lt1"/>
+          </a:fontRef>
+        </p:style>
+        <p:txBody>
+          <a:bodyPr rtlCol="0" anchor="ctr"/>
+          <a:lstStyle/>
+          <a:p>
+            <a:pPr algn="ctr"/>
+            <a:endParaRPr lang="zh-CN" altLang="en-US"/>
+          </a:p>
+        </p:txBody>
+      </p:sp>
+      <p:sp>
+        <p:nvSpPr>
+          <p:cNvPr id="4" name="矩形 3"/>
+          <p:cNvSpPr/>
+          <p:nvPr/>
+        </p:nvSpPr>
+        <p:spPr>
+          <a:xfrm>
+            <a:off x="9266555" y="302895"/>
+            <a:ext cx="2559685" cy="262890"/>
+          </a:xfrm>
+          <a:prstGeom prst="rect">
+            <a:avLst/>
+          </a:prstGeom>
+          <a:solidFill>
+            <a:srgbClr val="034779"/>
+          </a:solidFill>
+          <a:ln>
+            <a:solidFill>
+              <a:srgbClr val="034779"/>
+            </a:solidFill>
+          </a:ln>
+        </p:spPr>
+        <p:style>
+          <a:lnRef idx="2">
+            <a:schemeClr val="accent1">
+              <a:shade val="50000"/>
+            </a:schemeClr>
+          </a:lnRef>
+          <a:fillRef idx="1">
+            <a:schemeClr val="accent1"/>
+          </a:fillRef>
+          <a:effectRef idx="0">
+            <a:schemeClr val="accent1"/>
+          </a:effectRef>
+          <a:fontRef idx="minor">
+            <a:schemeClr val="lt1"/>
+          </a:fontRef>
+        </p:style>
+        <p:txBody>
+          <a:bodyPr rtlCol="0" anchor="ctr"/>
+          <a:lstStyle/>
+          <a:p>
+            <a:pPr algn="ctr"/>
+            <a:endParaRPr lang="zh-CN" altLang="en-US"/>
+          </a:p>
+        </p:txBody>
+      </p:sp>
+      <p:sp>
+        <p:nvSpPr>
+          <p:cNvPr id="14" name="Freeform 90"/>
+          <p:cNvSpPr/>
+          <p:nvPr/>
+        </p:nvSpPr>
+        <p:spPr>
+          <a:xfrm>
+            <a:off x="3044735" y="5187854"/>
+            <a:ext cx="297818" cy="400359"/>
+          </a:xfrm>
+          <a:custGeom>
+            <a:avLst/>
+            <a:gdLst/>
+            <a:ahLst/>
+            <a:cxnLst>
+              <a:cxn ang="0">
+                <a:pos x="wd2" y="hd2"/>
+              </a:cxn>
+              <a:cxn ang="5400000">
+                <a:pos x="wd2" y="hd2"/>
+              </a:cxn>
+              <a:cxn ang="10800000">
+                <a:pos x="wd2" y="hd2"/>
+              </a:cxn>
+              <a:cxn ang="16200000">
+                <a:pos x="wd2" y="hd2"/>
+              </a:cxn>
+            </a:cxnLst>
+            <a:rect l="0" t="0" r="r" b="b"/>
+            <a:pathLst>
+              <a:path w="21133" h="21600" extrusionOk="0">
+                <a:moveTo>
+                  <a:pt x="10533" y="8436"/>
+                </a:moveTo>
+                <a:cubicBezTo>
+                  <a:pt x="12978" y="8436"/>
+                  <a:pt x="15016" y="6518"/>
+                  <a:pt x="15016" y="4218"/>
+                </a:cubicBezTo>
+                <a:cubicBezTo>
+                  <a:pt x="15016" y="1917"/>
+                  <a:pt x="12978" y="0"/>
+                  <a:pt x="10533" y="0"/>
+                </a:cubicBezTo>
+                <a:cubicBezTo>
+                  <a:pt x="8088" y="0"/>
+                  <a:pt x="6050" y="1917"/>
+                  <a:pt x="6050" y="4218"/>
+                </a:cubicBezTo>
+                <a:cubicBezTo>
+                  <a:pt x="6050" y="6518"/>
+                  <a:pt x="8088" y="8436"/>
+                  <a:pt x="10533" y="8436"/>
+                </a:cubicBezTo>
+                <a:close/>
+                <a:moveTo>
+                  <a:pt x="20993" y="14954"/>
+                </a:moveTo>
+                <a:cubicBezTo>
+                  <a:pt x="18005" y="10992"/>
+                  <a:pt x="18005" y="10992"/>
+                  <a:pt x="18005" y="10992"/>
+                </a:cubicBezTo>
+                <a:cubicBezTo>
+                  <a:pt x="17733" y="12398"/>
+                  <a:pt x="17326" y="13804"/>
+                  <a:pt x="16782" y="15209"/>
+                </a:cubicBezTo>
+                <a:cubicBezTo>
+                  <a:pt x="17190" y="15593"/>
+                  <a:pt x="17190" y="15593"/>
+                  <a:pt x="17190" y="15593"/>
+                </a:cubicBezTo>
+                <a:cubicBezTo>
+                  <a:pt x="14880" y="16615"/>
+                  <a:pt x="14880" y="16615"/>
+                  <a:pt x="14880" y="16615"/>
+                </a:cubicBezTo>
+                <a:cubicBezTo>
+                  <a:pt x="13929" y="16999"/>
+                  <a:pt x="13658" y="18149"/>
+                  <a:pt x="14201" y="18916"/>
+                </a:cubicBezTo>
+                <a:cubicBezTo>
+                  <a:pt x="14609" y="19683"/>
+                  <a:pt x="15831" y="19938"/>
+                  <a:pt x="16646" y="19555"/>
+                </a:cubicBezTo>
+                <a:cubicBezTo>
+                  <a:pt x="20178" y="18021"/>
+                  <a:pt x="20178" y="18021"/>
+                  <a:pt x="20178" y="18021"/>
+                </a:cubicBezTo>
+                <a:cubicBezTo>
+                  <a:pt x="20858" y="17766"/>
+                  <a:pt x="21401" y="15465"/>
+                  <a:pt x="20993" y="14954"/>
+                </a:cubicBezTo>
+                <a:close/>
+                <a:moveTo>
+                  <a:pt x="13250" y="19555"/>
+                </a:moveTo>
+                <a:cubicBezTo>
+                  <a:pt x="12163" y="19811"/>
+                  <a:pt x="11076" y="20194"/>
+                  <a:pt x="10669" y="20705"/>
+                </a:cubicBezTo>
+                <a:cubicBezTo>
+                  <a:pt x="10805" y="18277"/>
+                  <a:pt x="11076" y="15721"/>
+                  <a:pt x="11212" y="13164"/>
+                </a:cubicBezTo>
+                <a:cubicBezTo>
+                  <a:pt x="11484" y="12909"/>
+                  <a:pt x="12027" y="12781"/>
+                  <a:pt x="12435" y="12525"/>
+                </a:cubicBezTo>
+                <a:cubicBezTo>
+                  <a:pt x="12978" y="12398"/>
+                  <a:pt x="13386" y="12270"/>
+                  <a:pt x="13929" y="12142"/>
+                </a:cubicBezTo>
+                <a:cubicBezTo>
+                  <a:pt x="14337" y="11886"/>
+                  <a:pt x="14880" y="11759"/>
+                  <a:pt x="15288" y="11631"/>
+                </a:cubicBezTo>
+                <a:cubicBezTo>
+                  <a:pt x="16239" y="11247"/>
+                  <a:pt x="17054" y="10736"/>
+                  <a:pt x="17597" y="10353"/>
+                </a:cubicBezTo>
+                <a:cubicBezTo>
+                  <a:pt x="17461" y="10097"/>
+                  <a:pt x="17190" y="9841"/>
+                  <a:pt x="16918" y="9586"/>
+                </a:cubicBezTo>
+                <a:cubicBezTo>
+                  <a:pt x="16782" y="9458"/>
+                  <a:pt x="16782" y="9458"/>
+                  <a:pt x="16646" y="9458"/>
+                </a:cubicBezTo>
+                <a:cubicBezTo>
+                  <a:pt x="16239" y="9075"/>
+                  <a:pt x="15695" y="8947"/>
+                  <a:pt x="15016" y="8947"/>
+                </a:cubicBezTo>
+                <a:cubicBezTo>
+                  <a:pt x="13386" y="8947"/>
+                  <a:pt x="13386" y="8947"/>
+                  <a:pt x="13386" y="8947"/>
+                </a:cubicBezTo>
+                <a:cubicBezTo>
+                  <a:pt x="10533" y="10992"/>
+                  <a:pt x="10533" y="10992"/>
+                  <a:pt x="10533" y="10992"/>
+                </a:cubicBezTo>
+                <a:cubicBezTo>
+                  <a:pt x="7816" y="8947"/>
+                  <a:pt x="7816" y="8947"/>
+                  <a:pt x="7816" y="8947"/>
+                </a:cubicBezTo>
+                <a:cubicBezTo>
+                  <a:pt x="6186" y="8947"/>
+                  <a:pt x="6186" y="8947"/>
+                  <a:pt x="6186" y="8947"/>
+                </a:cubicBezTo>
+                <a:cubicBezTo>
+                  <a:pt x="5507" y="8947"/>
+                  <a:pt x="4963" y="9075"/>
+                  <a:pt x="4420" y="9458"/>
+                </a:cubicBezTo>
+                <a:cubicBezTo>
+                  <a:pt x="4420" y="9458"/>
+                  <a:pt x="4284" y="9458"/>
+                  <a:pt x="4284" y="9586"/>
+                </a:cubicBezTo>
+                <a:cubicBezTo>
+                  <a:pt x="4012" y="9841"/>
+                  <a:pt x="3741" y="10097"/>
+                  <a:pt x="3605" y="10353"/>
+                </a:cubicBezTo>
+                <a:cubicBezTo>
+                  <a:pt x="4148" y="10736"/>
+                  <a:pt x="4963" y="11247"/>
+                  <a:pt x="5914" y="11631"/>
+                </a:cubicBezTo>
+                <a:cubicBezTo>
+                  <a:pt x="6322" y="11759"/>
+                  <a:pt x="6865" y="11886"/>
+                  <a:pt x="7273" y="12142"/>
+                </a:cubicBezTo>
+                <a:cubicBezTo>
+                  <a:pt x="7816" y="12270"/>
+                  <a:pt x="8224" y="12398"/>
+                  <a:pt x="8631" y="12525"/>
+                </a:cubicBezTo>
+                <a:cubicBezTo>
+                  <a:pt x="9175" y="12781"/>
+                  <a:pt x="9582" y="12909"/>
+                  <a:pt x="9990" y="13164"/>
+                </a:cubicBezTo>
+                <a:cubicBezTo>
+                  <a:pt x="10126" y="15721"/>
+                  <a:pt x="10261" y="18277"/>
+                  <a:pt x="10397" y="20705"/>
+                </a:cubicBezTo>
+                <a:cubicBezTo>
+                  <a:pt x="9990" y="20194"/>
+                  <a:pt x="8903" y="19811"/>
+                  <a:pt x="7816" y="19427"/>
+                </a:cubicBezTo>
+                <a:cubicBezTo>
+                  <a:pt x="7273" y="20194"/>
+                  <a:pt x="6458" y="20578"/>
+                  <a:pt x="5643" y="20705"/>
+                </a:cubicBezTo>
+                <a:cubicBezTo>
+                  <a:pt x="6593" y="20961"/>
+                  <a:pt x="8495" y="21472"/>
+                  <a:pt x="10533" y="21600"/>
+                </a:cubicBezTo>
+                <a:cubicBezTo>
+                  <a:pt x="10669" y="21600"/>
+                  <a:pt x="10669" y="21600"/>
+                  <a:pt x="10669" y="21600"/>
+                </a:cubicBezTo>
+                <a:cubicBezTo>
+                  <a:pt x="10669" y="21600"/>
+                  <a:pt x="10669" y="21600"/>
+                  <a:pt x="10669" y="21600"/>
+                </a:cubicBezTo>
+                <a:cubicBezTo>
+                  <a:pt x="12707" y="21600"/>
+                  <a:pt x="14609" y="20961"/>
+                  <a:pt x="15559" y="20705"/>
+                </a:cubicBezTo>
+                <a:cubicBezTo>
+                  <a:pt x="14609" y="20705"/>
+                  <a:pt x="13793" y="20194"/>
+                  <a:pt x="13250" y="19555"/>
+                </a:cubicBezTo>
+                <a:close/>
+                <a:moveTo>
+                  <a:pt x="7001" y="18916"/>
+                </a:moveTo>
+                <a:cubicBezTo>
+                  <a:pt x="7409" y="18149"/>
+                  <a:pt x="7137" y="16999"/>
+                  <a:pt x="6322" y="16615"/>
+                </a:cubicBezTo>
+                <a:cubicBezTo>
+                  <a:pt x="3876" y="15593"/>
+                  <a:pt x="3876" y="15593"/>
+                  <a:pt x="3876" y="15593"/>
+                </a:cubicBezTo>
+                <a:cubicBezTo>
+                  <a:pt x="4284" y="15082"/>
+                  <a:pt x="4284" y="15082"/>
+                  <a:pt x="4284" y="15082"/>
+                </a:cubicBezTo>
+                <a:cubicBezTo>
+                  <a:pt x="3876" y="13804"/>
+                  <a:pt x="3469" y="12398"/>
+                  <a:pt x="3061" y="10992"/>
+                </a:cubicBezTo>
+                <a:cubicBezTo>
+                  <a:pt x="73" y="14954"/>
+                  <a:pt x="73" y="14954"/>
+                  <a:pt x="73" y="14954"/>
+                </a:cubicBezTo>
+                <a:cubicBezTo>
+                  <a:pt x="-199" y="15465"/>
+                  <a:pt x="344" y="17766"/>
+                  <a:pt x="888" y="18021"/>
+                </a:cubicBezTo>
+                <a:cubicBezTo>
+                  <a:pt x="4556" y="19555"/>
+                  <a:pt x="4556" y="19555"/>
+                  <a:pt x="4556" y="19555"/>
+                </a:cubicBezTo>
+                <a:cubicBezTo>
+                  <a:pt x="5371" y="19938"/>
+                  <a:pt x="6458" y="19683"/>
+                  <a:pt x="7001" y="18916"/>
+                </a:cubicBezTo>
+                <a:close/>
+              </a:path>
+            </a:pathLst>
+          </a:custGeom>
+          <a:solidFill>
+            <a:srgbClr val="0070C0"/>
+          </a:solidFill>
+          <a:ln w="12700" cap="flat">
+            <a:noFill/>
+            <a:miter lim="400000"/>
+          </a:ln>
+          <a:effectLst/>
+        </p:spPr>
+        <p:txBody>
+          <a:bodyPr wrap="square" lIns="91439" tIns="91439" rIns="91439" bIns="91439" numCol="1" anchor="t">
+            <a:noAutofit/>
+          </a:bodyPr>
+          <a:lstStyle/>
+          <a:p>
+            <a:endParaRPr sz="1600" dirty="0"/>
+          </a:p>
+        </p:txBody>
+      </p:sp>
+      <p:sp>
+        <p:nvSpPr>
+          <p:cNvPr id="18" name="Freeform 88"/>
+          <p:cNvSpPr/>
+          <p:nvPr/>
+        </p:nvSpPr>
+        <p:spPr>
+          <a:xfrm>
+            <a:off x="7201285" y="5161915"/>
+            <a:ext cx="398928" cy="420029"/>
+          </a:xfrm>
+          <a:custGeom>
+            <a:avLst/>
+            <a:gdLst/>
+            <a:ahLst/>
+            <a:cxnLst>
+              <a:cxn ang="0">
+                <a:pos x="wd2" y="hd2"/>
+              </a:cxn>
+              <a:cxn ang="5400000">
+                <a:pos x="wd2" y="hd2"/>
+              </a:cxn>
+              <a:cxn ang="10800000">
+                <a:pos x="wd2" y="hd2"/>
+              </a:cxn>
+              <a:cxn ang="16200000">
+                <a:pos x="wd2" y="hd2"/>
+              </a:cxn>
+            </a:cxnLst>
+            <a:rect l="0" t="0" r="r" b="b"/>
+            <a:pathLst>
+              <a:path w="21535" h="21600" extrusionOk="0">
+                <a:moveTo>
+                  <a:pt x="20500" y="0"/>
+                </a:moveTo>
+                <a:cubicBezTo>
+                  <a:pt x="12481" y="0"/>
+                  <a:pt x="12481" y="0"/>
+                  <a:pt x="12481" y="0"/>
+                </a:cubicBezTo>
+                <a:cubicBezTo>
+                  <a:pt x="11964" y="0"/>
+                  <a:pt x="11446" y="584"/>
+                  <a:pt x="11446" y="1314"/>
+                </a:cubicBezTo>
+                <a:cubicBezTo>
+                  <a:pt x="11446" y="7589"/>
+                  <a:pt x="11446" y="7589"/>
+                  <a:pt x="11446" y="7589"/>
+                </a:cubicBezTo>
+                <a:cubicBezTo>
+                  <a:pt x="11964" y="6859"/>
+                  <a:pt x="11964" y="6859"/>
+                  <a:pt x="11964" y="6859"/>
+                </a:cubicBezTo>
+                <a:cubicBezTo>
+                  <a:pt x="12222" y="6714"/>
+                  <a:pt x="12481" y="6568"/>
+                  <a:pt x="12740" y="6422"/>
+                </a:cubicBezTo>
+                <a:cubicBezTo>
+                  <a:pt x="13645" y="2919"/>
+                  <a:pt x="13645" y="2919"/>
+                  <a:pt x="13645" y="2919"/>
+                </a:cubicBezTo>
+                <a:cubicBezTo>
+                  <a:pt x="15327" y="3357"/>
+                  <a:pt x="15327" y="3357"/>
+                  <a:pt x="15327" y="3357"/>
+                </a:cubicBezTo>
+                <a:cubicBezTo>
+                  <a:pt x="14421" y="7297"/>
+                  <a:pt x="14421" y="7297"/>
+                  <a:pt x="14421" y="7297"/>
+                </a:cubicBezTo>
+                <a:cubicBezTo>
+                  <a:pt x="14680" y="7881"/>
+                  <a:pt x="14680" y="8465"/>
+                  <a:pt x="14292" y="9049"/>
+                </a:cubicBezTo>
+                <a:cubicBezTo>
+                  <a:pt x="20500" y="9049"/>
+                  <a:pt x="20500" y="9049"/>
+                  <a:pt x="20500" y="9049"/>
+                </a:cubicBezTo>
+                <a:cubicBezTo>
+                  <a:pt x="21018" y="9049"/>
+                  <a:pt x="21535" y="8465"/>
+                  <a:pt x="21535" y="7881"/>
+                </a:cubicBezTo>
+                <a:cubicBezTo>
+                  <a:pt x="21535" y="1314"/>
+                  <a:pt x="21535" y="1314"/>
+                  <a:pt x="21535" y="1314"/>
+                </a:cubicBezTo>
+                <a:cubicBezTo>
+                  <a:pt x="21535" y="584"/>
+                  <a:pt x="21018" y="0"/>
+                  <a:pt x="20500" y="0"/>
+                </a:cubicBezTo>
+                <a:close/>
+                <a:moveTo>
+                  <a:pt x="6402" y="6714"/>
+                </a:moveTo>
+                <a:cubicBezTo>
+                  <a:pt x="7437" y="6714"/>
+                  <a:pt x="8213" y="5692"/>
+                  <a:pt x="8213" y="4524"/>
+                </a:cubicBezTo>
+                <a:cubicBezTo>
+                  <a:pt x="8213" y="3357"/>
+                  <a:pt x="7437" y="2481"/>
+                  <a:pt x="6402" y="2481"/>
+                </a:cubicBezTo>
+                <a:cubicBezTo>
+                  <a:pt x="5367" y="2481"/>
+                  <a:pt x="4462" y="3357"/>
+                  <a:pt x="4462" y="4524"/>
+                </a:cubicBezTo>
+                <a:cubicBezTo>
+                  <a:pt x="4462" y="5692"/>
+                  <a:pt x="5367" y="6714"/>
+                  <a:pt x="6402" y="6714"/>
+                </a:cubicBezTo>
+                <a:close/>
+                <a:moveTo>
+                  <a:pt x="6661" y="20724"/>
+                </a:moveTo>
+                <a:cubicBezTo>
+                  <a:pt x="6661" y="21308"/>
+                  <a:pt x="7049" y="21600"/>
+                  <a:pt x="7437" y="21600"/>
+                </a:cubicBezTo>
+                <a:cubicBezTo>
+                  <a:pt x="7954" y="21600"/>
+                  <a:pt x="8213" y="21308"/>
+                  <a:pt x="8213" y="20724"/>
+                </a:cubicBezTo>
+                <a:cubicBezTo>
+                  <a:pt x="8213" y="15616"/>
+                  <a:pt x="8213" y="15616"/>
+                  <a:pt x="8213" y="15616"/>
+                </a:cubicBezTo>
+                <a:cubicBezTo>
+                  <a:pt x="6661" y="15616"/>
+                  <a:pt x="6661" y="15616"/>
+                  <a:pt x="6661" y="15616"/>
+                </a:cubicBezTo>
+                <a:lnTo>
+                  <a:pt x="6661" y="20724"/>
+                </a:lnTo>
+                <a:close/>
+                <a:moveTo>
+                  <a:pt x="4462" y="20724"/>
+                </a:moveTo>
+                <a:cubicBezTo>
+                  <a:pt x="4462" y="21308"/>
+                  <a:pt x="4850" y="21600"/>
+                  <a:pt x="5367" y="21600"/>
+                </a:cubicBezTo>
+                <a:cubicBezTo>
+                  <a:pt x="5755" y="21600"/>
+                  <a:pt x="6143" y="21308"/>
+                  <a:pt x="6143" y="20724"/>
+                </a:cubicBezTo>
+                <a:cubicBezTo>
+                  <a:pt x="6143" y="15616"/>
+                  <a:pt x="6143" y="15616"/>
+                  <a:pt x="6143" y="15616"/>
+                </a:cubicBezTo>
+                <a:cubicBezTo>
+                  <a:pt x="4462" y="15616"/>
+                  <a:pt x="4462" y="15616"/>
+                  <a:pt x="4462" y="15616"/>
+                </a:cubicBezTo>
+                <a:lnTo>
+                  <a:pt x="4462" y="20724"/>
+                </a:lnTo>
+                <a:close/>
+                <a:moveTo>
+                  <a:pt x="14551" y="4086"/>
+                </a:moveTo>
+                <a:cubicBezTo>
+                  <a:pt x="14033" y="3941"/>
+                  <a:pt x="14033" y="3941"/>
+                  <a:pt x="14033" y="3941"/>
+                </a:cubicBezTo>
+                <a:cubicBezTo>
+                  <a:pt x="13257" y="7297"/>
+                  <a:pt x="13257" y="7297"/>
+                  <a:pt x="13257" y="7297"/>
+                </a:cubicBezTo>
+                <a:cubicBezTo>
+                  <a:pt x="12998" y="7297"/>
+                  <a:pt x="12740" y="7297"/>
+                  <a:pt x="12481" y="7589"/>
+                </a:cubicBezTo>
+                <a:cubicBezTo>
+                  <a:pt x="10670" y="9632"/>
+                  <a:pt x="10670" y="9632"/>
+                  <a:pt x="10670" y="9632"/>
+                </a:cubicBezTo>
+                <a:cubicBezTo>
+                  <a:pt x="8730" y="7443"/>
+                  <a:pt x="8730" y="7443"/>
+                  <a:pt x="8730" y="7443"/>
+                </a:cubicBezTo>
+                <a:cubicBezTo>
+                  <a:pt x="8601" y="7297"/>
+                  <a:pt x="7825" y="7297"/>
+                  <a:pt x="7695" y="7297"/>
+                </a:cubicBezTo>
+                <a:cubicBezTo>
+                  <a:pt x="7695" y="7297"/>
+                  <a:pt x="7695" y="7297"/>
+                  <a:pt x="7695" y="7297"/>
+                </a:cubicBezTo>
+                <a:cubicBezTo>
+                  <a:pt x="6402" y="8465"/>
+                  <a:pt x="6402" y="8465"/>
+                  <a:pt x="6402" y="8465"/>
+                </a:cubicBezTo>
+                <a:cubicBezTo>
+                  <a:pt x="5109" y="7297"/>
+                  <a:pt x="5109" y="7297"/>
+                  <a:pt x="5109" y="7297"/>
+                </a:cubicBezTo>
+                <a:cubicBezTo>
+                  <a:pt x="5109" y="7297"/>
+                  <a:pt x="5109" y="7297"/>
+                  <a:pt x="5109" y="7297"/>
+                </a:cubicBezTo>
+                <a:cubicBezTo>
+                  <a:pt x="4979" y="7297"/>
+                  <a:pt x="4203" y="7297"/>
+                  <a:pt x="3945" y="7589"/>
+                </a:cubicBezTo>
+                <a:cubicBezTo>
+                  <a:pt x="194" y="11822"/>
+                  <a:pt x="194" y="11822"/>
+                  <a:pt x="194" y="11822"/>
+                </a:cubicBezTo>
+                <a:cubicBezTo>
+                  <a:pt x="-65" y="12114"/>
+                  <a:pt x="-65" y="12697"/>
+                  <a:pt x="194" y="12989"/>
+                </a:cubicBezTo>
+                <a:cubicBezTo>
+                  <a:pt x="582" y="13427"/>
+                  <a:pt x="970" y="13427"/>
+                  <a:pt x="1358" y="12989"/>
+                </a:cubicBezTo>
+                <a:cubicBezTo>
+                  <a:pt x="3945" y="10070"/>
+                  <a:pt x="3945" y="10070"/>
+                  <a:pt x="3945" y="10070"/>
+                </a:cubicBezTo>
+                <a:cubicBezTo>
+                  <a:pt x="3945" y="15032"/>
+                  <a:pt x="3945" y="15032"/>
+                  <a:pt x="3945" y="15032"/>
+                </a:cubicBezTo>
+                <a:cubicBezTo>
+                  <a:pt x="8730" y="15032"/>
+                  <a:pt x="8730" y="15032"/>
+                  <a:pt x="8730" y="15032"/>
+                </a:cubicBezTo>
+                <a:cubicBezTo>
+                  <a:pt x="8730" y="10070"/>
+                  <a:pt x="8730" y="10070"/>
+                  <a:pt x="8730" y="10070"/>
+                </a:cubicBezTo>
+                <a:cubicBezTo>
+                  <a:pt x="9765" y="11238"/>
+                  <a:pt x="9765" y="11238"/>
+                  <a:pt x="9765" y="11238"/>
+                </a:cubicBezTo>
+                <a:cubicBezTo>
+                  <a:pt x="10024" y="11384"/>
+                  <a:pt x="11188" y="11530"/>
+                  <a:pt x="11446" y="11238"/>
+                </a:cubicBezTo>
+                <a:cubicBezTo>
+                  <a:pt x="13645" y="8757"/>
+                  <a:pt x="13645" y="8757"/>
+                  <a:pt x="13645" y="8757"/>
+                </a:cubicBezTo>
+                <a:cubicBezTo>
+                  <a:pt x="13904" y="8465"/>
+                  <a:pt x="13904" y="8027"/>
+                  <a:pt x="13645" y="7735"/>
+                </a:cubicBezTo>
+                <a:lnTo>
+                  <a:pt x="14551" y="4086"/>
+                </a:lnTo>
+                <a:close/>
+                <a:moveTo>
+                  <a:pt x="6402" y="13573"/>
+                </a:moveTo>
+                <a:cubicBezTo>
+                  <a:pt x="5626" y="12405"/>
+                  <a:pt x="5626" y="12405"/>
+                  <a:pt x="5626" y="12405"/>
+                </a:cubicBezTo>
+                <a:cubicBezTo>
+                  <a:pt x="6402" y="8757"/>
+                  <a:pt x="6402" y="8757"/>
+                  <a:pt x="6402" y="8757"/>
+                </a:cubicBezTo>
+                <a:cubicBezTo>
+                  <a:pt x="7178" y="12405"/>
+                  <a:pt x="7178" y="12405"/>
+                  <a:pt x="7178" y="12405"/>
+                </a:cubicBezTo>
+                <a:lnTo>
+                  <a:pt x="6402" y="13573"/>
+                </a:lnTo>
+                <a:close/>
+              </a:path>
+            </a:pathLst>
+          </a:custGeom>
+          <a:solidFill>
+            <a:srgbClr val="0070C0"/>
+          </a:solidFill>
+          <a:ln w="12700" cap="flat">
+            <a:noFill/>
+            <a:miter lim="400000"/>
+          </a:ln>
+          <a:effectLst/>
+        </p:spPr>
+        <p:txBody>
+          <a:bodyPr wrap="square" lIns="91439" tIns="91439" rIns="91439" bIns="91439" numCol="1" anchor="t">
+            <a:noAutofit/>
+          </a:bodyPr>
+          <a:lstStyle/>
+          <a:p>
+            <a:endParaRPr sz="1600"/>
+          </a:p>
+        </p:txBody>
+      </p:sp>
+      <p:sp>
+        <p:nvSpPr>
+          <p:cNvPr id="2" name="文本框 1"/>
+          <p:cNvSpPr txBox="1"/>
+          <p:nvPr/>
+        </p:nvSpPr>
+        <p:spPr>
+          <a:xfrm>
+            <a:off x="3515159" y="5220746"/>
+            <a:ext cx="1822222" cy="398780"/>
+          </a:xfrm>
+          <a:prstGeom prst="rect">
+            <a:avLst/>
+          </a:prstGeom>
+          <a:noFill/>
+        </p:spPr>
+        <p:txBody>
+          <a:bodyPr wrap="square" rtlCol="0">
+            <a:spAutoFit/>
+          </a:bodyPr>
+          <a:lstStyle/>
+          <a:p>
+            <a:r>
+              <a:rPr lang="zh-CN" altLang="en-US" sz="2000" b="1" dirty="0">
+                <a:solidFill>
+                  <a:srgbClr val="0070C0"/>
+                </a:solidFill>
+                <a:latin typeface="华文楷体" panose="02010600040101010101" charset="-122"/>
+                <a:ea typeface="华文楷体" panose="02010600040101010101" charset="-122"/>
+              </a:rPr>
+              <a:t>答辩人：黄渊</a:t>
+            </a:r>
+            <a:endParaRPr lang="zh-CN" altLang="en-US" sz="2000" b="1" dirty="0">
+              <a:solidFill>
+                <a:srgbClr val="0070C0"/>
+              </a:solidFill>
+              <a:latin typeface="华文楷体" panose="02010600040101010101" charset="-122"/>
+              <a:ea typeface="华文楷体" panose="02010600040101010101" charset="-122"/>
+            </a:endParaRPr>
+          </a:p>
+        </p:txBody>
+      </p:sp>
+      <p:sp>
+        <p:nvSpPr>
+          <p:cNvPr id="19" name="文本框 18"/>
+          <p:cNvSpPr txBox="1"/>
+          <p:nvPr/>
+        </p:nvSpPr>
+        <p:spPr>
+          <a:xfrm>
+            <a:off x="7724140" y="5181600"/>
+            <a:ext cx="3275330" cy="398780"/>
+          </a:xfrm>
+          <a:prstGeom prst="rect">
+            <a:avLst/>
+          </a:prstGeom>
+          <a:noFill/>
+        </p:spPr>
+        <p:txBody>
+          <a:bodyPr wrap="square" rtlCol="0">
+            <a:spAutoFit/>
+          </a:bodyPr>
+          <a:lstStyle/>
+          <a:p>
+            <a:r>
+              <a:rPr lang="zh-CN" altLang="en-US" sz="2000" b="1" dirty="0">
+                <a:solidFill>
+                  <a:srgbClr val="0070C0"/>
+                </a:solidFill>
+                <a:latin typeface="华文楷体" panose="02010600040101010101" charset="-122"/>
+                <a:ea typeface="华文楷体" panose="02010600040101010101" charset="-122"/>
+              </a:rPr>
+              <a:t>指导教师：冯晓琴</a:t>
+            </a:r>
+            <a:r>
+              <a:rPr lang="en-US" altLang="zh-CN" sz="2000" b="1" dirty="0">
+                <a:solidFill>
+                  <a:srgbClr val="0070C0"/>
+                </a:solidFill>
+                <a:latin typeface="华文楷体" panose="02010600040101010101" charset="-122"/>
+                <a:ea typeface="华文楷体" panose="02010600040101010101" charset="-122"/>
+              </a:rPr>
+              <a:t>   </a:t>
+            </a:r>
+            <a:r>
+              <a:rPr lang="zh-CN" altLang="en-US" sz="2000" b="1" dirty="0">
+                <a:solidFill>
+                  <a:srgbClr val="0070C0"/>
+                </a:solidFill>
+                <a:latin typeface="华文楷体" panose="02010600040101010101" charset="-122"/>
+                <a:ea typeface="华文楷体" panose="02010600040101010101" charset="-122"/>
+              </a:rPr>
+              <a:t>何安平</a:t>
+            </a:r>
+            <a:endParaRPr lang="zh-CN" altLang="en-US" sz="2000" b="1" dirty="0">
+              <a:solidFill>
+                <a:srgbClr val="0070C0"/>
+              </a:solidFill>
+              <a:latin typeface="华文楷体" panose="02010600040101010101" charset="-122"/>
+              <a:ea typeface="华文楷体" panose="02010600040101010101" charset="-122"/>
+            </a:endParaRPr>
+          </a:p>
+        </p:txBody>
+      </p:sp>
+      <p:pic>
+        <p:nvPicPr>
+          <p:cNvPr id="11" name="图片 10"/>
+          <p:cNvPicPr>
+            <a:picLocks noChangeAspect="1"/>
+          </p:cNvPicPr>
+          <p:nvPr/>
+        </p:nvPicPr>
+        <p:blipFill>
+          <a:blip r:embed="rId2" cstate="print">
+            <a:extLst>
+              <a:ext uri="{28A0092B-C50C-407E-A947-70E740481C1C}">
+                <a14:useLocalDpi xmlns:a14="http://schemas.microsoft.com/office/drawing/2010/main" val="0"/>
+              </a:ext>
+            </a:extLst>
+          </a:blip>
+          <a:stretch>
+            <a:fillRect/>
+          </a:stretch>
+        </p:blipFill>
+        <p:spPr>
+          <a:xfrm>
+            <a:off x="211455" y="5698703"/>
+            <a:ext cx="967527" cy="967527"/>
+          </a:xfrm>
+          <a:prstGeom prst="rect">
+            <a:avLst/>
+          </a:prstGeom>
+        </p:spPr>
+      </p:pic>
     </p:spTree>
   </p:cSld>
   <p:clrMapOvr>
@@ -37606,9 +42317,9 @@
                 <a:effectLst/>
                 <a:uLnTx/>
                 <a:uFillTx/>
-                <a:latin typeface="Arial" panose="020B0604020202020204" pitchFamily="34" charset="0"/>
+                <a:latin typeface="Arial" panose="020B0604020202090204" pitchFamily="34" charset="0"/>
                 <a:ea typeface="华文楷体" panose="02010600040101010101" charset="-122"/>
-                <a:cs typeface="Arial" panose="020B0604020202020204" pitchFamily="34" charset="0"/>
+                <a:cs typeface="Arial" panose="020B0604020202090204" pitchFamily="34" charset="0"/>
               </a:rPr>
               <a:t>01</a:t>
             </a:r>
@@ -37622,9 +42333,9 @@
               <a:effectLst/>
               <a:uLnTx/>
               <a:uFillTx/>
-              <a:latin typeface="Arial" panose="020B0604020202020204" pitchFamily="34" charset="0"/>
+              <a:latin typeface="Arial" panose="020B0604020202090204" pitchFamily="34" charset="0"/>
               <a:ea typeface="华文楷体" panose="02010600040101010101" charset="-122"/>
-              <a:cs typeface="Arial" panose="020B0604020202020204" pitchFamily="34" charset="0"/>
+              <a:cs typeface="Arial" panose="020B0604020202090204" pitchFamily="34" charset="0"/>
             </a:endParaRPr>
           </a:p>
         </p:txBody>
@@ -41785,9 +46496,9 @@
                 <a:effectLst/>
                 <a:uLnTx/>
                 <a:uFillTx/>
-                <a:latin typeface="Arial" panose="020B0604020202020204" pitchFamily="34" charset="0"/>
+                <a:latin typeface="Arial" panose="020B0604020202090204" pitchFamily="34" charset="0"/>
                 <a:ea typeface="华文楷体" panose="02010600040101010101" charset="-122"/>
-                <a:cs typeface="Arial" panose="020B0604020202020204" pitchFamily="34" charset="0"/>
+                <a:cs typeface="Arial" panose="020B0604020202090204" pitchFamily="34" charset="0"/>
               </a:rPr>
               <a:t>02</a:t>
             </a:r>
@@ -41801,9 +46512,9 @@
               <a:effectLst/>
               <a:uLnTx/>
               <a:uFillTx/>
-              <a:latin typeface="Arial" panose="020B0604020202020204" pitchFamily="34" charset="0"/>
+              <a:latin typeface="Arial" panose="020B0604020202090204" pitchFamily="34" charset="0"/>
               <a:ea typeface="华文楷体" panose="02010600040101010101" charset="-122"/>
-              <a:cs typeface="Arial" panose="020B0604020202020204" pitchFamily="34" charset="0"/>
+              <a:cs typeface="Arial" panose="020B0604020202090204" pitchFamily="34" charset="0"/>
             </a:endParaRPr>
           </a:p>
         </p:txBody>
@@ -44694,9 +49405,9 @@
                 <a:effectLst/>
                 <a:uLnTx/>
                 <a:uFillTx/>
-                <a:latin typeface="Arial" panose="020B0604020202020204" pitchFamily="34" charset="0"/>
+                <a:latin typeface="Arial" panose="020B0604020202090204" pitchFamily="34" charset="0"/>
                 <a:ea typeface="华文楷体" panose="02010600040101010101" charset="-122"/>
-                <a:cs typeface="Arial" panose="020B0604020202020204" pitchFamily="34" charset="0"/>
+                <a:cs typeface="Arial" panose="020B0604020202090204" pitchFamily="34" charset="0"/>
               </a:rPr>
               <a:t>03</a:t>
             </a:r>
@@ -44710,9 +49421,9 @@
               <a:effectLst/>
               <a:uLnTx/>
               <a:uFillTx/>
-              <a:latin typeface="Arial" panose="020B0604020202020204" pitchFamily="34" charset="0"/>
+              <a:latin typeface="Arial" panose="020B0604020202090204" pitchFamily="34" charset="0"/>
               <a:ea typeface="华文楷体" panose="02010600040101010101" charset="-122"/>
-              <a:cs typeface="Arial" panose="020B0604020202020204" pitchFamily="34" charset="0"/>
+              <a:cs typeface="Arial" panose="020B0604020202090204" pitchFamily="34" charset="0"/>
             </a:endParaRPr>
           </a:p>
         </p:txBody>
@@ -44791,33 +49502,20 @@
         <p:cNvGrpSpPr/>
         <p:nvPr/>
       </p:nvGrpSpPr>
-      <p:grpSpPr>
-        <a:xfrm>
-          <a:off x="0" y="0"/>
-          <a:ext cx="0" cy="0"/>
-          <a:chOff x="0" y="0"/>
-          <a:chExt cx="0" cy="0"/>
-        </a:xfrm>
-      </p:grpSpPr>
+      <p:grpSpPr/>
       <p:sp>
         <p:nvSpPr>
-          <p:cNvPr id="21" name="标题 20"/>
+          <p:cNvPr id="2" name="标题 1"/>
           <p:cNvSpPr>
             <a:spLocks noGrp="1"/>
           </p:cNvSpPr>
           <p:nvPr>
             <p:ph type="title"/>
-            <p:custDataLst>
-              <p:tags r:id="rId1"/>
-            </p:custDataLst>
           </p:nvPr>
         </p:nvSpPr>
         <p:spPr/>
         <p:txBody>
-          <a:bodyPr>
-            <a:normAutofit fontScale="90000"/>
-          </a:bodyPr>
-          <a:lstStyle/>
+          <a:bodyPr/>
           <a:p>
             <a:r>
               <a:rPr lang="zh-CN" altLang="en-US"/>
@@ -44833,7 +49531,7 @@
       </p:sp>
       <p:sp>
         <p:nvSpPr>
-          <p:cNvPr id="2" name="灯片编号占位符 1"/>
+          <p:cNvPr id="4" name="灯片编号占位符 3"/>
           <p:cNvSpPr>
             <a:spLocks noGrp="1"/>
           </p:cNvSpPr>
@@ -44852,6 +49550,30 @@
           </a:p>
         </p:txBody>
       </p:sp>
+      <p:pic>
+        <p:nvPicPr>
+          <p:cNvPr id="13" name="图片 13" descr="Snipaste_2026-03-19_15-37-29"/>
+          <p:cNvPicPr>
+            <a:picLocks noChangeAspect="1"/>
+          </p:cNvPicPr>
+          <p:nvPr/>
+        </p:nvPicPr>
+        <p:blipFill>
+          <a:blip r:embed="rId1"/>
+          <a:stretch>
+            <a:fillRect/>
+          </a:stretch>
+        </p:blipFill>
+        <p:spPr>
+          <a:xfrm>
+            <a:off x="1009650" y="1104265"/>
+            <a:ext cx="9756140" cy="5095875"/>
+          </a:xfrm>
+          <a:prstGeom prst="rect">
+            <a:avLst/>
+          </a:prstGeom>
+        </p:spPr>
+      </p:pic>
     </p:spTree>
     <p:custDataLst>
       <p:tags r:id="rId2"/>
@@ -45003,6 +49725,14 @@
 
 <file path=ppt/tags/tag30.xml><?xml version="1.0" encoding="utf-8"?>
 <p:tagLst xmlns:p="http://schemas.openxmlformats.org/presentationml/2006/main">
+  <p:tag name="KSO_WM_BEAUTIFY_FLAG" val="#wm#"/>
+  <p:tag name="KSO_WM_TEMPLATE_CATEGORY" val="diagram"/>
+  <p:tag name="KSO_WM_TEMPLATE_INDEX" val="20232459"/>
+</p:tagLst>
+</file>
+
+<file path=ppt/tags/tag31.xml><?xml version="1.0" encoding="utf-8"?>
+<p:tagLst xmlns:p="http://schemas.openxmlformats.org/presentationml/2006/main">
   <p:tag name="KSO_WM_UNIT_ISCONTENTSTITLE" val="0"/>
   <p:tag name="KSO_WM_UNIT_ISNUMDGMTITLE" val="0"/>
   <p:tag name="KSO_WM_UNIT_NOCLEAR" val="0"/>
@@ -45027,7 +49757,7 @@
 </p:tagLst>
 </file>
 
-<file path=ppt/tags/tag31.xml><?xml version="1.0" encoding="utf-8"?>
+<file path=ppt/tags/tag32.xml><?xml version="1.0" encoding="utf-8"?>
 <p:tagLst xmlns:p="http://schemas.openxmlformats.org/presentationml/2006/main">
   <p:tag name="KSO_WM_SLIDE_ID" val="diagram20232459_2"/>
   <p:tag name="KSO_WM_TEMPLATE_SUBCATEGORY" val="0"/>
@@ -45051,22 +49781,94 @@
 </p:tagLst>
 </file>
 
-<file path=ppt/tags/tag32.xml><?xml version="1.0" encoding="utf-8"?>
+<file path=ppt/tags/tag33.xml><?xml version="1.0" encoding="utf-8"?>
 <p:tagLst xmlns:p="http://schemas.openxmlformats.org/presentationml/2006/main">
-  <p:tag name="KSO_WM_SLIDE_ITEM_CNT" val="4"/>
+  <p:tag name="KSO_WM_BEAUTIFY_FLAG" val="#wm#"/>
+  <p:tag name="KSO_WM_TEMPLATE_CATEGORY" val="diagram"/>
+  <p:tag name="KSO_WM_TEMPLATE_INDEX" val="20232459"/>
+  <p:tag name="resource_record_key" val="{&quot;10&quot;:[50059560],&quot;65&quot;:[20232459]}"/>
 </p:tagLst>
 </file>
 
-<file path=ppt/tags/tag33.xml><?xml version="1.0" encoding="utf-8"?>
+<file path=ppt/tags/tag34.xml><?xml version="1.0" encoding="utf-8"?>
 <p:tagLst xmlns:p="http://schemas.openxmlformats.org/presentationml/2006/main">
-  <p:tag name="commondata" val="eyJoZGlkIjoiYzM2Mzc3YzdjNDIyYjRjNTY5MzM3YmJhYWYwZGNmOGQifQ=="/>
-  <p:tag name="resource_record_key" val="{&quot;70&quot;:[3314671,3332763,3333015,3314187,3312559]}"/>
+  <p:tag name="TABLE_ENDDRAG_ORIGIN_RECT" val="624*345"/>
+  <p:tag name="TABLE_ENDDRAG_RECT" val="182*112*624*345"/>
+</p:tagLst>
+</file>
+
+<file path=ppt/tags/tag35.xml><?xml version="1.0" encoding="utf-8"?>
+<p:tagLst xmlns:p="http://schemas.openxmlformats.org/presentationml/2006/main">
+  <p:tag name="KSO_WM_BEAUTIFY_FLAG" val="#wm#"/>
+  <p:tag name="KSO_WM_TEMPLATE_CATEGORY" val="diagram"/>
+  <p:tag name="KSO_WM_TEMPLATE_INDEX" val="20232459"/>
+</p:tagLst>
+</file>
+
+<file path=ppt/tags/tag36.xml><?xml version="1.0" encoding="utf-8"?>
+<p:tagLst xmlns:p="http://schemas.openxmlformats.org/presentationml/2006/main">
+  <p:tag name="KSO_WM_BEAUTIFY_FLAG" val="#wm#"/>
+  <p:tag name="KSO_WM_TEMPLATE_CATEGORY" val="diagram"/>
+  <p:tag name="KSO_WM_TEMPLATE_INDEX" val="20232459"/>
+  <p:tag name="resource_record_key" val="{&quot;29&quot;:[50053008],&quot;65&quot;:[20232459]}"/>
+</p:tagLst>
+</file>
+
+<file path=ppt/tags/tag37.xml><?xml version="1.0" encoding="utf-8"?>
+<p:tagLst xmlns:p="http://schemas.openxmlformats.org/presentationml/2006/main">
+  <p:tag name="TABLE_ENDDRAG_ORIGIN_RECT" val="926*301"/>
+  <p:tag name="TABLE_ENDDRAG_RECT" val="24*160*926*301"/>
+</p:tagLst>
+</file>
+
+<file path=ppt/tags/tag38.xml><?xml version="1.0" encoding="utf-8"?>
+<p:tagLst xmlns:p="http://schemas.openxmlformats.org/presentationml/2006/main">
+  <p:tag name="KSO_WM_BEAUTIFY_FLAG" val="#wm#"/>
+  <p:tag name="KSO_WM_TEMPLATE_CATEGORY" val="diagram"/>
+  <p:tag name="KSO_WM_TEMPLATE_INDEX" val="20232459"/>
+</p:tagLst>
+</file>
+
+<file path=ppt/tags/tag39.xml><?xml version="1.0" encoding="utf-8"?>
+<p:tagLst xmlns:p="http://schemas.openxmlformats.org/presentationml/2006/main">
+  <p:tag name="KSO_WM_BEAUTIFY_FLAG" val="#wm#"/>
+  <p:tag name="KSO_WM_TEMPLATE_CATEGORY" val="diagram"/>
+  <p:tag name="KSO_WM_TEMPLATE_INDEX" val="20232459"/>
 </p:tagLst>
 </file>
 
 <file path=ppt/tags/tag4.xml><?xml version="1.0" encoding="utf-8"?>
 <p:tagLst xmlns:p="http://schemas.openxmlformats.org/presentationml/2006/main">
   <p:tag name="KSO_WM_DIAGRAM_VIRTUALLY_FRAME" val="{&quot;height&quot;:179.3292125984252,&quot;left&quot;:131.45385826771653,&quot;top&quot;:232.45535433070867,&quot;width&quot;:700.7390551181103}"/>
+</p:tagLst>
+</file>
+
+<file path=ppt/tags/tag40.xml><?xml version="1.0" encoding="utf-8"?>
+<p:tagLst xmlns:p="http://schemas.openxmlformats.org/presentationml/2006/main">
+  <p:tag name="KSO_WM_BEAUTIFY_FLAG" val="#wm#"/>
+  <p:tag name="KSO_WM_TEMPLATE_CATEGORY" val="diagram"/>
+  <p:tag name="KSO_WM_TEMPLATE_INDEX" val="20232459"/>
+</p:tagLst>
+</file>
+
+<file path=ppt/tags/tag41.xml><?xml version="1.0" encoding="utf-8"?>
+<p:tagLst xmlns:p="http://schemas.openxmlformats.org/presentationml/2006/main">
+  <p:tag name="KSO_WM_BEAUTIFY_FLAG" val="#wm#"/>
+  <p:tag name="KSO_WM_TEMPLATE_CATEGORY" val="diagram"/>
+  <p:tag name="KSO_WM_TEMPLATE_INDEX" val="20232459"/>
+</p:tagLst>
+</file>
+
+<file path=ppt/tags/tag42.xml><?xml version="1.0" encoding="utf-8"?>
+<p:tagLst xmlns:p="http://schemas.openxmlformats.org/presentationml/2006/main">
+  <p:tag name="KSO_WM_SLIDE_ITEM_CNT" val="4"/>
+</p:tagLst>
+</file>
+
+<file path=ppt/tags/tag43.xml><?xml version="1.0" encoding="utf-8"?>
+<p:tagLst xmlns:p="http://schemas.openxmlformats.org/presentationml/2006/main">
+  <p:tag name="commondata" val="eyJoZGlkIjoiYzM2Mzc3YzdjNDIyYjRjNTY5MzM3YmJhYWYwZGNmOGQifQ=="/>
+  <p:tag name="resource_record_key" val="{&quot;10&quot;:[50059560],&quot;29&quot;:[50053008],&quot;65&quot;:[20232459],&quot;70&quot;:[3314671,3332763,3333015,3314187,3312559]}"/>
 </p:tagLst>
 </file>
 
